--- a/evaluation/dashboard/public/decks/uxl-skills-maintainer-overview.pptx
+++ b/evaluation/dashboard/public/decks/uxl-skills-maintainer-overview.pptx
@@ -2,27 +2,26 @@
 <file path=ppt/presentation.xml><?xml version="1.0" encoding="utf-8"?>
 <p:presentation xmlns:p="http://schemas.openxmlformats.org/presentationml/2006/main">
   <p:sldMasterIdLst>
-    <p:sldMasterId xmlns:r="http://schemas.openxmlformats.org/officeDocument/2006/relationships" id="2147483648" r:id="Rb04ab14f6340413d"/>
-    <p:sldMasterId xmlns:r="http://schemas.openxmlformats.org/officeDocument/2006/relationships" id="2147483665" r:id="R9ef28bf0220847af"/>
+    <p:sldMasterId xmlns:r="http://schemas.openxmlformats.org/officeDocument/2006/relationships" id="2147483648" r:id="Rb7987ec1b83443e2"/>
+    <p:sldMasterId xmlns:r="http://schemas.openxmlformats.org/officeDocument/2006/relationships" id="2147483665" r:id="R3f71cc09775c4d41"/>
   </p:sldMasterIdLst>
   <p:notesMasterIdLst>
-    <p:notesMasterId xmlns:r="http://schemas.openxmlformats.org/officeDocument/2006/relationships" r:id="R1045e4d21f9d45cb"/>
+    <p:notesMasterId xmlns:r="http://schemas.openxmlformats.org/officeDocument/2006/relationships" r:id="R006e1c0d7bfc41d0"/>
   </p:notesMasterIdLst>
   <p:sldIdLst>
-    <p:sldId xmlns:r="http://schemas.openxmlformats.org/officeDocument/2006/relationships" id="256" r:id="Rdbf65bf85e3e419a"/>
-    <p:sldId xmlns:r="http://schemas.openxmlformats.org/officeDocument/2006/relationships" id="257" r:id="Ra1cfdfc77c1a4a06"/>
-    <p:sldId xmlns:r="http://schemas.openxmlformats.org/officeDocument/2006/relationships" id="258" r:id="R7849342483df4203"/>
-    <p:sldId xmlns:r="http://schemas.openxmlformats.org/officeDocument/2006/relationships" id="259" r:id="R3ca2e63c9c72454d"/>
-    <p:sldId xmlns:r="http://schemas.openxmlformats.org/officeDocument/2006/relationships" id="260" r:id="R1604e088bc434c66"/>
-    <p:sldId xmlns:r="http://schemas.openxmlformats.org/officeDocument/2006/relationships" id="261" r:id="R808c294f49fc4c7e"/>
-    <p:sldId xmlns:r="http://schemas.openxmlformats.org/officeDocument/2006/relationships" id="262" r:id="R6bb97aaef4964d6b"/>
-    <p:sldId xmlns:r="http://schemas.openxmlformats.org/officeDocument/2006/relationships" id="263" r:id="R64e7ae382900412d"/>
-    <p:sldId xmlns:r="http://schemas.openxmlformats.org/officeDocument/2006/relationships" id="264" r:id="Rf5b8753be56147b2"/>
-    <p:sldId xmlns:r="http://schemas.openxmlformats.org/officeDocument/2006/relationships" id="265" r:id="R561d481371bc4bf5"/>
-    <p:sldId xmlns:r="http://schemas.openxmlformats.org/officeDocument/2006/relationships" id="266" r:id="R78ce0dfbc3dd4cc4"/>
-    <p:sldId xmlns:r="http://schemas.openxmlformats.org/officeDocument/2006/relationships" id="267" r:id="R7ccdf4035d594eb3"/>
-    <p:sldId xmlns:r="http://schemas.openxmlformats.org/officeDocument/2006/relationships" id="268" r:id="R0e6f8d53c52d46fa"/>
-    <p:sldId xmlns:r="http://schemas.openxmlformats.org/officeDocument/2006/relationships" id="269" r:id="R4d62926fd4eb4f05"/>
+    <p:sldId xmlns:r="http://schemas.openxmlformats.org/officeDocument/2006/relationships" id="256" r:id="Rd68fa7d113a44cb7"/>
+    <p:sldId xmlns:r="http://schemas.openxmlformats.org/officeDocument/2006/relationships" id="257" r:id="Rdf728d02f3b34286"/>
+    <p:sldId xmlns:r="http://schemas.openxmlformats.org/officeDocument/2006/relationships" id="258" r:id="R363bc56305524a17"/>
+    <p:sldId xmlns:r="http://schemas.openxmlformats.org/officeDocument/2006/relationships" id="259" r:id="R9e4eaeb703cd489b"/>
+    <p:sldId xmlns:r="http://schemas.openxmlformats.org/officeDocument/2006/relationships" id="260" r:id="R57934278e2154449"/>
+    <p:sldId xmlns:r="http://schemas.openxmlformats.org/officeDocument/2006/relationships" id="261" r:id="R0ae8eede21e3454a"/>
+    <p:sldId xmlns:r="http://schemas.openxmlformats.org/officeDocument/2006/relationships" id="262" r:id="R74045f904dbe4b5a"/>
+    <p:sldId xmlns:r="http://schemas.openxmlformats.org/officeDocument/2006/relationships" id="263" r:id="R713fef35e0af47e9"/>
+    <p:sldId xmlns:r="http://schemas.openxmlformats.org/officeDocument/2006/relationships" id="264" r:id="R318cc05d65ef47f9"/>
+    <p:sldId xmlns:r="http://schemas.openxmlformats.org/officeDocument/2006/relationships" id="265" r:id="R9d786669acaf49f3"/>
+    <p:sldId xmlns:r="http://schemas.openxmlformats.org/officeDocument/2006/relationships" id="266" r:id="Rb6ab8f3aab034b5b"/>
+    <p:sldId xmlns:r="http://schemas.openxmlformats.org/officeDocument/2006/relationships" id="267" r:id="R0838bc8c3d5b40d4"/>
+    <p:sldId xmlns:r="http://schemas.openxmlformats.org/officeDocument/2006/relationships" id="268" r:id="R67704bed905345a0"/>
   </p:sldIdLst>
   <p:sldSz cx="12192000" cy="6858000"/>
   <p:notesSz cx="6858000" cy="9144000"/>
@@ -656,7 +655,7 @@
           </a:p>
           <a:p xmlns:a="http://schemas.openxmlformats.org/drawingml/2006/main">
             <a:r>
-              <a:t>Speaker cue: Maintainer pushback is expected — and the answer is scoped evidence</a:t>
+              <a:t>Speaker cue: Hardware is a pluggable evidence lane — never the product</a:t>
             </a:r>
           </a:p>
         </p:txBody>
@@ -776,7 +775,7 @@
           </a:p>
           <a:p xmlns:a="http://schemas.openxmlformats.org/drawingml/2006/main">
             <a:r>
-              <a:t>Speaker cue: Hardware is a pluggable evidence lane — never the product</a:t>
+              <a:t>Speaker cue: The ongoing maintainer workflow fits normal GitHub practice</a:t>
             </a:r>
           </a:p>
         </p:txBody>
@@ -896,7 +895,7 @@
           </a:p>
           <a:p xmlns:a="http://schemas.openxmlformats.org/drawingml/2006/main">
             <a:r>
-              <a:t>Speaker cue: The ongoing maintainer workflow fits normal GitHub practice</a:t>
+              <a:t>Speaker cue: Ownership is intentionally split</a:t>
             </a:r>
           </a:p>
         </p:txBody>
@@ -1016,126 +1015,6 @@
           </a:p>
           <a:p xmlns:a="http://schemas.openxmlformats.org/drawingml/2006/main">
             <a:r>
-              <a:t>Speaker cue: Ownership is intentionally split</a:t>
-            </a:r>
-          </a:p>
-        </p:txBody>
-      </p:sp>
-      <p:sp>
-        <p:nvSpPr>
-          <p:cNvPr id="4" name="Slide Number Placeholder 3"/>
-          <p:cNvSpPr>
-            <a:spLocks xmlns:a="http://schemas.openxmlformats.org/drawingml/2006/main" noGrp="1"/>
-          </p:cNvSpPr>
-          <p:nvPr>
-            <p:ph type="sldNum" idx="5"/>
-          </p:nvPr>
-        </p:nvSpPr>
-        <p:spPr/>
-        <p:txBody>
-          <a:bodyPr xmlns:a="http://schemas.openxmlformats.org/drawingml/2006/main"/>
-          <a:lstStyle xmlns:a="http://schemas.openxmlformats.org/drawingml/2006/main"/>
-          <a:p xmlns:a="http://schemas.openxmlformats.org/drawingml/2006/main"/>
-        </p:txBody>
-      </p:sp>
-    </p:spTree>
-  </p:cSld>
-  <p:clrMapOvr>
-    <a:masterClrMapping xmlns:a="http://schemas.openxmlformats.org/drawingml/2006/main"/>
-  </p:clrMapOvr>
-</p:notes>
-</file>
-
-<file path=ppt/notesSlides/notesSlide14.xml><?xml version="1.0" encoding="utf-8"?>
-<p:notes xmlns:p="http://schemas.openxmlformats.org/presentationml/2006/main">
-  <p:cSld>
-    <p:spTree>
-      <p:nvGrpSpPr>
-        <p:cNvPr id="1" name=""/>
-        <p:cNvGrpSpPr/>
-        <p:nvPr/>
-      </p:nvGrpSpPr>
-      <p:grpSpPr>
-        <a:xfrm xmlns:a="http://schemas.openxmlformats.org/drawingml/2006/main"/>
-      </p:grpSpPr>
-      <p:sp>
-        <p:nvSpPr>
-          <p:cNvPr id="2" name="Slide Image Placeholder 1"/>
-          <p:cNvSpPr>
-            <a:spLocks xmlns:a="http://schemas.openxmlformats.org/drawingml/2006/main" noGrp="1"/>
-          </p:cNvSpPr>
-          <p:nvPr>
-            <p:ph type="sldImg" idx="0"/>
-          </p:nvPr>
-        </p:nvSpPr>
-        <p:spPr/>
-      </p:sp>
-      <p:sp>
-        <p:nvSpPr>
-          <p:cNvPr id="3" name="Notes Placeholder 2"/>
-          <p:cNvSpPr>
-            <a:spLocks xmlns:a="http://schemas.openxmlformats.org/drawingml/2006/main" noGrp="1"/>
-          </p:cNvSpPr>
-          <p:nvPr>
-            <p:ph type="body" idx="1"/>
-          </p:nvPr>
-        </p:nvSpPr>
-        <p:spPr/>
-        <p:txBody>
-          <a:bodyPr xmlns:a="http://schemas.openxmlformats.org/drawingml/2006/main"/>
-          <a:lstStyle xmlns:a="http://schemas.openxmlformats.org/drawingml/2006/main"/>
-          <a:p xmlns:a="http://schemas.openxmlformats.org/drawingml/2006/main">
-            <a:r>
-              <a:t>[Sources]</a:t>
-            </a:r>
-          </a:p>
-          <a:p xmlns:a="http://schemas.openxmlformats.org/drawingml/2006/main">
-            <a:r>
-              <a:t>- https://github.com/uxlfoundation/skills/blob/main/skills.yaml</a:t>
-            </a:r>
-          </a:p>
-          <a:p xmlns:a="http://schemas.openxmlformats.org/drawingml/2006/main">
-            <a:r>
-              <a:t>- https://github.com/uxlfoundation/skills/blob/main/evaluation/harbor/suites.json</a:t>
-            </a:r>
-          </a:p>
-          <a:p xmlns:a="http://schemas.openxmlformats.org/drawingml/2006/main">
-            <a:r>
-              <a:t>- https://github.com/uxlfoundation/skills/blob/main/evaluation/harbor/EVALUATOR_POLICY.md</a:t>
-            </a:r>
-          </a:p>
-          <a:p xmlns:a="http://schemas.openxmlformats.org/drawingml/2006/main">
-            <a:r>
-              <a:t>- https://uxlfoundation.github.io/skills/</a:t>
-            </a:r>
-          </a:p>
-          <a:p xmlns:a="http://schemas.openxmlformats.org/drawingml/2006/main">
-            <a:r>
-              <a:t>- https://github.com/uxlfoundation/skills/blob/main/docs/evaluator-operator-guide.md</a:t>
-            </a:r>
-          </a:p>
-          <a:p xmlns:a="http://schemas.openxmlformats.org/drawingml/2006/main">
-            <a:r>
-              <a:t>- https://github.com/uxlfoundation/skills/blob/main/docs/forward-testing.md</a:t>
-            </a:r>
-          </a:p>
-          <a:p xmlns:a="http://schemas.openxmlformats.org/drawingml/2006/main">
-            <a:r>
-              <a:t>- https://github.com/uxlfoundation/skills/blob/main/docs/release-and-promotion-policy.md</a:t>
-            </a:r>
-          </a:p>
-          <a:p xmlns:a="http://schemas.openxmlformats.org/drawingml/2006/main">
-            <a:r>
-              <a:t>[/Sources]</a:t>
-            </a:r>
-          </a:p>
-          <a:p xmlns:a="http://schemas.openxmlformats.org/drawingml/2006/main">
-            <a:r>
-              <a:t/>
-            </a:r>
-          </a:p>
-          <a:p xmlns:a="http://schemas.openxmlformats.org/drawingml/2006/main">
-            <a:r>
               <a:t>Speaker cue: The decision we need from each project</a:t>
             </a:r>
           </a:p>
@@ -1256,7 +1135,7 @@
           </a:p>
           <a:p xmlns:a="http://schemas.openxmlformats.org/drawingml/2006/main">
             <a:r>
-              <a:t>Speaker cue: Why project maintainers should care</a:t>
+              <a:t>Speaker cue: What exists today</a:t>
             </a:r>
           </a:p>
         </p:txBody>
@@ -1376,7 +1255,7 @@
           </a:p>
           <a:p xmlns:a="http://schemas.openxmlformats.org/drawingml/2006/main">
             <a:r>
-              <a:t>Speaker cue: What exists today</a:t>
+              <a:t>Speaker cue: The current skill catalog — at a glance</a:t>
             </a:r>
           </a:p>
         </p:txBody>
@@ -1496,7 +1375,7 @@
           </a:p>
           <a:p xmlns:a="http://schemas.openxmlformats.org/drawingml/2006/main">
             <a:r>
-              <a:t>Speaker cue: The current skill catalog — at a glance</a:t>
+              <a:t>Speaker cue: Architecture: project knowledge becomes measured evidence</a:t>
             </a:r>
           </a:p>
         </p:txBody>
@@ -1616,7 +1495,7 @@
           </a:p>
           <a:p xmlns:a="http://schemas.openxmlformats.org/drawingml/2006/main">
             <a:r>
-              <a:t>Speaker cue: Architecture: project knowledge becomes measured evidence</a:t>
+              <a:t>Speaker cue: The public control room answers: are the skills healthy?</a:t>
             </a:r>
           </a:p>
         </p:txBody>
@@ -1736,7 +1615,7 @@
           </a:p>
           <a:p xmlns:a="http://schemas.openxmlformats.org/drawingml/2006/main">
             <a:r>
-              <a:t>Speaker cue: The public control room answers: are the skills healthy?</a:t>
+              <a:t>Speaker cue: Maintainers can drill from portfolio to exact task contracts</a:t>
             </a:r>
           </a:p>
         </p:txBody>
@@ -1856,7 +1735,7 @@
           </a:p>
           <a:p xmlns:a="http://schemas.openxmlformats.org/drawingml/2006/main">
             <a:r>
-              <a:t>Speaker cue: Maintainers can drill from portfolio to exact task contracts</a:t>
+              <a:t>Speaker cue: The methodology is deliberately claim-resistant</a:t>
             </a:r>
           </a:p>
         </p:txBody>
@@ -1976,7 +1855,7 @@
           </a:p>
           <a:p xmlns:a="http://schemas.openxmlformats.org/drawingml/2006/main">
             <a:r>
-              <a:t>Speaker cue: The methodology is deliberately claim-resistant</a:t>
+              <a:t>Speaker cue: Every claim lives inside a matched evaluation cell</a:t>
             </a:r>
           </a:p>
         </p:txBody>
@@ -2096,7 +1975,7 @@
           </a:p>
           <a:p xmlns:a="http://schemas.openxmlformats.org/drawingml/2006/main">
             <a:r>
-              <a:t>Speaker cue: Every claim lives inside a matched evaluation cell</a:t>
+              <a:t>Speaker cue: Maintainer pushback is expected — and the answer is scoped evidence</a:t>
             </a:r>
           </a:p>
         </p:txBody>
@@ -2132,7 +2011,7 @@
     <p:bg>
       <p:bgPr>
         <a:blipFill xmlns:a="http://schemas.openxmlformats.org/drawingml/2006/main">
-          <a:blip xmlns:r="http://schemas.openxmlformats.org/officeDocument/2006/relationships" r:embed="Rcf79fd9e4db742d2">
+          <a:blip xmlns:r="http://schemas.openxmlformats.org/officeDocument/2006/relationships" r:embed="R8bef3cc9f43d4e4a">
             <a:alphaModFix/>
           </a:blip>
           <a:stretch>
@@ -2567,7 +2446,7 @@
           <p:nvPr/>
         </p:nvPicPr>
         <p:blipFill rotWithShape="1">
-          <a:blip xmlns:r="http://schemas.openxmlformats.org/officeDocument/2006/relationships" xmlns:a="http://schemas.openxmlformats.org/drawingml/2006/main" r:embed="R1dd5e10cbe6f411f">
+          <a:blip xmlns:r="http://schemas.openxmlformats.org/officeDocument/2006/relationships" xmlns:a="http://schemas.openxmlformats.org/drawingml/2006/main" r:embed="Rd30caa5cbe1f41de">
             <a:alphaModFix/>
           </a:blip>
           <a:srcRect xmlns:a="http://schemas.openxmlformats.org/drawingml/2006/main" l="0" t="0" r="0" b="0"/>
@@ -2597,7 +2476,7 @@
     <p:bg>
       <p:bgPr>
         <a:blipFill xmlns:a="http://schemas.openxmlformats.org/drawingml/2006/main">
-          <a:blip xmlns:r="http://schemas.openxmlformats.org/officeDocument/2006/relationships" r:embed="R05e5a47907594ebf">
+          <a:blip xmlns:r="http://schemas.openxmlformats.org/officeDocument/2006/relationships" r:embed="Rf4d09a2fc6594a24">
             <a:alphaModFix/>
           </a:blip>
           <a:stretch>
@@ -3631,7 +3510,7 @@
           <p:nvPr/>
         </p:nvPicPr>
         <p:blipFill rotWithShape="1">
-          <a:blip xmlns:r="http://schemas.openxmlformats.org/officeDocument/2006/relationships" xmlns:a="http://schemas.openxmlformats.org/drawingml/2006/main" r:embed="R4b61acefd88c40a8">
+          <a:blip xmlns:r="http://schemas.openxmlformats.org/officeDocument/2006/relationships" xmlns:a="http://schemas.openxmlformats.org/drawingml/2006/main" r:embed="R6ecd06b6a01b4aab">
             <a:alphaModFix/>
           </a:blip>
           <a:srcRect xmlns:a="http://schemas.openxmlformats.org/drawingml/2006/main" l="0" t="0" r="0" b="0"/>
@@ -4655,7 +4534,7 @@
           <p:nvPr/>
         </p:nvPicPr>
         <p:blipFill rotWithShape="1">
-          <a:blip xmlns:r="http://schemas.openxmlformats.org/officeDocument/2006/relationships" xmlns:a="http://schemas.openxmlformats.org/drawingml/2006/main" r:embed="R623a0f55902243c0">
+          <a:blip xmlns:r="http://schemas.openxmlformats.org/officeDocument/2006/relationships" xmlns:a="http://schemas.openxmlformats.org/drawingml/2006/main" r:embed="R74739ae64f814862">
             <a:alphaModFix/>
           </a:blip>
           <a:srcRect xmlns:a="http://schemas.openxmlformats.org/drawingml/2006/main" l="0" t="0" r="0" b="0"/>
@@ -4685,7 +4564,7 @@
     <p:bg>
       <p:bgPr>
         <a:blipFill xmlns:a="http://schemas.openxmlformats.org/drawingml/2006/main">
-          <a:blip xmlns:r="http://schemas.openxmlformats.org/officeDocument/2006/relationships" r:embed="Rf810028b821c4a25">
+          <a:blip xmlns:r="http://schemas.openxmlformats.org/officeDocument/2006/relationships" r:embed="Rcb5d5643b1814a6b">
             <a:alphaModFix/>
           </a:blip>
           <a:stretch>
@@ -5959,7 +5838,7 @@
           <p:nvPr/>
         </p:nvPicPr>
         <p:blipFill rotWithShape="1">
-          <a:blip xmlns:r="http://schemas.openxmlformats.org/officeDocument/2006/relationships" xmlns:a="http://schemas.openxmlformats.org/drawingml/2006/main" r:embed="R277bf6f8d1d64781">
+          <a:blip xmlns:r="http://schemas.openxmlformats.org/officeDocument/2006/relationships" xmlns:a="http://schemas.openxmlformats.org/drawingml/2006/main" r:embed="R52b558c63907415a">
             <a:alphaModFix/>
           </a:blip>
           <a:srcRect xmlns:a="http://schemas.openxmlformats.org/drawingml/2006/main" l="0" t="0" r="0" b="0"/>
@@ -9203,7 +9082,7 @@
           <p:nvPr/>
         </p:nvPicPr>
         <p:blipFill rotWithShape="1">
-          <a:blip xmlns:r="http://schemas.openxmlformats.org/officeDocument/2006/relationships" xmlns:a="http://schemas.openxmlformats.org/drawingml/2006/main" r:embed="R497cff937ccb4401">
+          <a:blip xmlns:r="http://schemas.openxmlformats.org/officeDocument/2006/relationships" xmlns:a="http://schemas.openxmlformats.org/drawingml/2006/main" r:embed="R04de7e73c9fc4767">
             <a:alphaModFix/>
           </a:blip>
           <a:srcRect xmlns:a="http://schemas.openxmlformats.org/drawingml/2006/main" l="0" t="0" r="0" b="0"/>
@@ -10941,7 +10820,7 @@
           <p:nvPr/>
         </p:nvPicPr>
         <p:blipFill rotWithShape="1">
-          <a:blip xmlns:r="http://schemas.openxmlformats.org/officeDocument/2006/relationships" xmlns:a="http://schemas.openxmlformats.org/drawingml/2006/main" r:embed="R5fba98e0394c41e5">
+          <a:blip xmlns:r="http://schemas.openxmlformats.org/officeDocument/2006/relationships" xmlns:a="http://schemas.openxmlformats.org/drawingml/2006/main" r:embed="Rf9640843d37a4ad4">
             <a:alphaModFix/>
           </a:blip>
           <a:srcRect xmlns:a="http://schemas.openxmlformats.org/drawingml/2006/main" l="0" t="0" r="0" b="0"/>
@@ -17770,7 +17649,7 @@
     <p:bg>
       <p:bgPr>
         <a:blipFill xmlns:a="http://schemas.openxmlformats.org/drawingml/2006/main">
-          <a:blip xmlns:r="http://schemas.openxmlformats.org/officeDocument/2006/relationships" r:embed="R959a0c993c664cad">
+          <a:blip xmlns:r="http://schemas.openxmlformats.org/officeDocument/2006/relationships" r:embed="R60a11436b932488b">
             <a:alphaModFix/>
           </a:blip>
           <a:stretch>
@@ -18205,7 +18084,7 @@
           <p:nvPr/>
         </p:nvPicPr>
         <p:blipFill rotWithShape="1">
-          <a:blip xmlns:r="http://schemas.openxmlformats.org/officeDocument/2006/relationships" xmlns:a="http://schemas.openxmlformats.org/drawingml/2006/main" r:embed="R3c9bb615d3e34314">
+          <a:blip xmlns:r="http://schemas.openxmlformats.org/officeDocument/2006/relationships" xmlns:a="http://schemas.openxmlformats.org/drawingml/2006/main" r:embed="R9ac842dc5c25409e">
             <a:alphaModFix/>
           </a:blip>
           <a:srcRect xmlns:a="http://schemas.openxmlformats.org/drawingml/2006/main" l="0" t="0" r="0" b="0"/>
@@ -18235,7 +18114,7 @@
     <p:bg>
       <p:bgPr>
         <a:blipFill xmlns:a="http://schemas.openxmlformats.org/drawingml/2006/main">
-          <a:blip xmlns:r="http://schemas.openxmlformats.org/officeDocument/2006/relationships" r:embed="Rd80936d218db466c">
+          <a:blip xmlns:r="http://schemas.openxmlformats.org/officeDocument/2006/relationships" r:embed="R6a9952010a4d41c9">
             <a:alphaModFix/>
           </a:blip>
           <a:stretch>
@@ -18868,7 +18747,7 @@
           <p:nvPr/>
         </p:nvPicPr>
         <p:blipFill rotWithShape="1">
-          <a:blip xmlns:r="http://schemas.openxmlformats.org/officeDocument/2006/relationships" xmlns:a="http://schemas.openxmlformats.org/drawingml/2006/main" r:embed="R48c9612991b64bc6">
+          <a:blip xmlns:r="http://schemas.openxmlformats.org/officeDocument/2006/relationships" xmlns:a="http://schemas.openxmlformats.org/drawingml/2006/main" r:embed="Rf9e87fbfa6b44e0d">
             <a:alphaModFix/>
           </a:blip>
           <a:srcRect xmlns:a="http://schemas.openxmlformats.org/drawingml/2006/main" l="0" t="0" r="0" b="0"/>
@@ -19328,7 +19207,7 @@
     <p:bg>
       <p:bgPr>
         <a:blipFill xmlns:a="http://schemas.openxmlformats.org/drawingml/2006/main">
-          <a:blip xmlns:r="http://schemas.openxmlformats.org/officeDocument/2006/relationships" r:embed="Rf7db73ce73b149d1">
+          <a:blip xmlns:r="http://schemas.openxmlformats.org/officeDocument/2006/relationships" r:embed="Rdbeffd5e5bb3403d">
             <a:alphaModFix/>
           </a:blip>
           <a:stretch>
@@ -19961,7 +19840,7 @@
           <p:nvPr/>
         </p:nvPicPr>
         <p:blipFill rotWithShape="1">
-          <a:blip xmlns:r="http://schemas.openxmlformats.org/officeDocument/2006/relationships" xmlns:a="http://schemas.openxmlformats.org/drawingml/2006/main" r:embed="Rdb264494cc7e4866">
+          <a:blip xmlns:r="http://schemas.openxmlformats.org/officeDocument/2006/relationships" xmlns:a="http://schemas.openxmlformats.org/drawingml/2006/main" r:embed="Re370fd911c514430">
             <a:alphaModFix/>
           </a:blip>
           <a:srcRect xmlns:a="http://schemas.openxmlformats.org/drawingml/2006/main" l="0" t="0" r="0" b="0"/>
@@ -22617,7 +22496,7 @@
           <p:nvPr/>
         </p:nvPicPr>
         <p:blipFill rotWithShape="1">
-          <a:blip xmlns:r="http://schemas.openxmlformats.org/officeDocument/2006/relationships" xmlns:a="http://schemas.openxmlformats.org/drawingml/2006/main" r:embed="R5b7857b9d0994777">
+          <a:blip xmlns:r="http://schemas.openxmlformats.org/officeDocument/2006/relationships" xmlns:a="http://schemas.openxmlformats.org/drawingml/2006/main" r:embed="R6509b6dc05384064">
             <a:alphaModFix/>
           </a:blip>
           <a:srcRect xmlns:a="http://schemas.openxmlformats.org/drawingml/2006/main" l="0" t="0" r="0" b="0"/>
@@ -22647,7 +22526,7 @@
     <p:bg>
       <p:bgPr>
         <a:blipFill xmlns:a="http://schemas.openxmlformats.org/drawingml/2006/main">
-          <a:blip xmlns:r="http://schemas.openxmlformats.org/officeDocument/2006/relationships" r:embed="Ra03973a3871f4efe">
+          <a:blip xmlns:r="http://schemas.openxmlformats.org/officeDocument/2006/relationships" r:embed="R4d844c342640436e">
             <a:alphaModFix/>
           </a:blip>
           <a:stretch>
@@ -23491,7 +23370,7 @@
           <p:nvPr/>
         </p:nvPicPr>
         <p:blipFill rotWithShape="1">
-          <a:blip xmlns:r="http://schemas.openxmlformats.org/officeDocument/2006/relationships" xmlns:a="http://schemas.openxmlformats.org/drawingml/2006/main" r:embed="R9ec34d5114c64141">
+          <a:blip xmlns:r="http://schemas.openxmlformats.org/officeDocument/2006/relationships" xmlns:a="http://schemas.openxmlformats.org/drawingml/2006/main" r:embed="Raf0d449b0506427b">
             <a:alphaModFix/>
           </a:blip>
           <a:srcRect xmlns:a="http://schemas.openxmlformats.org/drawingml/2006/main" l="0" t="0" r="0" b="0"/>
@@ -23521,7 +23400,7 @@
     <p:bg>
       <p:bgPr>
         <a:blipFill xmlns:a="http://schemas.openxmlformats.org/drawingml/2006/main">
-          <a:blip xmlns:r="http://schemas.openxmlformats.org/officeDocument/2006/relationships" r:embed="R972e9f9cda83435f">
+          <a:blip xmlns:r="http://schemas.openxmlformats.org/officeDocument/2006/relationships" r:embed="Ref1159f7ed594710">
             <a:alphaModFix/>
           </a:blip>
           <a:stretch>
@@ -24469,7 +24348,7 @@
           <p:nvPr/>
         </p:nvPicPr>
         <p:blipFill rotWithShape="1">
-          <a:blip xmlns:r="http://schemas.openxmlformats.org/officeDocument/2006/relationships" xmlns:a="http://schemas.openxmlformats.org/drawingml/2006/main" r:embed="R5c369f93c0f74682">
+          <a:blip xmlns:r="http://schemas.openxmlformats.org/officeDocument/2006/relationships" xmlns:a="http://schemas.openxmlformats.org/drawingml/2006/main" r:embed="R09dda9d4d282470e">
             <a:alphaModFix/>
           </a:blip>
           <a:srcRect xmlns:a="http://schemas.openxmlformats.org/drawingml/2006/main" l="0" t="0" r="0" b="0"/>
@@ -24499,7 +24378,7 @@
     <p:bg>
       <p:bgPr>
         <a:blipFill xmlns:a="http://schemas.openxmlformats.org/drawingml/2006/main">
-          <a:blip xmlns:r="http://schemas.openxmlformats.org/officeDocument/2006/relationships" r:embed="R150d6ec0c8f94c10">
+          <a:blip xmlns:r="http://schemas.openxmlformats.org/officeDocument/2006/relationships" r:embed="R646c25ca04454f95">
             <a:alphaModFix/>
           </a:blip>
           <a:stretch>
@@ -24960,7 +24839,7 @@
           <p:nvPr/>
         </p:nvPicPr>
         <p:blipFill rotWithShape="1">
-          <a:blip xmlns:r="http://schemas.openxmlformats.org/officeDocument/2006/relationships" xmlns:a="http://schemas.openxmlformats.org/drawingml/2006/main" r:embed="R159d6906d17d46f9">
+          <a:blip xmlns:r="http://schemas.openxmlformats.org/officeDocument/2006/relationships" xmlns:a="http://schemas.openxmlformats.org/drawingml/2006/main" r:embed="Rc4b4c52372eb4949">
             <a:alphaModFix/>
           </a:blip>
           <a:srcRect xmlns:a="http://schemas.openxmlformats.org/drawingml/2006/main" l="0" t="0" r="0" b="0"/>
@@ -26672,22 +26551,22 @@
   </p:cSld>
   <p:clrMap bg1="lt1" tx1="dk1" bg2="dk2" tx2="lt2" accent1="accent1" accent2="accent2" accent3="accent3" accent4="accent4" accent5="accent5" accent6="accent6" hlink="hlink" folHlink="folHlink"/>
   <p:sldLayoutIdLst>
-    <p:sldLayoutId xmlns:r="http://schemas.openxmlformats.org/officeDocument/2006/relationships" id="2147483649" r:id="Rb88271aa9f4f4c9c"/>
-    <p:sldLayoutId xmlns:r="http://schemas.openxmlformats.org/officeDocument/2006/relationships" id="2147483650" r:id="R845e83d2ab634436"/>
-    <p:sldLayoutId xmlns:r="http://schemas.openxmlformats.org/officeDocument/2006/relationships" id="2147483651" r:id="Rb9e3dccd60a844c3"/>
-    <p:sldLayoutId xmlns:r="http://schemas.openxmlformats.org/officeDocument/2006/relationships" id="2147483652" r:id="Rc97b515778304562"/>
-    <p:sldLayoutId xmlns:r="http://schemas.openxmlformats.org/officeDocument/2006/relationships" id="2147483653" r:id="R9f9af9905375485b"/>
-    <p:sldLayoutId xmlns:r="http://schemas.openxmlformats.org/officeDocument/2006/relationships" id="2147483654" r:id="Red75149bb2994be7"/>
-    <p:sldLayoutId xmlns:r="http://schemas.openxmlformats.org/officeDocument/2006/relationships" id="2147483655" r:id="Rf0a57444b2f341da"/>
-    <p:sldLayoutId xmlns:r="http://schemas.openxmlformats.org/officeDocument/2006/relationships" id="2147483656" r:id="R63bfc9cc2da14add"/>
-    <p:sldLayoutId xmlns:r="http://schemas.openxmlformats.org/officeDocument/2006/relationships" id="2147483657" r:id="R3a50f2280ed44648"/>
-    <p:sldLayoutId xmlns:r="http://schemas.openxmlformats.org/officeDocument/2006/relationships" id="2147483658" r:id="Ra7ba8037ee974ac7"/>
-    <p:sldLayoutId xmlns:r="http://schemas.openxmlformats.org/officeDocument/2006/relationships" id="2147483659" r:id="R7d13db4d3ef14c8f"/>
-    <p:sldLayoutId xmlns:r="http://schemas.openxmlformats.org/officeDocument/2006/relationships" id="2147483660" r:id="R0d9a9a622fc441c9"/>
-    <p:sldLayoutId xmlns:r="http://schemas.openxmlformats.org/officeDocument/2006/relationships" id="2147483661" r:id="R47f4f16f6994417c"/>
-    <p:sldLayoutId xmlns:r="http://schemas.openxmlformats.org/officeDocument/2006/relationships" id="2147483662" r:id="R1643da8145db4223"/>
-    <p:sldLayoutId xmlns:r="http://schemas.openxmlformats.org/officeDocument/2006/relationships" id="2147483663" r:id="R6d1aecf51e15483b"/>
-    <p:sldLayoutId xmlns:r="http://schemas.openxmlformats.org/officeDocument/2006/relationships" id="2147483664" r:id="Rbd32074d12924725"/>
+    <p:sldLayoutId xmlns:r="http://schemas.openxmlformats.org/officeDocument/2006/relationships" id="2147483649" r:id="Rd10ee9849fc4479e"/>
+    <p:sldLayoutId xmlns:r="http://schemas.openxmlformats.org/officeDocument/2006/relationships" id="2147483650" r:id="R77a6cf2775034798"/>
+    <p:sldLayoutId xmlns:r="http://schemas.openxmlformats.org/officeDocument/2006/relationships" id="2147483651" r:id="R096a7d67ee5c498b"/>
+    <p:sldLayoutId xmlns:r="http://schemas.openxmlformats.org/officeDocument/2006/relationships" id="2147483652" r:id="R98fda9fa94314b8a"/>
+    <p:sldLayoutId xmlns:r="http://schemas.openxmlformats.org/officeDocument/2006/relationships" id="2147483653" r:id="R688580b968774fe2"/>
+    <p:sldLayoutId xmlns:r="http://schemas.openxmlformats.org/officeDocument/2006/relationships" id="2147483654" r:id="R01cf9527fe8942af"/>
+    <p:sldLayoutId xmlns:r="http://schemas.openxmlformats.org/officeDocument/2006/relationships" id="2147483655" r:id="R988ce7b473714c83"/>
+    <p:sldLayoutId xmlns:r="http://schemas.openxmlformats.org/officeDocument/2006/relationships" id="2147483656" r:id="R7cac4b40260048c5"/>
+    <p:sldLayoutId xmlns:r="http://schemas.openxmlformats.org/officeDocument/2006/relationships" id="2147483657" r:id="Rf7828bdeb95f4df2"/>
+    <p:sldLayoutId xmlns:r="http://schemas.openxmlformats.org/officeDocument/2006/relationships" id="2147483658" r:id="R62ea9e08b5c945d2"/>
+    <p:sldLayoutId xmlns:r="http://schemas.openxmlformats.org/officeDocument/2006/relationships" id="2147483659" r:id="R144ca351b1c44527"/>
+    <p:sldLayoutId xmlns:r="http://schemas.openxmlformats.org/officeDocument/2006/relationships" id="2147483660" r:id="R0bc091b5287b4d88"/>
+    <p:sldLayoutId xmlns:r="http://schemas.openxmlformats.org/officeDocument/2006/relationships" id="2147483661" r:id="Rbc85b45604c74c6f"/>
+    <p:sldLayoutId xmlns:r="http://schemas.openxmlformats.org/officeDocument/2006/relationships" id="2147483662" r:id="R3ec658b12db44af9"/>
+    <p:sldLayoutId xmlns:r="http://schemas.openxmlformats.org/officeDocument/2006/relationships" id="2147483663" r:id="R335978e3ebda45dc"/>
+    <p:sldLayoutId xmlns:r="http://schemas.openxmlformats.org/officeDocument/2006/relationships" id="2147483664" r:id="Rfb2fb120c99a407b"/>
   </p:sldLayoutIdLst>
   <p:hf hdr="0" ftr="0" dt="0"/>
   <p:txStyles>
@@ -28880,7 +28759,7 @@
           <p:nvPr/>
         </p:nvPicPr>
         <p:blipFill rotWithShape="1">
-          <a:blip xmlns:r="http://schemas.openxmlformats.org/officeDocument/2006/relationships" xmlns:a="http://schemas.openxmlformats.org/drawingml/2006/main" r:embed="R009350a7a68345e8">
+          <a:blip xmlns:r="http://schemas.openxmlformats.org/officeDocument/2006/relationships" xmlns:a="http://schemas.openxmlformats.org/drawingml/2006/main" r:embed="R4df3fe1a35414db2">
             <a:alphaModFix/>
           </a:blip>
           <a:srcRect xmlns:a="http://schemas.openxmlformats.org/drawingml/2006/main" l="0" t="0" r="0" b="0"/>
@@ -28903,19 +28782,19 @@
   </p:cSld>
   <p:clrMap bg1="lt1" tx1="dk1" bg2="dk2" tx2="lt2" accent1="accent1" accent2="accent2" accent3="accent3" accent4="accent4" accent5="accent5" accent6="accent6" hlink="hlink" folHlink="folHlink"/>
   <p:sldLayoutIdLst>
-    <p:sldLayoutId xmlns:r="http://schemas.openxmlformats.org/officeDocument/2006/relationships" id="2147483666" r:id="R0619b8e8abb24748"/>
-    <p:sldLayoutId xmlns:r="http://schemas.openxmlformats.org/officeDocument/2006/relationships" id="2147483667" r:id="Rc1c3ab942d0f459e"/>
-    <p:sldLayoutId xmlns:r="http://schemas.openxmlformats.org/officeDocument/2006/relationships" id="2147483668" r:id="R5981fc41c43848d3"/>
-    <p:sldLayoutId xmlns:r="http://schemas.openxmlformats.org/officeDocument/2006/relationships" id="2147483669" r:id="R5497369958b948f8"/>
-    <p:sldLayoutId xmlns:r="http://schemas.openxmlformats.org/officeDocument/2006/relationships" id="2147483670" r:id="R49170ba884194d71"/>
-    <p:sldLayoutId xmlns:r="http://schemas.openxmlformats.org/officeDocument/2006/relationships" id="2147483671" r:id="Rd8068c3f56834c09"/>
-    <p:sldLayoutId xmlns:r="http://schemas.openxmlformats.org/officeDocument/2006/relationships" id="2147483672" r:id="Rd73115af9edb4ff0"/>
-    <p:sldLayoutId xmlns:r="http://schemas.openxmlformats.org/officeDocument/2006/relationships" id="2147483673" r:id="Ra02902615bf74bf1"/>
-    <p:sldLayoutId xmlns:r="http://schemas.openxmlformats.org/officeDocument/2006/relationships" id="2147483674" r:id="R85132b11f4ed4519"/>
-    <p:sldLayoutId xmlns:r="http://schemas.openxmlformats.org/officeDocument/2006/relationships" id="2147483675" r:id="R1b944c385a2a459e"/>
-    <p:sldLayoutId xmlns:r="http://schemas.openxmlformats.org/officeDocument/2006/relationships" id="2147483676" r:id="R3ec5fd01f9d94a86"/>
-    <p:sldLayoutId xmlns:r="http://schemas.openxmlformats.org/officeDocument/2006/relationships" id="2147483677" r:id="R503d16cdbd564746"/>
-    <p:sldLayoutId xmlns:r="http://schemas.openxmlformats.org/officeDocument/2006/relationships" id="2147483678" r:id="Rd2a884f542424fde"/>
+    <p:sldLayoutId xmlns:r="http://schemas.openxmlformats.org/officeDocument/2006/relationships" id="2147483666" r:id="R9b1eee25ff6d434a"/>
+    <p:sldLayoutId xmlns:r="http://schemas.openxmlformats.org/officeDocument/2006/relationships" id="2147483667" r:id="R46d9f1971a064380"/>
+    <p:sldLayoutId xmlns:r="http://schemas.openxmlformats.org/officeDocument/2006/relationships" id="2147483668" r:id="Re2992fc45e5344e2"/>
+    <p:sldLayoutId xmlns:r="http://schemas.openxmlformats.org/officeDocument/2006/relationships" id="2147483669" r:id="Rcf1b9ee0c9dc4478"/>
+    <p:sldLayoutId xmlns:r="http://schemas.openxmlformats.org/officeDocument/2006/relationships" id="2147483670" r:id="R93708b4e417b48fc"/>
+    <p:sldLayoutId xmlns:r="http://schemas.openxmlformats.org/officeDocument/2006/relationships" id="2147483671" r:id="Rc1e4906cc01549c5"/>
+    <p:sldLayoutId xmlns:r="http://schemas.openxmlformats.org/officeDocument/2006/relationships" id="2147483672" r:id="Rc541e9182b7c45d5"/>
+    <p:sldLayoutId xmlns:r="http://schemas.openxmlformats.org/officeDocument/2006/relationships" id="2147483673" r:id="R636e123a16a743a3"/>
+    <p:sldLayoutId xmlns:r="http://schemas.openxmlformats.org/officeDocument/2006/relationships" id="2147483674" r:id="R567002c9e0414aba"/>
+    <p:sldLayoutId xmlns:r="http://schemas.openxmlformats.org/officeDocument/2006/relationships" id="2147483675" r:id="R0f0e2c730a694fd9"/>
+    <p:sldLayoutId xmlns:r="http://schemas.openxmlformats.org/officeDocument/2006/relationships" id="2147483676" r:id="Ra130e52dc9c94b8a"/>
+    <p:sldLayoutId xmlns:r="http://schemas.openxmlformats.org/officeDocument/2006/relationships" id="2147483677" r:id="R540e9428dfd8491d"/>
+    <p:sldLayoutId xmlns:r="http://schemas.openxmlformats.org/officeDocument/2006/relationships" id="2147483678" r:id="Raec0c8e0a6d74ebc"/>
   </p:sldLayoutIdLst>
   <p:hf hdr="0" ftr="0" dt="0"/>
   <p:txStyles>
@@ -30312,162 +30191,7 @@
           <a:lstStyle xmlns:a="http://schemas.openxmlformats.org/drawingml/2006/main"/>
           <a:p xmlns:a="http://schemas.openxmlformats.org/drawingml/2006/main">
             <a:r>
-              <a:t>Maintainer pushback is expected — and the answer is scoped evidence</a:t>
-            </a:r>
-          </a:p>
-        </p:txBody>
-      </p:sp>
-      <p:sp>
-        <p:nvSpPr>
-          <p:cNvPr id="3" name="Content Placeholder 2">
-            <a:extLst xmlns:a="http://schemas.openxmlformats.org/drawingml/2006/main">
-              <a:ext uri="{FF2B5EF4-FFF2-40B4-BE49-F238E27FC236}">
-                <a16:creationId xmlns:a16="http://schemas.microsoft.com/office/drawing/2014/main" id="{ECF5C9F1-2691-0BC9-F1E1-01CECB857FE3}"/>
-              </a:ext>
-            </a:extLst>
-          </p:cNvPr>
-          <p:cNvSpPr>
-            <a:spLocks xmlns:a="http://schemas.openxmlformats.org/drawingml/2006/main" noGrp="1"/>
-          </p:cNvSpPr>
-          <p:nvPr>
-            <p:ph type="body" idx="1"/>
-          </p:nvPr>
-        </p:nvSpPr>
-        <p:spPr>
-          <a:xfrm xmlns:a="http://schemas.openxmlformats.org/drawingml/2006/main">
-            <a:off x="838200" y="1825625"/>
-            <a:ext cx="10515600" cy="4351200"/>
-          </a:xfrm>
-        </p:spPr>
-        <p:txBody>
-          <a:bodyPr xmlns:a="http://schemas.openxmlformats.org/drawingml/2006/main" wrap="square" anchor="t">
-            <a:normAutofit fontScale="100000"/>
-          </a:bodyPr>
-          <a:lstStyle xmlns:a="http://schemas.openxmlformats.org/drawingml/2006/main"/>
-          <a:p xmlns:a="http://schemas.openxmlformats.org/drawingml/2006/main">
-            <a:pPr marL="30" indent="-18">
-              <a:spcAft>
-                <a:spcPts val="10"/>
-              </a:spcAft>
-              <a:buChar char="•"/>
-              <a:defRPr sz="1913">
-                <a:solidFill>
-                  <a:srgbClr val="000000"/>
-                </a:solidFill>
-              </a:defRPr>
-            </a:pPr>
-            <a:r>
-              <a:rPr sz="1913" b="1">
-                <a:solidFill>
-                  <a:srgbClr val="000000"/>
-                </a:solidFill>
-              </a:rPr>
-              <a:t> Do you test every combination? — No. We publish representative, risk-based cells and the gaps.</a:t>
-            </a:r>
-          </a:p>
-          <a:p xmlns:a="http://schemas.openxmlformats.org/drawingml/2006/main">
-            <a:pPr marL="30" indent="-18">
-              <a:spcAft>
-                <a:spcPts val="10"/>
-              </a:spcAft>
-              <a:buChar char="•"/>
-              <a:defRPr sz="1913">
-                <a:solidFill>
-                  <a:srgbClr val="000000"/>
-                </a:solidFill>
-              </a:defRPr>
-            </a:pPr>
-            <a:r>
-              <a:rPr sz="1913" b="1">
-                <a:solidFill>
-                  <a:srgbClr val="000000"/>
-                </a:solidFill>
-              </a:rPr>
-              <a:t> What changes invalidate evidence? — Re-run affected cells; older results remain history, not current proof.</a:t>
-            </a:r>
-          </a:p>
-          <a:p xmlns:a="http://schemas.openxmlformats.org/drawingml/2006/main">
-            <a:pPr marL="30" indent="-18">
-              <a:spcAft>
-                <a:spcPts val="10"/>
-              </a:spcAft>
-              <a:buChar char="•"/>
-              <a:defRPr sz="1913">
-                <a:solidFill>
-                  <a:srgbClr val="000000"/>
-                </a:solidFill>
-              </a:defRPr>
-            </a:pPr>
-            <a:r>
-              <a:rPr sz="1913" b="1">
-                <a:solidFill>
-                  <a:srgbClr val="000000"/>
-                </a:solidFill>
-              </a:rPr>
-              <a:t> How do you limit overfitting? — Maintainer incidents, hidden checks, negative controls, multiple tasks, and trajectory review.</a:t>
-            </a:r>
-          </a:p>
-          <a:p xmlns:a="http://schemas.openxmlformats.org/drawingml/2006/main">
-            <a:pPr marL="30" indent="-18">
-              <a:spcAft>
-                <a:spcPts val="10"/>
-              </a:spcAft>
-              <a:buChar char="•"/>
-              <a:defRPr sz="1913">
-                <a:solidFill>
-                  <a:srgbClr val="000000"/>
-                </a:solidFill>
-              </a:defRPr>
-            </a:pPr>
-            <a:r>
-              <a:rPr sz="1913" b="1">
-                <a:solidFill>
-                  <a:srgbClr val="000000"/>
-                </a:solidFill>
-              </a:rPr>
-              <a:t> What if every arm passes? — Keep it as smoke coverage; claim no lift and seek a harder task.</a:t>
-            </a:r>
-          </a:p>
-          <a:p xmlns:a="http://schemas.openxmlformats.org/drawingml/2006/main">
-            <a:pPr marL="30" indent="-18">
-              <a:spcAft>
-                <a:spcPts val="10"/>
-              </a:spcAft>
-              <a:buChar char="•"/>
-              <a:defRPr sz="1913">
-                <a:solidFill>
-                  <a:srgbClr val="000000"/>
-                </a:solidFill>
-              </a:defRPr>
-            </a:pPr>
-            <a:r>
-              <a:rPr sz="1913" b="1">
-                <a:solidFill>
-                  <a:srgbClr val="000000"/>
-                </a:solidFill>
-              </a:rPr>
-              <a:t> Does hardware qualification prove skill value? — No. Qualification and matched skill trials are separate gates.</a:t>
-            </a:r>
-          </a:p>
-          <a:p xmlns:a="http://schemas.openxmlformats.org/drawingml/2006/main">
-            <a:pPr marL="30" indent="-18">
-              <a:spcAft>
-                <a:spcPts val="10"/>
-              </a:spcAft>
-              <a:buChar char="•"/>
-              <a:defRPr sz="1913">
-                <a:solidFill>
-                  <a:srgbClr val="000000"/>
-                </a:solidFill>
-              </a:defRPr>
-            </a:pPr>
-            <a:r>
-              <a:rPr sz="1913" b="1">
-                <a:solidFill>
-                  <a:srgbClr val="000000"/>
-                </a:solidFill>
-              </a:rPr>
-              <a:t> Can scores be pooled? — No universal score; report conclusions within each model, harness, software, and environment cell.</a:t>
+              <a:t>Hardware is a pluggable evidence lane — never the product</a:t>
             </a:r>
           </a:p>
         </p:txBody>
@@ -30508,6 +30232,28 @@
           </a:p>
         </p:txBody>
       </p:sp>
+      <p:pic>
+        <p:nvPicPr>
+          <p:cNvPr id="11" name=""/>
+          <p:cNvPicPr>
+            <a:picLocks xmlns:a="http://schemas.openxmlformats.org/drawingml/2006/main" noChangeAspect="1"/>
+          </p:cNvPicPr>
+          <p:nvPr/>
+        </p:nvPicPr>
+        <p:blipFill>
+          <a:blip xmlns:r="http://schemas.openxmlformats.org/officeDocument/2006/relationships" xmlns:a="http://schemas.openxmlformats.org/drawingml/2006/main" r:embed="R72c8fc6b2bff4551"/>
+          <a:stretch xmlns:a="http://schemas.openxmlformats.org/drawingml/2006/main"/>
+        </p:blipFill>
+        <p:spPr>
+          <a:xfrm xmlns:a="http://schemas.openxmlformats.org/drawingml/2006/main" flipH="0" flipV="0">
+            <a:off x="2322187" y="1885950"/>
+            <a:ext cx="7547626" cy="4248150"/>
+          </a:xfrm>
+          <a:prstGeom xmlns:a="http://schemas.openxmlformats.org/drawingml/2006/main" prst="roundRect">
+            <a:avLst/>
+          </a:prstGeom>
+        </p:spPr>
+      </p:pic>
     </p:spTree>
     <p:extLst>
       <p:ext uri="{BB962C8B-B14F-4D97-AF65-F5344CB8AC3E}">
@@ -30559,7 +30305,7 @@
           <a:lstStyle xmlns:a="http://schemas.openxmlformats.org/drawingml/2006/main"/>
           <a:p xmlns:a="http://schemas.openxmlformats.org/drawingml/2006/main">
             <a:r>
-              <a:t>Hardware is a pluggable evidence lane — never the product</a:t>
+              <a:t>The ongoing maintainer workflow fits normal GitHub practice</a:t>
             </a:r>
           </a:p>
         </p:txBody>
@@ -30596,120 +30342,6 @@
           <a:p xmlns:a="http://schemas.openxmlformats.org/drawingml/2006/main">
             <a:r>
               <a:t>11</a:t>
-            </a:r>
-          </a:p>
-        </p:txBody>
-      </p:sp>
-      <p:pic>
-        <p:nvPicPr>
-          <p:cNvPr id="11" name=""/>
-          <p:cNvPicPr>
-            <a:picLocks xmlns:a="http://schemas.openxmlformats.org/drawingml/2006/main" noChangeAspect="1"/>
-          </p:cNvPicPr>
-          <p:nvPr/>
-        </p:nvPicPr>
-        <p:blipFill>
-          <a:blip xmlns:r="http://schemas.openxmlformats.org/officeDocument/2006/relationships" xmlns:a="http://schemas.openxmlformats.org/drawingml/2006/main" r:embed="R32090135bb3b4594"/>
-          <a:stretch xmlns:a="http://schemas.openxmlformats.org/drawingml/2006/main"/>
-        </p:blipFill>
-        <p:spPr>
-          <a:xfrm xmlns:a="http://schemas.openxmlformats.org/drawingml/2006/main" flipH="0" flipV="0">
-            <a:off x="2322187" y="1885950"/>
-            <a:ext cx="7547626" cy="4248150"/>
-          </a:xfrm>
-          <a:prstGeom xmlns:a="http://schemas.openxmlformats.org/drawingml/2006/main" prst="roundRect">
-            <a:avLst/>
-          </a:prstGeom>
-        </p:spPr>
-      </p:pic>
-    </p:spTree>
-    <p:extLst>
-      <p:ext uri="{BB962C8B-B14F-4D97-AF65-F5344CB8AC3E}">
-        <p14:creationId xmlns:p14="http://schemas.microsoft.com/office/powerpoint/2010/main" val="1742728663"/>
-      </p:ext>
-    </p:extLst>
-  </p:cSld>
-</p:sld>
-</file>
-
-<file path=ppt/slides/slide12.xml><?xml version="1.0" encoding="utf-8"?>
-<p:sld xmlns:p="http://schemas.openxmlformats.org/presentationml/2006/main">
-  <p:cSld>
-    <p:spTree>
-      <p:nvGrpSpPr>
-        <p:cNvPr id="1" name=""/>
-        <p:cNvGrpSpPr/>
-        <p:nvPr/>
-      </p:nvGrpSpPr>
-      <p:grpSpPr>
-        <a:xfrm xmlns:a="http://schemas.openxmlformats.org/drawingml/2006/main"/>
-      </p:grpSpPr>
-      <p:sp>
-        <p:nvSpPr>
-          <p:cNvPr id="2" name="Title 1">
-            <a:extLst xmlns:a="http://schemas.openxmlformats.org/drawingml/2006/main">
-              <a:ext uri="{FF2B5EF4-FFF2-40B4-BE49-F238E27FC236}">
-                <a16:creationId xmlns:a16="http://schemas.microsoft.com/office/drawing/2014/main" id="{F64C2A24-546D-C55C-2C52-97A4957F67E0}"/>
-              </a:ext>
-            </a:extLst>
-          </p:cNvPr>
-          <p:cNvSpPr>
-            <a:spLocks xmlns:a="http://schemas.openxmlformats.org/drawingml/2006/main" noGrp="1"/>
-          </p:cNvSpPr>
-          <p:nvPr>
-            <p:ph type="title" idx="0"/>
-          </p:nvPr>
-        </p:nvSpPr>
-        <p:spPr>
-          <a:xfrm xmlns:a="http://schemas.openxmlformats.org/drawingml/2006/main">
-            <a:off x="838200" y="365125"/>
-            <a:ext cx="10515600" cy="1325700"/>
-          </a:xfrm>
-        </p:spPr>
-        <p:txBody>
-          <a:bodyPr xmlns:a="http://schemas.openxmlformats.org/drawingml/2006/main">
-            <a:normAutofit fontScale="100000"/>
-          </a:bodyPr>
-          <a:lstStyle xmlns:a="http://schemas.openxmlformats.org/drawingml/2006/main"/>
-          <a:p xmlns:a="http://schemas.openxmlformats.org/drawingml/2006/main">
-            <a:r>
-              <a:t>The ongoing maintainer workflow fits normal GitHub practice</a:t>
-            </a:r>
-          </a:p>
-        </p:txBody>
-      </p:sp>
-      <p:sp>
-        <p:nvSpPr>
-          <p:cNvPr id="7" name="TextBox 6">
-            <a:extLst xmlns:a="http://schemas.openxmlformats.org/drawingml/2006/main">
-              <a:ext uri="{FF2B5EF4-FFF2-40B4-BE49-F238E27FC236}">
-                <a16:creationId xmlns:a16="http://schemas.microsoft.com/office/drawing/2014/main" id="{E2E6F043-0F84-54F7-A567-6E5851801779}"/>
-              </a:ext>
-            </a:extLst>
-          </p:cNvPr>
-          <p:cNvSpPr>
-            <a:spLocks xmlns:a="http://schemas.openxmlformats.org/drawingml/2006/main" noGrp="1"/>
-          </p:cNvSpPr>
-          <p:nvPr/>
-        </p:nvSpPr>
-        <p:spPr>
-          <a:xfrm xmlns:a="http://schemas.openxmlformats.org/drawingml/2006/main">
-            <a:off x="696174" y="6338986"/>
-            <a:ext cx="284052" cy="307777"/>
-          </a:xfrm>
-          <a:prstGeom xmlns:a="http://schemas.openxmlformats.org/drawingml/2006/main" prst="rect">
-            <a:avLst/>
-          </a:prstGeom>
-          <a:noFill xmlns:a="http://schemas.openxmlformats.org/drawingml/2006/main"/>
-        </p:spPr>
-        <p:txBody>
-          <a:bodyPr xmlns:a="http://schemas.openxmlformats.org/drawingml/2006/main" wrap="none">
-            <a:spAutoFit/>
-          </a:bodyPr>
-          <a:lstStyle xmlns:a="http://schemas.openxmlformats.org/drawingml/2006/main"/>
-          <a:p xmlns:a="http://schemas.openxmlformats.org/drawingml/2006/main">
-            <a:r>
-              <a:t>12</a:t>
             </a:r>
           </a:p>
         </p:txBody>
@@ -31453,6 +31085,243 @@
 </p:sld>
 </file>
 
+<file path=ppt/slides/slide12.xml><?xml version="1.0" encoding="utf-8"?>
+<p:sld xmlns:p="http://schemas.openxmlformats.org/presentationml/2006/main">
+  <p:cSld>
+    <p:spTree>
+      <p:nvGrpSpPr>
+        <p:cNvPr id="1" name=""/>
+        <p:cNvGrpSpPr/>
+        <p:nvPr/>
+      </p:nvGrpSpPr>
+      <p:grpSpPr>
+        <a:xfrm xmlns:a="http://schemas.openxmlformats.org/drawingml/2006/main"/>
+      </p:grpSpPr>
+      <p:sp>
+        <p:nvSpPr>
+          <p:cNvPr id="2" name="Title 1">
+            <a:extLst xmlns:a="http://schemas.openxmlformats.org/drawingml/2006/main">
+              <a:ext uri="{FF2B5EF4-FFF2-40B4-BE49-F238E27FC236}">
+                <a16:creationId xmlns:a16="http://schemas.microsoft.com/office/drawing/2014/main" id="{F64C2A24-546D-C55C-2C52-97A4957F67E0}"/>
+              </a:ext>
+            </a:extLst>
+          </p:cNvPr>
+          <p:cNvSpPr>
+            <a:spLocks xmlns:a="http://schemas.openxmlformats.org/drawingml/2006/main" noGrp="1"/>
+          </p:cNvSpPr>
+          <p:nvPr>
+            <p:ph type="title" idx="0"/>
+          </p:nvPr>
+        </p:nvSpPr>
+        <p:spPr>
+          <a:xfrm xmlns:a="http://schemas.openxmlformats.org/drawingml/2006/main">
+            <a:off x="838200" y="365125"/>
+            <a:ext cx="10515600" cy="1325700"/>
+          </a:xfrm>
+        </p:spPr>
+        <p:txBody>
+          <a:bodyPr xmlns:a="http://schemas.openxmlformats.org/drawingml/2006/main">
+            <a:normAutofit fontScale="100000"/>
+          </a:bodyPr>
+          <a:lstStyle xmlns:a="http://schemas.openxmlformats.org/drawingml/2006/main"/>
+          <a:p xmlns:a="http://schemas.openxmlformats.org/drawingml/2006/main">
+            <a:r>
+              <a:t>Ownership is intentionally split</a:t>
+            </a:r>
+          </a:p>
+        </p:txBody>
+      </p:sp>
+      <p:sp>
+        <p:nvSpPr>
+          <p:cNvPr id="3" name="Content Placeholder 2">
+            <a:extLst xmlns:a="http://schemas.openxmlformats.org/drawingml/2006/main">
+              <a:ext uri="{FF2B5EF4-FFF2-40B4-BE49-F238E27FC236}">
+                <a16:creationId xmlns:a16="http://schemas.microsoft.com/office/drawing/2014/main" id="{ECF5C9F1-2691-0BC9-F1E1-01CECB857FE3}"/>
+              </a:ext>
+            </a:extLst>
+          </p:cNvPr>
+          <p:cNvSpPr>
+            <a:spLocks xmlns:a="http://schemas.openxmlformats.org/drawingml/2006/main" noGrp="1"/>
+          </p:cNvSpPr>
+          <p:nvPr>
+            <p:ph type="body" idx="1"/>
+          </p:nvPr>
+        </p:nvSpPr>
+        <p:spPr>
+          <a:xfrm xmlns:a="http://schemas.openxmlformats.org/drawingml/2006/main">
+            <a:off x="838200" y="1825625"/>
+            <a:ext cx="10515600" cy="4351200"/>
+          </a:xfrm>
+        </p:spPr>
+        <p:txBody>
+          <a:bodyPr xmlns:a="http://schemas.openxmlformats.org/drawingml/2006/main" wrap="square" anchor="t">
+            <a:normAutofit fontScale="100000"/>
+          </a:bodyPr>
+          <a:lstStyle xmlns:a="http://schemas.openxmlformats.org/drawingml/2006/main"/>
+          <a:p xmlns:a="http://schemas.openxmlformats.org/drawingml/2006/main">
+            <a:pPr marL="30" indent="-18">
+              <a:spcAft>
+                <a:spcPts val="10"/>
+              </a:spcAft>
+              <a:buChar char="•"/>
+              <a:defRPr sz="1913">
+                <a:solidFill>
+                  <a:srgbClr val="000000"/>
+                </a:solidFill>
+              </a:defRPr>
+            </a:pPr>
+            <a:r>
+              <a:rPr sz="1913" b="1">
+                <a:solidFill>
+                  <a:srgbClr val="000000"/>
+                </a:solidFill>
+              </a:rPr>
+              <a:t> Project maintainers own</a:t>
+            </a:r>
+            <a:r>
+              <a:rPr sz="1913">
+                <a:solidFill>
+                  <a:srgbClr val="000000"/>
+                </a:solidFill>
+              </a:rPr>
+              <a:t> — Triggers, technical guidance, official sources, limitations, and whether task scenarios are authentic.</a:t>
+            </a:r>
+          </a:p>
+          <a:p xmlns:a="http://schemas.openxmlformats.org/drawingml/2006/main">
+            <a:pPr marL="30" indent="-18">
+              <a:spcAft>
+                <a:spcPts val="10"/>
+              </a:spcAft>
+              <a:buChar char="•"/>
+              <a:defRPr sz="1913">
+                <a:solidFill>
+                  <a:srgbClr val="000000"/>
+                </a:solidFill>
+              </a:defRPr>
+            </a:pPr>
+            <a:r>
+              <a:rPr sz="1913" b="1">
+                <a:solidFill>
+                  <a:srgbClr val="000000"/>
+                </a:solidFill>
+              </a:rPr>
+              <a:t> UXL shared infrastructure owns</a:t>
+            </a:r>
+            <a:r>
+              <a:rPr sz="1913">
+                <a:solidFill>
+                  <a:srgbClr val="000000"/>
+                </a:solidFill>
+              </a:rPr>
+              <a:t> — Catalog validation, Harbor harnesses, comparison policy, dashboards, hosted CI, and runner contracts.</a:t>
+            </a:r>
+          </a:p>
+          <a:p xmlns:a="http://schemas.openxmlformats.org/drawingml/2006/main">
+            <a:pPr marL="30" indent="-18">
+              <a:spcAft>
+                <a:spcPts val="10"/>
+              </a:spcAft>
+              <a:buChar char="•"/>
+              <a:defRPr sz="1913">
+                <a:solidFill>
+                  <a:srgbClr val="000000"/>
+                </a:solidFill>
+              </a:defRPr>
+            </a:pPr>
+            <a:r>
+              <a:rPr sz="1913" b="1">
+                <a:solidFill>
+                  <a:srgbClr val="000000"/>
+                </a:solidFill>
+              </a:rPr>
+              <a:t> Hardware owners opt in</a:t>
+            </a:r>
+            <a:r>
+              <a:rPr sz="1913">
+                <a:solidFill>
+                  <a:srgbClr val="000000"/>
+                </a:solidFill>
+              </a:rPr>
+              <a:t> — They qualify a declared environment, run only reviewed immutable evaluator revisions, and return evidence artifacts.</a:t>
+            </a:r>
+          </a:p>
+          <a:p xmlns:a="http://schemas.openxmlformats.org/drawingml/2006/main">
+            <a:pPr marL="30" indent="-18">
+              <a:spcAft>
+                <a:spcPts val="10"/>
+              </a:spcAft>
+              <a:buChar char="•"/>
+              <a:defRPr sz="1913">
+                <a:solidFill>
+                  <a:srgbClr val="000000"/>
+                </a:solidFill>
+              </a:defRPr>
+            </a:pPr>
+            <a:r>
+              <a:rPr sz="1913" b="1">
+                <a:solidFill>
+                  <a:srgbClr val="000000"/>
+                </a:solidFill>
+              </a:rPr>
+              <a:t> No silent promotion</a:t>
+            </a:r>
+            <a:r>
+              <a:rPr sz="1913">
+                <a:solidFill>
+                  <a:srgbClr val="000000"/>
+                </a:solidFill>
+              </a:rPr>
+              <a:t> — Project approval, source verification, realistic eval prompts, matched trials when feasible, and explicit limitations remain gates.</a:t>
+            </a:r>
+          </a:p>
+        </p:txBody>
+      </p:sp>
+      <p:sp>
+        <p:nvSpPr>
+          <p:cNvPr id="7" name="TextBox 6">
+            <a:extLst xmlns:a="http://schemas.openxmlformats.org/drawingml/2006/main">
+              <a:ext uri="{FF2B5EF4-FFF2-40B4-BE49-F238E27FC236}">
+                <a16:creationId xmlns:a16="http://schemas.microsoft.com/office/drawing/2014/main" id="{E2E6F043-0F84-54F7-A567-6E5851801779}"/>
+              </a:ext>
+            </a:extLst>
+          </p:cNvPr>
+          <p:cNvSpPr>
+            <a:spLocks xmlns:a="http://schemas.openxmlformats.org/drawingml/2006/main" noGrp="1"/>
+          </p:cNvSpPr>
+          <p:nvPr/>
+        </p:nvSpPr>
+        <p:spPr>
+          <a:xfrm xmlns:a="http://schemas.openxmlformats.org/drawingml/2006/main">
+            <a:off x="696174" y="6338986"/>
+            <a:ext cx="284052" cy="307777"/>
+          </a:xfrm>
+          <a:prstGeom xmlns:a="http://schemas.openxmlformats.org/drawingml/2006/main" prst="rect">
+            <a:avLst/>
+          </a:prstGeom>
+          <a:noFill xmlns:a="http://schemas.openxmlformats.org/drawingml/2006/main"/>
+        </p:spPr>
+        <p:txBody>
+          <a:bodyPr xmlns:a="http://schemas.openxmlformats.org/drawingml/2006/main" wrap="none">
+            <a:spAutoFit/>
+          </a:bodyPr>
+          <a:lstStyle xmlns:a="http://schemas.openxmlformats.org/drawingml/2006/main"/>
+          <a:p xmlns:a="http://schemas.openxmlformats.org/drawingml/2006/main">
+            <a:r>
+              <a:t>12</a:t>
+            </a:r>
+          </a:p>
+        </p:txBody>
+      </p:sp>
+    </p:spTree>
+    <p:extLst>
+      <p:ext uri="{BB962C8B-B14F-4D97-AF65-F5344CB8AC3E}">
+        <p14:creationId xmlns:p14="http://schemas.microsoft.com/office/powerpoint/2010/main" val="1742728663"/>
+      </p:ext>
+    </p:extLst>
+  </p:cSld>
+</p:sld>
+</file>
+
 <file path=ppt/slides/slide13.xml><?xml version="1.0" encoding="utf-8"?>
 <p:sld xmlns:p="http://schemas.openxmlformats.org/presentationml/2006/main">
   <p:cSld>
@@ -31494,7 +31363,7 @@
           <a:lstStyle xmlns:a="http://schemas.openxmlformats.org/drawingml/2006/main"/>
           <a:p xmlns:a="http://schemas.openxmlformats.org/drawingml/2006/main">
             <a:r>
-              <a:t>Ownership is intentionally split</a:t>
+              <a:t>The decision we need from each project</a:t>
             </a:r>
           </a:p>
         </p:txBody>
@@ -31544,7 +31413,7 @@
                   <a:srgbClr val="000000"/>
                 </a:solidFill>
               </a:rPr>
-              <a:t> Project maintainers own</a:t>
+              <a:t> Name one owner</a:t>
             </a:r>
             <a:r>
               <a:rPr sz="1913">
@@ -31552,7 +31421,7 @@
                   <a:srgbClr val="000000"/>
                 </a:solidFill>
               </a:rPr>
-              <a:t> — Triggers, technical guidance, official sources, limitations, and whether task scenarios are authentic.</a:t>
+              <a:t> — A maintainer or small reviewer group for scope and source freshness.</a:t>
             </a:r>
           </a:p>
           <a:p xmlns:a="http://schemas.openxmlformats.org/drawingml/2006/main">
@@ -31573,7 +31442,7 @@
                   <a:srgbClr val="000000"/>
                 </a:solidFill>
               </a:rPr>
-              <a:t> UXL shared infrastructure owns</a:t>
+              <a:t> Approve or correct the first-pass guidance</a:t>
             </a:r>
             <a:r>
               <a:rPr sz="1913">
@@ -31581,7 +31450,7 @@
                   <a:srgbClr val="000000"/>
                 </a:solidFill>
               </a:rPr>
-              <a:t> — Catalog validation, Harbor harnesses, comparison policy, dashboards, hosted CI, and runner contracts.</a:t>
+              <a:t> — Especially triggers, gotchas, unsupported paths, and terminology.</a:t>
             </a:r>
           </a:p>
           <a:p xmlns:a="http://schemas.openxmlformats.org/drawingml/2006/main">
@@ -31602,7 +31471,7 @@
                   <a:srgbClr val="000000"/>
                 </a:solidFill>
               </a:rPr>
-              <a:t> Hardware owners opt in</a:t>
+              <a:t> Validate the task inventory</a:t>
             </a:r>
             <a:r>
               <a:rPr sz="1913">
@@ -31610,7 +31479,7 @@
                   <a:srgbClr val="000000"/>
                 </a:solidFill>
               </a:rPr>
-              <a:t> — They qualify a declared environment, run only reviewed immutable evaluator revisions, and return evidence artifacts.</a:t>
+              <a:t> — Keep, rewrite, or delete scenarios; nominate one real support issue or regression.</a:t>
             </a:r>
           </a:p>
           <a:p xmlns:a="http://schemas.openxmlformats.org/drawingml/2006/main">
@@ -31631,7 +31500,7 @@
                   <a:srgbClr val="000000"/>
                 </a:solidFill>
               </a:rPr>
-              <a:t> No silent promotion</a:t>
+              <a:t> Adopt a light cadence</a:t>
             </a:r>
             <a:r>
               <a:rPr sz="1913">
@@ -31639,7 +31508,36 @@
                   <a:srgbClr val="000000"/>
                 </a:solidFill>
               </a:rPr>
-              <a:t> — Project approval, source verification, realistic eval prompts, matched trials when feasible, and explicit limitations remain gates.</a:t>
+              <a:t> — Review skill-affecting PRs and recheck sources at releases or quarterly.</a:t>
+            </a:r>
+          </a:p>
+          <a:p xmlns:a="http://schemas.openxmlformats.org/drawingml/2006/main">
+            <a:pPr marL="30" indent="-18">
+              <a:spcAft>
+                <a:spcPts val="10"/>
+              </a:spcAft>
+              <a:buChar char="•"/>
+              <a:defRPr sz="1913">
+                <a:solidFill>
+                  <a:srgbClr val="000000"/>
+                </a:solidFill>
+              </a:defRPr>
+            </a:pPr>
+            <a:r>
+              <a:rPr sz="1913" b="1">
+                <a:solidFill>
+                  <a:srgbClr val="000000"/>
+                </a:solidFill>
+              </a:rPr>
+              <a:t> Start small</a:t>
+            </a:r>
+            <a:r>
+              <a:rPr sz="1913">
+                <a:solidFill>
+                  <a:srgbClr val="000000"/>
+                </a:solidFill>
+              </a:rPr>
+              <a:t> — A 30-minute review is enough to turn this from UXL-authored draft into project-backed guidance.</a:t>
             </a:r>
           </a:p>
         </p:txBody>
@@ -31676,272 +31574,6 @@
           <a:p xmlns:a="http://schemas.openxmlformats.org/drawingml/2006/main">
             <a:r>
               <a:t>13</a:t>
-            </a:r>
-          </a:p>
-        </p:txBody>
-      </p:sp>
-    </p:spTree>
-    <p:extLst>
-      <p:ext uri="{BB962C8B-B14F-4D97-AF65-F5344CB8AC3E}">
-        <p14:creationId xmlns:p14="http://schemas.microsoft.com/office/powerpoint/2010/main" val="1742728663"/>
-      </p:ext>
-    </p:extLst>
-  </p:cSld>
-</p:sld>
-</file>
-
-<file path=ppt/slides/slide14.xml><?xml version="1.0" encoding="utf-8"?>
-<p:sld xmlns:p="http://schemas.openxmlformats.org/presentationml/2006/main">
-  <p:cSld>
-    <p:spTree>
-      <p:nvGrpSpPr>
-        <p:cNvPr id="1" name=""/>
-        <p:cNvGrpSpPr/>
-        <p:nvPr/>
-      </p:nvGrpSpPr>
-      <p:grpSpPr>
-        <a:xfrm xmlns:a="http://schemas.openxmlformats.org/drawingml/2006/main"/>
-      </p:grpSpPr>
-      <p:sp>
-        <p:nvSpPr>
-          <p:cNvPr id="2" name="Title 1">
-            <a:extLst xmlns:a="http://schemas.openxmlformats.org/drawingml/2006/main">
-              <a:ext uri="{FF2B5EF4-FFF2-40B4-BE49-F238E27FC236}">
-                <a16:creationId xmlns:a16="http://schemas.microsoft.com/office/drawing/2014/main" id="{F64C2A24-546D-C55C-2C52-97A4957F67E0}"/>
-              </a:ext>
-            </a:extLst>
-          </p:cNvPr>
-          <p:cNvSpPr>
-            <a:spLocks xmlns:a="http://schemas.openxmlformats.org/drawingml/2006/main" noGrp="1"/>
-          </p:cNvSpPr>
-          <p:nvPr>
-            <p:ph type="title" idx="0"/>
-          </p:nvPr>
-        </p:nvSpPr>
-        <p:spPr>
-          <a:xfrm xmlns:a="http://schemas.openxmlformats.org/drawingml/2006/main">
-            <a:off x="838200" y="365125"/>
-            <a:ext cx="10515600" cy="1325700"/>
-          </a:xfrm>
-        </p:spPr>
-        <p:txBody>
-          <a:bodyPr xmlns:a="http://schemas.openxmlformats.org/drawingml/2006/main">
-            <a:normAutofit fontScale="100000"/>
-          </a:bodyPr>
-          <a:lstStyle xmlns:a="http://schemas.openxmlformats.org/drawingml/2006/main"/>
-          <a:p xmlns:a="http://schemas.openxmlformats.org/drawingml/2006/main">
-            <a:r>
-              <a:t>The decision we need from each project</a:t>
-            </a:r>
-          </a:p>
-        </p:txBody>
-      </p:sp>
-      <p:sp>
-        <p:nvSpPr>
-          <p:cNvPr id="3" name="Content Placeholder 2">
-            <a:extLst xmlns:a="http://schemas.openxmlformats.org/drawingml/2006/main">
-              <a:ext uri="{FF2B5EF4-FFF2-40B4-BE49-F238E27FC236}">
-                <a16:creationId xmlns:a16="http://schemas.microsoft.com/office/drawing/2014/main" id="{ECF5C9F1-2691-0BC9-F1E1-01CECB857FE3}"/>
-              </a:ext>
-            </a:extLst>
-          </p:cNvPr>
-          <p:cNvSpPr>
-            <a:spLocks xmlns:a="http://schemas.openxmlformats.org/drawingml/2006/main" noGrp="1"/>
-          </p:cNvSpPr>
-          <p:nvPr>
-            <p:ph type="body" idx="1"/>
-          </p:nvPr>
-        </p:nvSpPr>
-        <p:spPr>
-          <a:xfrm xmlns:a="http://schemas.openxmlformats.org/drawingml/2006/main">
-            <a:off x="838200" y="1825625"/>
-            <a:ext cx="10515600" cy="4351200"/>
-          </a:xfrm>
-        </p:spPr>
-        <p:txBody>
-          <a:bodyPr xmlns:a="http://schemas.openxmlformats.org/drawingml/2006/main" wrap="square" anchor="t">
-            <a:normAutofit fontScale="100000"/>
-          </a:bodyPr>
-          <a:lstStyle xmlns:a="http://schemas.openxmlformats.org/drawingml/2006/main"/>
-          <a:p xmlns:a="http://schemas.openxmlformats.org/drawingml/2006/main">
-            <a:pPr marL="30" indent="-18">
-              <a:spcAft>
-                <a:spcPts val="10"/>
-              </a:spcAft>
-              <a:buChar char="•"/>
-              <a:defRPr sz="1913">
-                <a:solidFill>
-                  <a:srgbClr val="000000"/>
-                </a:solidFill>
-              </a:defRPr>
-            </a:pPr>
-            <a:r>
-              <a:rPr sz="1913" b="1">
-                <a:solidFill>
-                  <a:srgbClr val="000000"/>
-                </a:solidFill>
-              </a:rPr>
-              <a:t> Name one owner</a:t>
-            </a:r>
-            <a:r>
-              <a:rPr sz="1913">
-                <a:solidFill>
-                  <a:srgbClr val="000000"/>
-                </a:solidFill>
-              </a:rPr>
-              <a:t> — A maintainer or small reviewer group for scope and source freshness.</a:t>
-            </a:r>
-          </a:p>
-          <a:p xmlns:a="http://schemas.openxmlformats.org/drawingml/2006/main">
-            <a:pPr marL="30" indent="-18">
-              <a:spcAft>
-                <a:spcPts val="10"/>
-              </a:spcAft>
-              <a:buChar char="•"/>
-              <a:defRPr sz="1913">
-                <a:solidFill>
-                  <a:srgbClr val="000000"/>
-                </a:solidFill>
-              </a:defRPr>
-            </a:pPr>
-            <a:r>
-              <a:rPr sz="1913" b="1">
-                <a:solidFill>
-                  <a:srgbClr val="000000"/>
-                </a:solidFill>
-              </a:rPr>
-              <a:t> Approve or correct the first-pass guidance</a:t>
-            </a:r>
-            <a:r>
-              <a:rPr sz="1913">
-                <a:solidFill>
-                  <a:srgbClr val="000000"/>
-                </a:solidFill>
-              </a:rPr>
-              <a:t> — Especially triggers, gotchas, unsupported paths, and terminology.</a:t>
-            </a:r>
-          </a:p>
-          <a:p xmlns:a="http://schemas.openxmlformats.org/drawingml/2006/main">
-            <a:pPr marL="30" indent="-18">
-              <a:spcAft>
-                <a:spcPts val="10"/>
-              </a:spcAft>
-              <a:buChar char="•"/>
-              <a:defRPr sz="1913">
-                <a:solidFill>
-                  <a:srgbClr val="000000"/>
-                </a:solidFill>
-              </a:defRPr>
-            </a:pPr>
-            <a:r>
-              <a:rPr sz="1913" b="1">
-                <a:solidFill>
-                  <a:srgbClr val="000000"/>
-                </a:solidFill>
-              </a:rPr>
-              <a:t> Validate the task inventory</a:t>
-            </a:r>
-            <a:r>
-              <a:rPr sz="1913">
-                <a:solidFill>
-                  <a:srgbClr val="000000"/>
-                </a:solidFill>
-              </a:rPr>
-              <a:t> — Keep, rewrite, or delete scenarios; nominate one real support issue or regression.</a:t>
-            </a:r>
-          </a:p>
-          <a:p xmlns:a="http://schemas.openxmlformats.org/drawingml/2006/main">
-            <a:pPr marL="30" indent="-18">
-              <a:spcAft>
-                <a:spcPts val="10"/>
-              </a:spcAft>
-              <a:buChar char="•"/>
-              <a:defRPr sz="1913">
-                <a:solidFill>
-                  <a:srgbClr val="000000"/>
-                </a:solidFill>
-              </a:defRPr>
-            </a:pPr>
-            <a:r>
-              <a:rPr sz="1913" b="1">
-                <a:solidFill>
-                  <a:srgbClr val="000000"/>
-                </a:solidFill>
-              </a:rPr>
-              <a:t> Adopt a light cadence</a:t>
-            </a:r>
-            <a:r>
-              <a:rPr sz="1913">
-                <a:solidFill>
-                  <a:srgbClr val="000000"/>
-                </a:solidFill>
-              </a:rPr>
-              <a:t> — Review skill-affecting PRs and recheck sources at releases or quarterly.</a:t>
-            </a:r>
-          </a:p>
-          <a:p xmlns:a="http://schemas.openxmlformats.org/drawingml/2006/main">
-            <a:pPr marL="30" indent="-18">
-              <a:spcAft>
-                <a:spcPts val="10"/>
-              </a:spcAft>
-              <a:buChar char="•"/>
-              <a:defRPr sz="1913">
-                <a:solidFill>
-                  <a:srgbClr val="000000"/>
-                </a:solidFill>
-              </a:defRPr>
-            </a:pPr>
-            <a:r>
-              <a:rPr sz="1913" b="1">
-                <a:solidFill>
-                  <a:srgbClr val="000000"/>
-                </a:solidFill>
-              </a:rPr>
-              <a:t> Start small</a:t>
-            </a:r>
-            <a:r>
-              <a:rPr sz="1913">
-                <a:solidFill>
-                  <a:srgbClr val="000000"/>
-                </a:solidFill>
-              </a:rPr>
-              <a:t> — A 30-minute review is enough to turn this from UXL-authored draft into project-backed guidance.</a:t>
-            </a:r>
-          </a:p>
-        </p:txBody>
-      </p:sp>
-      <p:sp>
-        <p:nvSpPr>
-          <p:cNvPr id="7" name="TextBox 6">
-            <a:extLst xmlns:a="http://schemas.openxmlformats.org/drawingml/2006/main">
-              <a:ext uri="{FF2B5EF4-FFF2-40B4-BE49-F238E27FC236}">
-                <a16:creationId xmlns:a16="http://schemas.microsoft.com/office/drawing/2014/main" id="{E2E6F043-0F84-54F7-A567-6E5851801779}"/>
-              </a:ext>
-            </a:extLst>
-          </p:cNvPr>
-          <p:cNvSpPr>
-            <a:spLocks xmlns:a="http://schemas.openxmlformats.org/drawingml/2006/main" noGrp="1"/>
-          </p:cNvSpPr>
-          <p:nvPr/>
-        </p:nvSpPr>
-        <p:spPr>
-          <a:xfrm xmlns:a="http://schemas.openxmlformats.org/drawingml/2006/main">
-            <a:off x="696174" y="6338986"/>
-            <a:ext cx="284052" cy="307777"/>
-          </a:xfrm>
-          <a:prstGeom xmlns:a="http://schemas.openxmlformats.org/drawingml/2006/main" prst="rect">
-            <a:avLst/>
-          </a:prstGeom>
-          <a:noFill xmlns:a="http://schemas.openxmlformats.org/drawingml/2006/main"/>
-        </p:spPr>
-        <p:txBody>
-          <a:bodyPr xmlns:a="http://schemas.openxmlformats.org/drawingml/2006/main" wrap="none">
-            <a:spAutoFit/>
-          </a:bodyPr>
-          <a:lstStyle xmlns:a="http://schemas.openxmlformats.org/drawingml/2006/main"/>
-          <a:p xmlns:a="http://schemas.openxmlformats.org/drawingml/2006/main">
-            <a:r>
-              <a:t>14</a:t>
             </a:r>
           </a:p>
         </p:txBody>
@@ -31997,7 +31629,7 @@
           <a:lstStyle xmlns:a="http://schemas.openxmlformats.org/drawingml/2006/main"/>
           <a:p xmlns:a="http://schemas.openxmlformats.org/drawingml/2006/main">
             <a:r>
-              <a:t>Why project maintainers should care</a:t>
+              <a:t>What exists today</a:t>
             </a:r>
           </a:p>
         </p:txBody>
@@ -32047,7 +31679,7 @@
                   <a:srgbClr val="000000"/>
                 </a:solidFill>
               </a:rPr>
-              <a:t> Fewer repeat explanations</a:t>
+              <a:t> 8 skills</a:t>
             </a:r>
             <a:r>
               <a:rPr sz="1913">
@@ -32055,7 +31687,7 @@
                   <a:srgbClr val="000000"/>
                 </a:solidFill>
               </a:rPr>
-              <a:t> — Capture the review comments, setup choices, and failure triage your team repeats today.</a:t>
+              <a:t> — Six library portfolios plus shared SYCL build/debug and performance-validation guidance.</a:t>
             </a:r>
           </a:p>
           <a:p xmlns:a="http://schemas.openxmlformats.org/drawingml/2006/main">
@@ -32076,7 +31708,7 @@
                   <a:srgbClr val="000000"/>
                 </a:solidFill>
               </a:rPr>
-              <a:t> Safer agent contributions</a:t>
+              <a:t> 52 scoped evaluation tasks</a:t>
             </a:r>
             <a:r>
               <a:rPr sz="1913">
@@ -32084,7 +31716,7 @@
                   <a:srgbClr val="000000"/>
                 </a:solidFill>
               </a:rPr>
-              <a:t> — Guide agents toward project-owned APIs, tests, evidence, and honest limitations before they open a PR.</a:t>
+              <a:t> — 41 implemented and 11 left visible as planned gaps; this is inventory, not a pass-rate claim.</a:t>
             </a:r>
           </a:p>
           <a:p xmlns:a="http://schemas.openxmlformats.org/drawingml/2006/main">
@@ -32105,7 +31737,7 @@
                   <a:srgbClr val="000000"/>
                 </a:solidFill>
               </a:rPr>
-              <a:t> Reviewable change control</a:t>
+              <a:t> A public control room</a:t>
             </a:r>
             <a:r>
               <a:rPr sz="1913">
@@ -32113,7 +31745,7 @@
                   <a:srgbClr val="000000"/>
                 </a:solidFill>
               </a:rPr>
-              <a:t> — Skills are small repository files; guidance changes arrive through normal GitHub review.</a:t>
+              <a:t> — Skills, evaluations, platforms, methodology, maturity, source freshness, and ownership status.</a:t>
             </a:r>
           </a:p>
           <a:p xmlns:a="http://schemas.openxmlformats.org/drawingml/2006/main">
@@ -32134,7 +31766,7 @@
                   <a:srgbClr val="000000"/>
                 </a:solidFill>
               </a:rPr>
-              <a:t> Measured usefulness</a:t>
+              <a:t> A portable execution model</a:t>
             </a:r>
             <a:r>
               <a:rPr sz="1913">
@@ -32142,7 +31774,7 @@
                   <a:srgbClr val="000000"/>
                 </a:solidFill>
               </a:rPr>
-              <a:t> — Executable evaluations check whether the guidance improves verified outcomes — not just whether it sounds plausible.</a:t>
+              <a:t> — GitHub-hosted checks by default; opt-in specialized machines only when a task contract requires them.</a:t>
             </a:r>
           </a:p>
         </p:txBody>
@@ -32234,7 +31866,7 @@
           <a:lstStyle xmlns:a="http://schemas.openxmlformats.org/drawingml/2006/main"/>
           <a:p xmlns:a="http://schemas.openxmlformats.org/drawingml/2006/main">
             <a:r>
-              <a:t>What exists today</a:t>
+              <a:t>The current skill catalog — at a glance</a:t>
             </a:r>
           </a:p>
         </p:txBody>
@@ -32284,7 +31916,7 @@
                   <a:srgbClr val="000000"/>
                 </a:solidFill>
               </a:rPr>
-              <a:t> 8 skills</a:t>
+              <a:t> oneDNN</a:t>
             </a:r>
             <a:r>
               <a:rPr sz="1913">
@@ -32292,7 +31924,7 @@
                   <a:srgbClr val="000000"/>
                 </a:solidFill>
               </a:rPr>
-              <a:t> — Six library portfolios plus shared SYCL build/debug and performance-validation guidance.</a:t>
+              <a:t> — Primitives, layouts/reorders, fusion, numerics, benchdnn.</a:t>
             </a:r>
           </a:p>
           <a:p xmlns:a="http://schemas.openxmlformats.org/drawingml/2006/main">
@@ -32313,7 +31945,7 @@
                   <a:srgbClr val="000000"/>
                 </a:solidFill>
               </a:rPr>
-              <a:t> 52 scoped evaluation tasks</a:t>
+              <a:t> oneMath</a:t>
             </a:r>
             <a:r>
               <a:rPr sz="1913">
@@ -32321,7 +31953,7 @@
                   <a:srgbClr val="000000"/>
                 </a:solidFill>
               </a:rPr>
-              <a:t> — 41 implemented and 11 left visible as planned gaps; this is inventory, not a pass-rate claim.</a:t>
+              <a:t> — Domains, dispatch modes, queues, backends, linking.</a:t>
             </a:r>
           </a:p>
           <a:p xmlns:a="http://schemas.openxmlformats.org/drawingml/2006/main">
@@ -32342,7 +31974,7 @@
                   <a:srgbClr val="000000"/>
                 </a:solidFill>
               </a:rPr>
-              <a:t> A public control room</a:t>
+              <a:t> oneDAL</a:t>
             </a:r>
             <a:r>
               <a:rPr sz="1913">
@@ -32350,7 +31982,7 @@
                   <a:srgbClr val="000000"/>
                 </a:solidFill>
               </a:rPr>
-              <a:t> — Skills, evaluations, platforms, methodology, maturity, source freshness, and ownership status.</a:t>
+              <a:t> — Python/native paths, modes, tables, metric parity, conversion cost.</a:t>
             </a:r>
           </a:p>
           <a:p xmlns:a="http://schemas.openxmlformats.org/drawingml/2006/main">
@@ -32371,7 +32003,7 @@
                   <a:srgbClr val="000000"/>
                 </a:solidFill>
               </a:rPr>
-              <a:t> A portable execution model</a:t>
+              <a:t> oneTBB</a:t>
             </a:r>
             <a:r>
               <a:rPr sz="1913">
@@ -32379,7 +32011,94 @@
                   <a:srgbClr val="000000"/>
                 </a:solidFill>
               </a:rPr>
-              <a:t> — GitHub-hosted checks by default; opt-in specialized machines only when a task contract requires them.</a:t>
+              <a:t> — Patterns, shared state, flow graphs, arenas, grainsize/affinity.</a:t>
+            </a:r>
+          </a:p>
+          <a:p xmlns:a="http://schemas.openxmlformats.org/drawingml/2006/main">
+            <a:pPr marL="30" indent="-18">
+              <a:spcAft>
+                <a:spcPts val="10"/>
+              </a:spcAft>
+              <a:buChar char="•"/>
+              <a:defRPr sz="1913">
+                <a:solidFill>
+                  <a:srgbClr val="000000"/>
+                </a:solidFill>
+              </a:defRPr>
+            </a:pPr>
+            <a:r>
+              <a:rPr sz="1913" b="1">
+                <a:solidFill>
+                  <a:srgbClr val="000000"/>
+                </a:solidFill>
+              </a:rPr>
+              <a:t> oneDPL</a:t>
+            </a:r>
+            <a:r>
+              <a:rPr sz="1913">
+                <a:solidFill>
+                  <a:srgbClr val="000000"/>
+                </a:solidFill>
+              </a:rPr>
+              <a:t> — Host/device policies, iterators, lifetime, synchronization, ordering.</a:t>
+            </a:r>
+          </a:p>
+          <a:p xmlns:a="http://schemas.openxmlformats.org/drawingml/2006/main">
+            <a:pPr marL="30" indent="-18">
+              <a:spcAft>
+                <a:spcPts val="10"/>
+              </a:spcAft>
+              <a:buChar char="•"/>
+              <a:defRPr sz="1913">
+                <a:solidFill>
+                  <a:srgbClr val="000000"/>
+                </a:solidFill>
+              </a:defRPr>
+            </a:pPr>
+            <a:r>
+              <a:rPr sz="1913" b="1">
+                <a:solidFill>
+                  <a:srgbClr val="000000"/>
+                </a:solidFill>
+              </a:rPr>
+              <a:t> oneCCL</a:t>
+            </a:r>
+            <a:r>
+              <a:rPr sz="1913">
+                <a:solidFill>
+                  <a:srgbClr val="000000"/>
+                </a:solidFill>
+              </a:rPr>
+              <a:t> — Collectives, ranks, launch symmetry, waits, plugins, hangs.</a:t>
+            </a:r>
+          </a:p>
+          <a:p xmlns:a="http://schemas.openxmlformats.org/drawingml/2006/main">
+            <a:pPr marL="30" indent="-18">
+              <a:spcAft>
+                <a:spcPts val="10"/>
+              </a:spcAft>
+              <a:buChar char="•"/>
+              <a:defRPr sz="1913">
+                <a:solidFill>
+                  <a:srgbClr val="000000"/>
+                </a:solidFill>
+              </a:defRPr>
+            </a:pPr>
+            <a:r>
+              <a:rPr sz="1913" b="1">
+                <a:solidFill>
+                  <a:srgbClr val="000000"/>
+                </a:solidFill>
+              </a:rPr>
+              <a:t> Cross-project</a:t>
+            </a:r>
+            <a:r>
+              <a:rPr sz="1913">
+                <a:solidFill>
+                  <a:srgbClr val="000000"/>
+                </a:solidFill>
+              </a:rPr>
+              <a:t> — SYCL build/runtime triage and correctness-first performance evidence.</a:t>
             </a:r>
           </a:p>
         </p:txBody>
@@ -32471,239 +32190,7 @@
           <a:lstStyle xmlns:a="http://schemas.openxmlformats.org/drawingml/2006/main"/>
           <a:p xmlns:a="http://schemas.openxmlformats.org/drawingml/2006/main">
             <a:r>
-              <a:t>The current skill catalog — at a glance</a:t>
-            </a:r>
-          </a:p>
-        </p:txBody>
-      </p:sp>
-      <p:sp>
-        <p:nvSpPr>
-          <p:cNvPr id="3" name="Content Placeholder 2">
-            <a:extLst xmlns:a="http://schemas.openxmlformats.org/drawingml/2006/main">
-              <a:ext uri="{FF2B5EF4-FFF2-40B4-BE49-F238E27FC236}">
-                <a16:creationId xmlns:a16="http://schemas.microsoft.com/office/drawing/2014/main" id="{ECF5C9F1-2691-0BC9-F1E1-01CECB857FE3}"/>
-              </a:ext>
-            </a:extLst>
-          </p:cNvPr>
-          <p:cNvSpPr>
-            <a:spLocks xmlns:a="http://schemas.openxmlformats.org/drawingml/2006/main" noGrp="1"/>
-          </p:cNvSpPr>
-          <p:nvPr>
-            <p:ph type="body" idx="1"/>
-          </p:nvPr>
-        </p:nvSpPr>
-        <p:spPr>
-          <a:xfrm xmlns:a="http://schemas.openxmlformats.org/drawingml/2006/main">
-            <a:off x="838200" y="1825625"/>
-            <a:ext cx="10515600" cy="4351200"/>
-          </a:xfrm>
-        </p:spPr>
-        <p:txBody>
-          <a:bodyPr xmlns:a="http://schemas.openxmlformats.org/drawingml/2006/main" wrap="square" anchor="t">
-            <a:normAutofit fontScale="100000"/>
-          </a:bodyPr>
-          <a:lstStyle xmlns:a="http://schemas.openxmlformats.org/drawingml/2006/main"/>
-          <a:p xmlns:a="http://schemas.openxmlformats.org/drawingml/2006/main">
-            <a:pPr marL="30" indent="-18">
-              <a:spcAft>
-                <a:spcPts val="10"/>
-              </a:spcAft>
-              <a:buChar char="•"/>
-              <a:defRPr sz="1913">
-                <a:solidFill>
-                  <a:srgbClr val="000000"/>
-                </a:solidFill>
-              </a:defRPr>
-            </a:pPr>
-            <a:r>
-              <a:rPr sz="1913" b="1">
-                <a:solidFill>
-                  <a:srgbClr val="000000"/>
-                </a:solidFill>
-              </a:rPr>
-              <a:t> oneDNN</a:t>
-            </a:r>
-            <a:r>
-              <a:rPr sz="1913">
-                <a:solidFill>
-                  <a:srgbClr val="000000"/>
-                </a:solidFill>
-              </a:rPr>
-              <a:t> — Primitives, layouts/reorders, fusion, numerics, benchdnn.</a:t>
-            </a:r>
-          </a:p>
-          <a:p xmlns:a="http://schemas.openxmlformats.org/drawingml/2006/main">
-            <a:pPr marL="30" indent="-18">
-              <a:spcAft>
-                <a:spcPts val="10"/>
-              </a:spcAft>
-              <a:buChar char="•"/>
-              <a:defRPr sz="1913">
-                <a:solidFill>
-                  <a:srgbClr val="000000"/>
-                </a:solidFill>
-              </a:defRPr>
-            </a:pPr>
-            <a:r>
-              <a:rPr sz="1913" b="1">
-                <a:solidFill>
-                  <a:srgbClr val="000000"/>
-                </a:solidFill>
-              </a:rPr>
-              <a:t> oneMath</a:t>
-            </a:r>
-            <a:r>
-              <a:rPr sz="1913">
-                <a:solidFill>
-                  <a:srgbClr val="000000"/>
-                </a:solidFill>
-              </a:rPr>
-              <a:t> — Domains, dispatch modes, queues, backends, linking.</a:t>
-            </a:r>
-          </a:p>
-          <a:p xmlns:a="http://schemas.openxmlformats.org/drawingml/2006/main">
-            <a:pPr marL="30" indent="-18">
-              <a:spcAft>
-                <a:spcPts val="10"/>
-              </a:spcAft>
-              <a:buChar char="•"/>
-              <a:defRPr sz="1913">
-                <a:solidFill>
-                  <a:srgbClr val="000000"/>
-                </a:solidFill>
-              </a:defRPr>
-            </a:pPr>
-            <a:r>
-              <a:rPr sz="1913" b="1">
-                <a:solidFill>
-                  <a:srgbClr val="000000"/>
-                </a:solidFill>
-              </a:rPr>
-              <a:t> oneDAL</a:t>
-            </a:r>
-            <a:r>
-              <a:rPr sz="1913">
-                <a:solidFill>
-                  <a:srgbClr val="000000"/>
-                </a:solidFill>
-              </a:rPr>
-              <a:t> — Python/native paths, modes, tables, metric parity, conversion cost.</a:t>
-            </a:r>
-          </a:p>
-          <a:p xmlns:a="http://schemas.openxmlformats.org/drawingml/2006/main">
-            <a:pPr marL="30" indent="-18">
-              <a:spcAft>
-                <a:spcPts val="10"/>
-              </a:spcAft>
-              <a:buChar char="•"/>
-              <a:defRPr sz="1913">
-                <a:solidFill>
-                  <a:srgbClr val="000000"/>
-                </a:solidFill>
-              </a:defRPr>
-            </a:pPr>
-            <a:r>
-              <a:rPr sz="1913" b="1">
-                <a:solidFill>
-                  <a:srgbClr val="000000"/>
-                </a:solidFill>
-              </a:rPr>
-              <a:t> oneTBB</a:t>
-            </a:r>
-            <a:r>
-              <a:rPr sz="1913">
-                <a:solidFill>
-                  <a:srgbClr val="000000"/>
-                </a:solidFill>
-              </a:rPr>
-              <a:t> — Patterns, shared state, flow graphs, arenas, grainsize/affinity.</a:t>
-            </a:r>
-          </a:p>
-          <a:p xmlns:a="http://schemas.openxmlformats.org/drawingml/2006/main">
-            <a:pPr marL="30" indent="-18">
-              <a:spcAft>
-                <a:spcPts val="10"/>
-              </a:spcAft>
-              <a:buChar char="•"/>
-              <a:defRPr sz="1913">
-                <a:solidFill>
-                  <a:srgbClr val="000000"/>
-                </a:solidFill>
-              </a:defRPr>
-            </a:pPr>
-            <a:r>
-              <a:rPr sz="1913" b="1">
-                <a:solidFill>
-                  <a:srgbClr val="000000"/>
-                </a:solidFill>
-              </a:rPr>
-              <a:t> oneDPL</a:t>
-            </a:r>
-            <a:r>
-              <a:rPr sz="1913">
-                <a:solidFill>
-                  <a:srgbClr val="000000"/>
-                </a:solidFill>
-              </a:rPr>
-              <a:t> — Host/device policies, iterators, lifetime, synchronization, ordering.</a:t>
-            </a:r>
-          </a:p>
-          <a:p xmlns:a="http://schemas.openxmlformats.org/drawingml/2006/main">
-            <a:pPr marL="30" indent="-18">
-              <a:spcAft>
-                <a:spcPts val="10"/>
-              </a:spcAft>
-              <a:buChar char="•"/>
-              <a:defRPr sz="1913">
-                <a:solidFill>
-                  <a:srgbClr val="000000"/>
-                </a:solidFill>
-              </a:defRPr>
-            </a:pPr>
-            <a:r>
-              <a:rPr sz="1913" b="1">
-                <a:solidFill>
-                  <a:srgbClr val="000000"/>
-                </a:solidFill>
-              </a:rPr>
-              <a:t> oneCCL</a:t>
-            </a:r>
-            <a:r>
-              <a:rPr sz="1913">
-                <a:solidFill>
-                  <a:srgbClr val="000000"/>
-                </a:solidFill>
-              </a:rPr>
-              <a:t> — Collectives, ranks, launch symmetry, waits, plugins, hangs.</a:t>
-            </a:r>
-          </a:p>
-          <a:p xmlns:a="http://schemas.openxmlformats.org/drawingml/2006/main">
-            <a:pPr marL="30" indent="-18">
-              <a:spcAft>
-                <a:spcPts val="10"/>
-              </a:spcAft>
-              <a:buChar char="•"/>
-              <a:defRPr sz="1913">
-                <a:solidFill>
-                  <a:srgbClr val="000000"/>
-                </a:solidFill>
-              </a:defRPr>
-            </a:pPr>
-            <a:r>
-              <a:rPr sz="1913" b="1">
-                <a:solidFill>
-                  <a:srgbClr val="000000"/>
-                </a:solidFill>
-              </a:rPr>
-              <a:t> Cross-project</a:t>
-            </a:r>
-            <a:r>
-              <a:rPr sz="1913">
-                <a:solidFill>
-                  <a:srgbClr val="000000"/>
-                </a:solidFill>
-              </a:rPr>
-              <a:t> — SYCL build/runtime triage and correctness-first performance evidence.</a:t>
+              <a:t>Architecture: project knowledge becomes measured evidence</a:t>
             </a:r>
           </a:p>
         </p:txBody>
@@ -32740,98 +32227,6 @@
           <a:p xmlns:a="http://schemas.openxmlformats.org/drawingml/2006/main">
             <a:r>
               <a:t>4</a:t>
-            </a:r>
-          </a:p>
-        </p:txBody>
-      </p:sp>
-    </p:spTree>
-    <p:extLst>
-      <p:ext uri="{BB962C8B-B14F-4D97-AF65-F5344CB8AC3E}">
-        <p14:creationId xmlns:p14="http://schemas.microsoft.com/office/powerpoint/2010/main" val="1742728663"/>
-      </p:ext>
-    </p:extLst>
-  </p:cSld>
-</p:sld>
-</file>
-
-<file path=ppt/slides/slide5.xml><?xml version="1.0" encoding="utf-8"?>
-<p:sld xmlns:p="http://schemas.openxmlformats.org/presentationml/2006/main">
-  <p:cSld>
-    <p:spTree>
-      <p:nvGrpSpPr>
-        <p:cNvPr id="1" name=""/>
-        <p:cNvGrpSpPr/>
-        <p:nvPr/>
-      </p:nvGrpSpPr>
-      <p:grpSpPr>
-        <a:xfrm xmlns:a="http://schemas.openxmlformats.org/drawingml/2006/main"/>
-      </p:grpSpPr>
-      <p:sp>
-        <p:nvSpPr>
-          <p:cNvPr id="2" name="Title 1">
-            <a:extLst xmlns:a="http://schemas.openxmlformats.org/drawingml/2006/main">
-              <a:ext uri="{FF2B5EF4-FFF2-40B4-BE49-F238E27FC236}">
-                <a16:creationId xmlns:a16="http://schemas.microsoft.com/office/drawing/2014/main" id="{F64C2A24-546D-C55C-2C52-97A4957F67E0}"/>
-              </a:ext>
-            </a:extLst>
-          </p:cNvPr>
-          <p:cNvSpPr>
-            <a:spLocks xmlns:a="http://schemas.openxmlformats.org/drawingml/2006/main" noGrp="1"/>
-          </p:cNvSpPr>
-          <p:nvPr>
-            <p:ph type="title" idx="0"/>
-          </p:nvPr>
-        </p:nvSpPr>
-        <p:spPr>
-          <a:xfrm xmlns:a="http://schemas.openxmlformats.org/drawingml/2006/main">
-            <a:off x="838200" y="365125"/>
-            <a:ext cx="10515600" cy="1325700"/>
-          </a:xfrm>
-        </p:spPr>
-        <p:txBody>
-          <a:bodyPr xmlns:a="http://schemas.openxmlformats.org/drawingml/2006/main">
-            <a:normAutofit fontScale="100000"/>
-          </a:bodyPr>
-          <a:lstStyle xmlns:a="http://schemas.openxmlformats.org/drawingml/2006/main"/>
-          <a:p xmlns:a="http://schemas.openxmlformats.org/drawingml/2006/main">
-            <a:r>
-              <a:t>Architecture: project knowledge becomes measured evidence</a:t>
-            </a:r>
-          </a:p>
-        </p:txBody>
-      </p:sp>
-      <p:sp>
-        <p:nvSpPr>
-          <p:cNvPr id="7" name="TextBox 6">
-            <a:extLst xmlns:a="http://schemas.openxmlformats.org/drawingml/2006/main">
-              <a:ext uri="{FF2B5EF4-FFF2-40B4-BE49-F238E27FC236}">
-                <a16:creationId xmlns:a16="http://schemas.microsoft.com/office/drawing/2014/main" id="{E2E6F043-0F84-54F7-A567-6E5851801779}"/>
-              </a:ext>
-            </a:extLst>
-          </p:cNvPr>
-          <p:cNvSpPr>
-            <a:spLocks xmlns:a="http://schemas.openxmlformats.org/drawingml/2006/main" noGrp="1"/>
-          </p:cNvSpPr>
-          <p:nvPr/>
-        </p:nvSpPr>
-        <p:spPr>
-          <a:xfrm xmlns:a="http://schemas.openxmlformats.org/drawingml/2006/main">
-            <a:off x="696174" y="6338986"/>
-            <a:ext cx="284052" cy="307777"/>
-          </a:xfrm>
-          <a:prstGeom xmlns:a="http://schemas.openxmlformats.org/drawingml/2006/main" prst="rect">
-            <a:avLst/>
-          </a:prstGeom>
-          <a:noFill xmlns:a="http://schemas.openxmlformats.org/drawingml/2006/main"/>
-        </p:spPr>
-        <p:txBody>
-          <a:bodyPr xmlns:a="http://schemas.openxmlformats.org/drawingml/2006/main" wrap="none">
-            <a:spAutoFit/>
-          </a:bodyPr>
-          <a:lstStyle xmlns:a="http://schemas.openxmlformats.org/drawingml/2006/main"/>
-          <a:p xmlns:a="http://schemas.openxmlformats.org/drawingml/2006/main">
-            <a:r>
-              <a:t>5</a:t>
             </a:r>
           </a:p>
         </p:txBody>
@@ -33575,6 +32970,120 @@
 </p:sld>
 </file>
 
+<file path=ppt/slides/slide5.xml><?xml version="1.0" encoding="utf-8"?>
+<p:sld xmlns:p="http://schemas.openxmlformats.org/presentationml/2006/main">
+  <p:cSld>
+    <p:spTree>
+      <p:nvGrpSpPr>
+        <p:cNvPr id="1" name=""/>
+        <p:cNvGrpSpPr/>
+        <p:nvPr/>
+      </p:nvGrpSpPr>
+      <p:grpSpPr>
+        <a:xfrm xmlns:a="http://schemas.openxmlformats.org/drawingml/2006/main"/>
+      </p:grpSpPr>
+      <p:sp>
+        <p:nvSpPr>
+          <p:cNvPr id="2" name="Title 1">
+            <a:extLst xmlns:a="http://schemas.openxmlformats.org/drawingml/2006/main">
+              <a:ext uri="{FF2B5EF4-FFF2-40B4-BE49-F238E27FC236}">
+                <a16:creationId xmlns:a16="http://schemas.microsoft.com/office/drawing/2014/main" id="{F64C2A24-546D-C55C-2C52-97A4957F67E0}"/>
+              </a:ext>
+            </a:extLst>
+          </p:cNvPr>
+          <p:cNvSpPr>
+            <a:spLocks xmlns:a="http://schemas.openxmlformats.org/drawingml/2006/main" noGrp="1"/>
+          </p:cNvSpPr>
+          <p:nvPr>
+            <p:ph type="title" idx="0"/>
+          </p:nvPr>
+        </p:nvSpPr>
+        <p:spPr>
+          <a:xfrm xmlns:a="http://schemas.openxmlformats.org/drawingml/2006/main">
+            <a:off x="838200" y="365125"/>
+            <a:ext cx="10515600" cy="1325700"/>
+          </a:xfrm>
+        </p:spPr>
+        <p:txBody>
+          <a:bodyPr xmlns:a="http://schemas.openxmlformats.org/drawingml/2006/main">
+            <a:normAutofit fontScale="100000"/>
+          </a:bodyPr>
+          <a:lstStyle xmlns:a="http://schemas.openxmlformats.org/drawingml/2006/main"/>
+          <a:p xmlns:a="http://schemas.openxmlformats.org/drawingml/2006/main">
+            <a:r>
+              <a:t>The public control room answers: are the skills healthy?</a:t>
+            </a:r>
+          </a:p>
+        </p:txBody>
+      </p:sp>
+      <p:sp>
+        <p:nvSpPr>
+          <p:cNvPr id="7" name="TextBox 6">
+            <a:extLst xmlns:a="http://schemas.openxmlformats.org/drawingml/2006/main">
+              <a:ext uri="{FF2B5EF4-FFF2-40B4-BE49-F238E27FC236}">
+                <a16:creationId xmlns:a16="http://schemas.microsoft.com/office/drawing/2014/main" id="{E2E6F043-0F84-54F7-A567-6E5851801779}"/>
+              </a:ext>
+            </a:extLst>
+          </p:cNvPr>
+          <p:cNvSpPr>
+            <a:spLocks xmlns:a="http://schemas.openxmlformats.org/drawingml/2006/main" noGrp="1"/>
+          </p:cNvSpPr>
+          <p:nvPr/>
+        </p:nvSpPr>
+        <p:spPr>
+          <a:xfrm xmlns:a="http://schemas.openxmlformats.org/drawingml/2006/main">
+            <a:off x="696174" y="6338986"/>
+            <a:ext cx="284052" cy="307777"/>
+          </a:xfrm>
+          <a:prstGeom xmlns:a="http://schemas.openxmlformats.org/drawingml/2006/main" prst="rect">
+            <a:avLst/>
+          </a:prstGeom>
+          <a:noFill xmlns:a="http://schemas.openxmlformats.org/drawingml/2006/main"/>
+        </p:spPr>
+        <p:txBody>
+          <a:bodyPr xmlns:a="http://schemas.openxmlformats.org/drawingml/2006/main" wrap="none">
+            <a:spAutoFit/>
+          </a:bodyPr>
+          <a:lstStyle xmlns:a="http://schemas.openxmlformats.org/drawingml/2006/main"/>
+          <a:p xmlns:a="http://schemas.openxmlformats.org/drawingml/2006/main">
+            <a:r>
+              <a:t>5</a:t>
+            </a:r>
+          </a:p>
+        </p:txBody>
+      </p:sp>
+      <p:pic>
+        <p:nvPicPr>
+          <p:cNvPr id="11" name=""/>
+          <p:cNvPicPr>
+            <a:picLocks xmlns:a="http://schemas.openxmlformats.org/drawingml/2006/main" noChangeAspect="1"/>
+          </p:cNvPicPr>
+          <p:nvPr/>
+        </p:nvPicPr>
+        <p:blipFill>
+          <a:blip xmlns:r="http://schemas.openxmlformats.org/officeDocument/2006/relationships" xmlns:a="http://schemas.openxmlformats.org/drawingml/2006/main" r:embed="R568997c70bd74330"/>
+          <a:stretch xmlns:a="http://schemas.openxmlformats.org/drawingml/2006/main"/>
+        </p:blipFill>
+        <p:spPr>
+          <a:xfrm xmlns:a="http://schemas.openxmlformats.org/drawingml/2006/main" flipH="0" flipV="0">
+            <a:off x="2322187" y="1885950"/>
+            <a:ext cx="7547626" cy="4248150"/>
+          </a:xfrm>
+          <a:prstGeom xmlns:a="http://schemas.openxmlformats.org/drawingml/2006/main" prst="roundRect">
+            <a:avLst/>
+          </a:prstGeom>
+        </p:spPr>
+      </p:pic>
+    </p:spTree>
+    <p:extLst>
+      <p:ext uri="{BB962C8B-B14F-4D97-AF65-F5344CB8AC3E}">
+        <p14:creationId xmlns:p14="http://schemas.microsoft.com/office/powerpoint/2010/main" val="1742728663"/>
+      </p:ext>
+    </p:extLst>
+  </p:cSld>
+</p:sld>
+</file>
+
 <file path=ppt/slides/slide6.xml><?xml version="1.0" encoding="utf-8"?>
 <p:sld xmlns:p="http://schemas.openxmlformats.org/presentationml/2006/main">
   <p:cSld>
@@ -33616,7 +33125,7 @@
           <a:lstStyle xmlns:a="http://schemas.openxmlformats.org/drawingml/2006/main"/>
           <a:p xmlns:a="http://schemas.openxmlformats.org/drawingml/2006/main">
             <a:r>
-              <a:t>The public control room answers: are the skills healthy?</a:t>
+              <a:t>Maintainers can drill from portfolio to exact task contracts</a:t>
             </a:r>
           </a:p>
         </p:txBody>
@@ -33659,120 +33168,6 @@
       </p:sp>
       <p:pic>
         <p:nvPicPr>
-          <p:cNvPr id="11" name=""/>
-          <p:cNvPicPr>
-            <a:picLocks xmlns:a="http://schemas.openxmlformats.org/drawingml/2006/main" noChangeAspect="1"/>
-          </p:cNvPicPr>
-          <p:nvPr/>
-        </p:nvPicPr>
-        <p:blipFill>
-          <a:blip xmlns:r="http://schemas.openxmlformats.org/officeDocument/2006/relationships" xmlns:a="http://schemas.openxmlformats.org/drawingml/2006/main" r:embed="R775010cb1fee4e0e"/>
-          <a:stretch xmlns:a="http://schemas.openxmlformats.org/drawingml/2006/main"/>
-        </p:blipFill>
-        <p:spPr>
-          <a:xfrm xmlns:a="http://schemas.openxmlformats.org/drawingml/2006/main" flipH="0" flipV="0">
-            <a:off x="2322187" y="1885950"/>
-            <a:ext cx="7547626" cy="4248150"/>
-          </a:xfrm>
-          <a:prstGeom xmlns:a="http://schemas.openxmlformats.org/drawingml/2006/main" prst="roundRect">
-            <a:avLst/>
-          </a:prstGeom>
-        </p:spPr>
-      </p:pic>
-    </p:spTree>
-    <p:extLst>
-      <p:ext uri="{BB962C8B-B14F-4D97-AF65-F5344CB8AC3E}">
-        <p14:creationId xmlns:p14="http://schemas.microsoft.com/office/powerpoint/2010/main" val="1742728663"/>
-      </p:ext>
-    </p:extLst>
-  </p:cSld>
-</p:sld>
-</file>
-
-<file path=ppt/slides/slide7.xml><?xml version="1.0" encoding="utf-8"?>
-<p:sld xmlns:p="http://schemas.openxmlformats.org/presentationml/2006/main">
-  <p:cSld>
-    <p:spTree>
-      <p:nvGrpSpPr>
-        <p:cNvPr id="1" name=""/>
-        <p:cNvGrpSpPr/>
-        <p:nvPr/>
-      </p:nvGrpSpPr>
-      <p:grpSpPr>
-        <a:xfrm xmlns:a="http://schemas.openxmlformats.org/drawingml/2006/main"/>
-      </p:grpSpPr>
-      <p:sp>
-        <p:nvSpPr>
-          <p:cNvPr id="2" name="Title 1">
-            <a:extLst xmlns:a="http://schemas.openxmlformats.org/drawingml/2006/main">
-              <a:ext uri="{FF2B5EF4-FFF2-40B4-BE49-F238E27FC236}">
-                <a16:creationId xmlns:a16="http://schemas.microsoft.com/office/drawing/2014/main" id="{F64C2A24-546D-C55C-2C52-97A4957F67E0}"/>
-              </a:ext>
-            </a:extLst>
-          </p:cNvPr>
-          <p:cNvSpPr>
-            <a:spLocks xmlns:a="http://schemas.openxmlformats.org/drawingml/2006/main" noGrp="1"/>
-          </p:cNvSpPr>
-          <p:nvPr>
-            <p:ph type="title" idx="0"/>
-          </p:nvPr>
-        </p:nvSpPr>
-        <p:spPr>
-          <a:xfrm xmlns:a="http://schemas.openxmlformats.org/drawingml/2006/main">
-            <a:off x="838200" y="365125"/>
-            <a:ext cx="10515600" cy="1325700"/>
-          </a:xfrm>
-        </p:spPr>
-        <p:txBody>
-          <a:bodyPr xmlns:a="http://schemas.openxmlformats.org/drawingml/2006/main">
-            <a:normAutofit fontScale="100000"/>
-          </a:bodyPr>
-          <a:lstStyle xmlns:a="http://schemas.openxmlformats.org/drawingml/2006/main"/>
-          <a:p xmlns:a="http://schemas.openxmlformats.org/drawingml/2006/main">
-            <a:r>
-              <a:t>Maintainers can drill from portfolio to exact task contracts</a:t>
-            </a:r>
-          </a:p>
-        </p:txBody>
-      </p:sp>
-      <p:sp>
-        <p:nvSpPr>
-          <p:cNvPr id="7" name="TextBox 6">
-            <a:extLst xmlns:a="http://schemas.openxmlformats.org/drawingml/2006/main">
-              <a:ext uri="{FF2B5EF4-FFF2-40B4-BE49-F238E27FC236}">
-                <a16:creationId xmlns:a16="http://schemas.microsoft.com/office/drawing/2014/main" id="{E2E6F043-0F84-54F7-A567-6E5851801779}"/>
-              </a:ext>
-            </a:extLst>
-          </p:cNvPr>
-          <p:cNvSpPr>
-            <a:spLocks xmlns:a="http://schemas.openxmlformats.org/drawingml/2006/main" noGrp="1"/>
-          </p:cNvSpPr>
-          <p:nvPr/>
-        </p:nvSpPr>
-        <p:spPr>
-          <a:xfrm xmlns:a="http://schemas.openxmlformats.org/drawingml/2006/main">
-            <a:off x="696174" y="6338986"/>
-            <a:ext cx="284052" cy="307777"/>
-          </a:xfrm>
-          <a:prstGeom xmlns:a="http://schemas.openxmlformats.org/drawingml/2006/main" prst="rect">
-            <a:avLst/>
-          </a:prstGeom>
-          <a:noFill xmlns:a="http://schemas.openxmlformats.org/drawingml/2006/main"/>
-        </p:spPr>
-        <p:txBody>
-          <a:bodyPr xmlns:a="http://schemas.openxmlformats.org/drawingml/2006/main" wrap="none">
-            <a:spAutoFit/>
-          </a:bodyPr>
-          <a:lstStyle xmlns:a="http://schemas.openxmlformats.org/drawingml/2006/main"/>
-          <a:p xmlns:a="http://schemas.openxmlformats.org/drawingml/2006/main">
-            <a:r>
-              <a:t>7</a:t>
-            </a:r>
-          </a:p>
-        </p:txBody>
-      </p:sp>
-      <p:pic>
-        <p:nvPicPr>
           <p:cNvPr id="16" name=""/>
           <p:cNvPicPr>
             <a:picLocks xmlns:a="http://schemas.openxmlformats.org/drawingml/2006/main" noChangeAspect="1"/>
@@ -33780,7 +33175,7 @@
           <p:nvPr/>
         </p:nvPicPr>
         <p:blipFill>
-          <a:blip xmlns:r="http://schemas.openxmlformats.org/officeDocument/2006/relationships" xmlns:a="http://schemas.openxmlformats.org/drawingml/2006/main" r:embed="R36104cc265634f38"/>
+          <a:blip xmlns:r="http://schemas.openxmlformats.org/officeDocument/2006/relationships" xmlns:a="http://schemas.openxmlformats.org/drawingml/2006/main" r:embed="Re9971616fcb647c2"/>
           <a:stretch xmlns:a="http://schemas.openxmlformats.org/drawingml/2006/main"/>
         </p:blipFill>
         <p:spPr>
@@ -33802,7 +33197,7 @@
           <p:nvPr/>
         </p:nvPicPr>
         <p:blipFill>
-          <a:blip xmlns:r="http://schemas.openxmlformats.org/officeDocument/2006/relationships" xmlns:a="http://schemas.openxmlformats.org/drawingml/2006/main" r:embed="Rb73ee2a552ee4990"/>
+          <a:blip xmlns:r="http://schemas.openxmlformats.org/officeDocument/2006/relationships" xmlns:a="http://schemas.openxmlformats.org/drawingml/2006/main" r:embed="R1ee3559e1c064f44"/>
           <a:stretch xmlns:a="http://schemas.openxmlformats.org/drawingml/2006/main"/>
         </p:blipFill>
         <p:spPr>
@@ -33947,6 +33342,120 @@
 </p:sld>
 </file>
 
+<file path=ppt/slides/slide7.xml><?xml version="1.0" encoding="utf-8"?>
+<p:sld xmlns:p="http://schemas.openxmlformats.org/presentationml/2006/main">
+  <p:cSld>
+    <p:spTree>
+      <p:nvGrpSpPr>
+        <p:cNvPr id="1" name=""/>
+        <p:cNvGrpSpPr/>
+        <p:nvPr/>
+      </p:nvGrpSpPr>
+      <p:grpSpPr>
+        <a:xfrm xmlns:a="http://schemas.openxmlformats.org/drawingml/2006/main"/>
+      </p:grpSpPr>
+      <p:sp>
+        <p:nvSpPr>
+          <p:cNvPr id="2" name="Title 1">
+            <a:extLst xmlns:a="http://schemas.openxmlformats.org/drawingml/2006/main">
+              <a:ext uri="{FF2B5EF4-FFF2-40B4-BE49-F238E27FC236}">
+                <a16:creationId xmlns:a16="http://schemas.microsoft.com/office/drawing/2014/main" id="{F64C2A24-546D-C55C-2C52-97A4957F67E0}"/>
+              </a:ext>
+            </a:extLst>
+          </p:cNvPr>
+          <p:cNvSpPr>
+            <a:spLocks xmlns:a="http://schemas.openxmlformats.org/drawingml/2006/main" noGrp="1"/>
+          </p:cNvSpPr>
+          <p:nvPr>
+            <p:ph type="title" idx="0"/>
+          </p:nvPr>
+        </p:nvSpPr>
+        <p:spPr>
+          <a:xfrm xmlns:a="http://schemas.openxmlformats.org/drawingml/2006/main">
+            <a:off x="838200" y="365125"/>
+            <a:ext cx="10515600" cy="1325700"/>
+          </a:xfrm>
+        </p:spPr>
+        <p:txBody>
+          <a:bodyPr xmlns:a="http://schemas.openxmlformats.org/drawingml/2006/main">
+            <a:normAutofit fontScale="100000"/>
+          </a:bodyPr>
+          <a:lstStyle xmlns:a="http://schemas.openxmlformats.org/drawingml/2006/main"/>
+          <a:p xmlns:a="http://schemas.openxmlformats.org/drawingml/2006/main">
+            <a:r>
+              <a:t>The methodology is deliberately claim-resistant</a:t>
+            </a:r>
+          </a:p>
+        </p:txBody>
+      </p:sp>
+      <p:sp>
+        <p:nvSpPr>
+          <p:cNvPr id="7" name="TextBox 6">
+            <a:extLst xmlns:a="http://schemas.openxmlformats.org/drawingml/2006/main">
+              <a:ext uri="{FF2B5EF4-FFF2-40B4-BE49-F238E27FC236}">
+                <a16:creationId xmlns:a16="http://schemas.microsoft.com/office/drawing/2014/main" id="{E2E6F043-0F84-54F7-A567-6E5851801779}"/>
+              </a:ext>
+            </a:extLst>
+          </p:cNvPr>
+          <p:cNvSpPr>
+            <a:spLocks xmlns:a="http://schemas.openxmlformats.org/drawingml/2006/main" noGrp="1"/>
+          </p:cNvSpPr>
+          <p:nvPr/>
+        </p:nvSpPr>
+        <p:spPr>
+          <a:xfrm xmlns:a="http://schemas.openxmlformats.org/drawingml/2006/main">
+            <a:off x="696174" y="6338986"/>
+            <a:ext cx="284052" cy="307777"/>
+          </a:xfrm>
+          <a:prstGeom xmlns:a="http://schemas.openxmlformats.org/drawingml/2006/main" prst="rect">
+            <a:avLst/>
+          </a:prstGeom>
+          <a:noFill xmlns:a="http://schemas.openxmlformats.org/drawingml/2006/main"/>
+        </p:spPr>
+        <p:txBody>
+          <a:bodyPr xmlns:a="http://schemas.openxmlformats.org/drawingml/2006/main" wrap="none">
+            <a:spAutoFit/>
+          </a:bodyPr>
+          <a:lstStyle xmlns:a="http://schemas.openxmlformats.org/drawingml/2006/main"/>
+          <a:p xmlns:a="http://schemas.openxmlformats.org/drawingml/2006/main">
+            <a:r>
+              <a:t>7</a:t>
+            </a:r>
+          </a:p>
+        </p:txBody>
+      </p:sp>
+      <p:pic>
+        <p:nvPicPr>
+          <p:cNvPr id="11" name=""/>
+          <p:cNvPicPr>
+            <a:picLocks xmlns:a="http://schemas.openxmlformats.org/drawingml/2006/main" noChangeAspect="1"/>
+          </p:cNvPicPr>
+          <p:nvPr/>
+        </p:nvPicPr>
+        <p:blipFill>
+          <a:blip xmlns:r="http://schemas.openxmlformats.org/officeDocument/2006/relationships" xmlns:a="http://schemas.openxmlformats.org/drawingml/2006/main" r:embed="R5281d3996e034655"/>
+          <a:stretch xmlns:a="http://schemas.openxmlformats.org/drawingml/2006/main"/>
+        </p:blipFill>
+        <p:spPr>
+          <a:xfrm xmlns:a="http://schemas.openxmlformats.org/drawingml/2006/main" flipH="0" flipV="0">
+            <a:off x="2322187" y="1885950"/>
+            <a:ext cx="7547626" cy="4248150"/>
+          </a:xfrm>
+          <a:prstGeom xmlns:a="http://schemas.openxmlformats.org/drawingml/2006/main" prst="roundRect">
+            <a:avLst/>
+          </a:prstGeom>
+        </p:spPr>
+      </p:pic>
+    </p:spTree>
+    <p:extLst>
+      <p:ext uri="{BB962C8B-B14F-4D97-AF65-F5344CB8AC3E}">
+        <p14:creationId xmlns:p14="http://schemas.microsoft.com/office/powerpoint/2010/main" val="1742728663"/>
+      </p:ext>
+    </p:extLst>
+  </p:cSld>
+</p:sld>
+</file>
+
 <file path=ppt/slides/slide8.xml><?xml version="1.0" encoding="utf-8"?>
 <p:sld xmlns:p="http://schemas.openxmlformats.org/presentationml/2006/main">
   <p:cSld>
@@ -33988,7 +33497,7 @@
           <a:lstStyle xmlns:a="http://schemas.openxmlformats.org/drawingml/2006/main"/>
           <a:p xmlns:a="http://schemas.openxmlformats.org/drawingml/2006/main">
             <a:r>
-              <a:t>The methodology is deliberately claim-resistant</a:t>
+              <a:t>Every claim lives inside a matched evaluation cell</a:t>
             </a:r>
           </a:p>
         </p:txBody>
@@ -34025,120 +33534,6 @@
           <a:p xmlns:a="http://schemas.openxmlformats.org/drawingml/2006/main">
             <a:r>
               <a:t>8</a:t>
-            </a:r>
-          </a:p>
-        </p:txBody>
-      </p:sp>
-      <p:pic>
-        <p:nvPicPr>
-          <p:cNvPr id="11" name=""/>
-          <p:cNvPicPr>
-            <a:picLocks xmlns:a="http://schemas.openxmlformats.org/drawingml/2006/main" noChangeAspect="1"/>
-          </p:cNvPicPr>
-          <p:nvPr/>
-        </p:nvPicPr>
-        <p:blipFill>
-          <a:blip xmlns:r="http://schemas.openxmlformats.org/officeDocument/2006/relationships" xmlns:a="http://schemas.openxmlformats.org/drawingml/2006/main" r:embed="R60df57cf7cc444a8"/>
-          <a:stretch xmlns:a="http://schemas.openxmlformats.org/drawingml/2006/main"/>
-        </p:blipFill>
-        <p:spPr>
-          <a:xfrm xmlns:a="http://schemas.openxmlformats.org/drawingml/2006/main" flipH="0" flipV="0">
-            <a:off x="2322187" y="1885950"/>
-            <a:ext cx="7547626" cy="4248150"/>
-          </a:xfrm>
-          <a:prstGeom xmlns:a="http://schemas.openxmlformats.org/drawingml/2006/main" prst="roundRect">
-            <a:avLst/>
-          </a:prstGeom>
-        </p:spPr>
-      </p:pic>
-    </p:spTree>
-    <p:extLst>
-      <p:ext uri="{BB962C8B-B14F-4D97-AF65-F5344CB8AC3E}">
-        <p14:creationId xmlns:p14="http://schemas.microsoft.com/office/powerpoint/2010/main" val="1742728663"/>
-      </p:ext>
-    </p:extLst>
-  </p:cSld>
-</p:sld>
-</file>
-
-<file path=ppt/slides/slide9.xml><?xml version="1.0" encoding="utf-8"?>
-<p:sld xmlns:p="http://schemas.openxmlformats.org/presentationml/2006/main">
-  <p:cSld>
-    <p:spTree>
-      <p:nvGrpSpPr>
-        <p:cNvPr id="1" name=""/>
-        <p:cNvGrpSpPr/>
-        <p:nvPr/>
-      </p:nvGrpSpPr>
-      <p:grpSpPr>
-        <a:xfrm xmlns:a="http://schemas.openxmlformats.org/drawingml/2006/main"/>
-      </p:grpSpPr>
-      <p:sp>
-        <p:nvSpPr>
-          <p:cNvPr id="2" name="Title 1">
-            <a:extLst xmlns:a="http://schemas.openxmlformats.org/drawingml/2006/main">
-              <a:ext uri="{FF2B5EF4-FFF2-40B4-BE49-F238E27FC236}">
-                <a16:creationId xmlns:a16="http://schemas.microsoft.com/office/drawing/2014/main" id="{F64C2A24-546D-C55C-2C52-97A4957F67E0}"/>
-              </a:ext>
-            </a:extLst>
-          </p:cNvPr>
-          <p:cNvSpPr>
-            <a:spLocks xmlns:a="http://schemas.openxmlformats.org/drawingml/2006/main" noGrp="1"/>
-          </p:cNvSpPr>
-          <p:nvPr>
-            <p:ph type="title" idx="0"/>
-          </p:nvPr>
-        </p:nvSpPr>
-        <p:spPr>
-          <a:xfrm xmlns:a="http://schemas.openxmlformats.org/drawingml/2006/main">
-            <a:off x="838200" y="365125"/>
-            <a:ext cx="10515600" cy="1325700"/>
-          </a:xfrm>
-        </p:spPr>
-        <p:txBody>
-          <a:bodyPr xmlns:a="http://schemas.openxmlformats.org/drawingml/2006/main">
-            <a:normAutofit fontScale="100000"/>
-          </a:bodyPr>
-          <a:lstStyle xmlns:a="http://schemas.openxmlformats.org/drawingml/2006/main"/>
-          <a:p xmlns:a="http://schemas.openxmlformats.org/drawingml/2006/main">
-            <a:r>
-              <a:t>Every claim lives inside a matched evaluation cell</a:t>
-            </a:r>
-          </a:p>
-        </p:txBody>
-      </p:sp>
-      <p:sp>
-        <p:nvSpPr>
-          <p:cNvPr id="7" name="TextBox 6">
-            <a:extLst xmlns:a="http://schemas.openxmlformats.org/drawingml/2006/main">
-              <a:ext uri="{FF2B5EF4-FFF2-40B4-BE49-F238E27FC236}">
-                <a16:creationId xmlns:a16="http://schemas.microsoft.com/office/drawing/2014/main" id="{E2E6F043-0F84-54F7-A567-6E5851801779}"/>
-              </a:ext>
-            </a:extLst>
-          </p:cNvPr>
-          <p:cNvSpPr>
-            <a:spLocks xmlns:a="http://schemas.openxmlformats.org/drawingml/2006/main" noGrp="1"/>
-          </p:cNvSpPr>
-          <p:nvPr/>
-        </p:nvSpPr>
-        <p:spPr>
-          <a:xfrm xmlns:a="http://schemas.openxmlformats.org/drawingml/2006/main">
-            <a:off x="696174" y="6338986"/>
-            <a:ext cx="284052" cy="307777"/>
-          </a:xfrm>
-          <a:prstGeom xmlns:a="http://schemas.openxmlformats.org/drawingml/2006/main" prst="rect">
-            <a:avLst/>
-          </a:prstGeom>
-          <a:noFill xmlns:a="http://schemas.openxmlformats.org/drawingml/2006/main"/>
-        </p:spPr>
-        <p:txBody>
-          <a:bodyPr xmlns:a="http://schemas.openxmlformats.org/drawingml/2006/main" wrap="none">
-            <a:spAutoFit/>
-          </a:bodyPr>
-          <a:lstStyle xmlns:a="http://schemas.openxmlformats.org/drawingml/2006/main"/>
-          <a:p xmlns:a="http://schemas.openxmlformats.org/drawingml/2006/main">
-            <a:r>
-              <a:t>9</a:t>
             </a:r>
           </a:p>
         </p:txBody>
@@ -34796,6 +34191,253 @@
                 </a:solidFill>
               </a:rPr>
               <a:t>Repeat across representative cells; report differences. Never average incompatible contexts into a universal score.</a:t>
+            </a:r>
+          </a:p>
+        </p:txBody>
+      </p:sp>
+    </p:spTree>
+    <p:extLst>
+      <p:ext uri="{BB962C8B-B14F-4D97-AF65-F5344CB8AC3E}">
+        <p14:creationId xmlns:p14="http://schemas.microsoft.com/office/powerpoint/2010/main" val="1742728663"/>
+      </p:ext>
+    </p:extLst>
+  </p:cSld>
+</p:sld>
+</file>
+
+<file path=ppt/slides/slide9.xml><?xml version="1.0" encoding="utf-8"?>
+<p:sld xmlns:p="http://schemas.openxmlformats.org/presentationml/2006/main">
+  <p:cSld>
+    <p:spTree>
+      <p:nvGrpSpPr>
+        <p:cNvPr id="1" name=""/>
+        <p:cNvGrpSpPr/>
+        <p:nvPr/>
+      </p:nvGrpSpPr>
+      <p:grpSpPr>
+        <a:xfrm xmlns:a="http://schemas.openxmlformats.org/drawingml/2006/main"/>
+      </p:grpSpPr>
+      <p:sp>
+        <p:nvSpPr>
+          <p:cNvPr id="2" name="Title 1">
+            <a:extLst xmlns:a="http://schemas.openxmlformats.org/drawingml/2006/main">
+              <a:ext uri="{FF2B5EF4-FFF2-40B4-BE49-F238E27FC236}">
+                <a16:creationId xmlns:a16="http://schemas.microsoft.com/office/drawing/2014/main" id="{F64C2A24-546D-C55C-2C52-97A4957F67E0}"/>
+              </a:ext>
+            </a:extLst>
+          </p:cNvPr>
+          <p:cNvSpPr>
+            <a:spLocks xmlns:a="http://schemas.openxmlformats.org/drawingml/2006/main" noGrp="1"/>
+          </p:cNvSpPr>
+          <p:nvPr>
+            <p:ph type="title" idx="0"/>
+          </p:nvPr>
+        </p:nvSpPr>
+        <p:spPr>
+          <a:xfrm xmlns:a="http://schemas.openxmlformats.org/drawingml/2006/main">
+            <a:off x="838200" y="365125"/>
+            <a:ext cx="10515600" cy="1325700"/>
+          </a:xfrm>
+        </p:spPr>
+        <p:txBody>
+          <a:bodyPr xmlns:a="http://schemas.openxmlformats.org/drawingml/2006/main">
+            <a:normAutofit fontScale="100000"/>
+          </a:bodyPr>
+          <a:lstStyle xmlns:a="http://schemas.openxmlformats.org/drawingml/2006/main"/>
+          <a:p xmlns:a="http://schemas.openxmlformats.org/drawingml/2006/main">
+            <a:r>
+              <a:t>Maintainer pushback is expected — and the answer is scoped evidence</a:t>
+            </a:r>
+          </a:p>
+        </p:txBody>
+      </p:sp>
+      <p:sp>
+        <p:nvSpPr>
+          <p:cNvPr id="3" name="Content Placeholder 2">
+            <a:extLst xmlns:a="http://schemas.openxmlformats.org/drawingml/2006/main">
+              <a:ext uri="{FF2B5EF4-FFF2-40B4-BE49-F238E27FC236}">
+                <a16:creationId xmlns:a16="http://schemas.microsoft.com/office/drawing/2014/main" id="{ECF5C9F1-2691-0BC9-F1E1-01CECB857FE3}"/>
+              </a:ext>
+            </a:extLst>
+          </p:cNvPr>
+          <p:cNvSpPr>
+            <a:spLocks xmlns:a="http://schemas.openxmlformats.org/drawingml/2006/main" noGrp="1"/>
+          </p:cNvSpPr>
+          <p:nvPr>
+            <p:ph type="body" idx="1"/>
+          </p:nvPr>
+        </p:nvSpPr>
+        <p:spPr>
+          <a:xfrm xmlns:a="http://schemas.openxmlformats.org/drawingml/2006/main">
+            <a:off x="838200" y="1825625"/>
+            <a:ext cx="10515600" cy="4351200"/>
+          </a:xfrm>
+        </p:spPr>
+        <p:txBody>
+          <a:bodyPr xmlns:a="http://schemas.openxmlformats.org/drawingml/2006/main" wrap="square" anchor="t">
+            <a:normAutofit fontScale="100000"/>
+          </a:bodyPr>
+          <a:lstStyle xmlns:a="http://schemas.openxmlformats.org/drawingml/2006/main"/>
+          <a:p xmlns:a="http://schemas.openxmlformats.org/drawingml/2006/main">
+            <a:pPr marL="30" indent="-18">
+              <a:spcAft>
+                <a:spcPts val="10"/>
+              </a:spcAft>
+              <a:buChar char="•"/>
+              <a:defRPr sz="1913">
+                <a:solidFill>
+                  <a:srgbClr val="000000"/>
+                </a:solidFill>
+              </a:defRPr>
+            </a:pPr>
+            <a:r>
+              <a:rPr sz="1913" b="1">
+                <a:solidFill>
+                  <a:srgbClr val="000000"/>
+                </a:solidFill>
+              </a:rPr>
+              <a:t> Do you test every combination? — No. We publish representative, risk-based cells and the gaps.</a:t>
+            </a:r>
+          </a:p>
+          <a:p xmlns:a="http://schemas.openxmlformats.org/drawingml/2006/main">
+            <a:pPr marL="30" indent="-18">
+              <a:spcAft>
+                <a:spcPts val="10"/>
+              </a:spcAft>
+              <a:buChar char="•"/>
+              <a:defRPr sz="1913">
+                <a:solidFill>
+                  <a:srgbClr val="000000"/>
+                </a:solidFill>
+              </a:defRPr>
+            </a:pPr>
+            <a:r>
+              <a:rPr sz="1913" b="1">
+                <a:solidFill>
+                  <a:srgbClr val="000000"/>
+                </a:solidFill>
+              </a:rPr>
+              <a:t> What changes invalidate evidence? — Re-run affected cells; older results remain history, not current proof.</a:t>
+            </a:r>
+          </a:p>
+          <a:p xmlns:a="http://schemas.openxmlformats.org/drawingml/2006/main">
+            <a:pPr marL="30" indent="-18">
+              <a:spcAft>
+                <a:spcPts val="10"/>
+              </a:spcAft>
+              <a:buChar char="•"/>
+              <a:defRPr sz="1913">
+                <a:solidFill>
+                  <a:srgbClr val="000000"/>
+                </a:solidFill>
+              </a:defRPr>
+            </a:pPr>
+            <a:r>
+              <a:rPr sz="1913" b="1">
+                <a:solidFill>
+                  <a:srgbClr val="000000"/>
+                </a:solidFill>
+              </a:rPr>
+              <a:t> How do you limit overfitting? — Maintainer incidents, hidden checks, negative controls, multiple tasks, and trajectory review.</a:t>
+            </a:r>
+          </a:p>
+          <a:p xmlns:a="http://schemas.openxmlformats.org/drawingml/2006/main">
+            <a:pPr marL="30" indent="-18">
+              <a:spcAft>
+                <a:spcPts val="10"/>
+              </a:spcAft>
+              <a:buChar char="•"/>
+              <a:defRPr sz="1913">
+                <a:solidFill>
+                  <a:srgbClr val="000000"/>
+                </a:solidFill>
+              </a:defRPr>
+            </a:pPr>
+            <a:r>
+              <a:rPr sz="1913" b="1">
+                <a:solidFill>
+                  <a:srgbClr val="000000"/>
+                </a:solidFill>
+              </a:rPr>
+              <a:t> What if every arm passes? — Keep it as smoke coverage; claim no lift and seek a harder task.</a:t>
+            </a:r>
+          </a:p>
+          <a:p xmlns:a="http://schemas.openxmlformats.org/drawingml/2006/main">
+            <a:pPr marL="30" indent="-18">
+              <a:spcAft>
+                <a:spcPts val="10"/>
+              </a:spcAft>
+              <a:buChar char="•"/>
+              <a:defRPr sz="1913">
+                <a:solidFill>
+                  <a:srgbClr val="000000"/>
+                </a:solidFill>
+              </a:defRPr>
+            </a:pPr>
+            <a:r>
+              <a:rPr sz="1913" b="1">
+                <a:solidFill>
+                  <a:srgbClr val="000000"/>
+                </a:solidFill>
+              </a:rPr>
+              <a:t> Does hardware qualification prove skill value? — No. Qualification and matched skill trials are separate gates.</a:t>
+            </a:r>
+          </a:p>
+          <a:p xmlns:a="http://schemas.openxmlformats.org/drawingml/2006/main">
+            <a:pPr marL="30" indent="-18">
+              <a:spcAft>
+                <a:spcPts val="10"/>
+              </a:spcAft>
+              <a:buChar char="•"/>
+              <a:defRPr sz="1913">
+                <a:solidFill>
+                  <a:srgbClr val="000000"/>
+                </a:solidFill>
+              </a:defRPr>
+            </a:pPr>
+            <a:r>
+              <a:rPr sz="1913" b="1">
+                <a:solidFill>
+                  <a:srgbClr val="000000"/>
+                </a:solidFill>
+              </a:rPr>
+              <a:t> Can scores be pooled? — No universal score; report conclusions within each model, harness, software, and environment cell.</a:t>
+            </a:r>
+          </a:p>
+        </p:txBody>
+      </p:sp>
+      <p:sp>
+        <p:nvSpPr>
+          <p:cNvPr id="7" name="TextBox 6">
+            <a:extLst xmlns:a="http://schemas.openxmlformats.org/drawingml/2006/main">
+              <a:ext uri="{FF2B5EF4-FFF2-40B4-BE49-F238E27FC236}">
+                <a16:creationId xmlns:a16="http://schemas.microsoft.com/office/drawing/2014/main" id="{E2E6F043-0F84-54F7-A567-6E5851801779}"/>
+              </a:ext>
+            </a:extLst>
+          </p:cNvPr>
+          <p:cNvSpPr>
+            <a:spLocks xmlns:a="http://schemas.openxmlformats.org/drawingml/2006/main" noGrp="1"/>
+          </p:cNvSpPr>
+          <p:nvPr/>
+        </p:nvSpPr>
+        <p:spPr>
+          <a:xfrm xmlns:a="http://schemas.openxmlformats.org/drawingml/2006/main">
+            <a:off x="696174" y="6338986"/>
+            <a:ext cx="284052" cy="307777"/>
+          </a:xfrm>
+          <a:prstGeom xmlns:a="http://schemas.openxmlformats.org/drawingml/2006/main" prst="rect">
+            <a:avLst/>
+          </a:prstGeom>
+          <a:noFill xmlns:a="http://schemas.openxmlformats.org/drawingml/2006/main"/>
+        </p:spPr>
+        <p:txBody>
+          <a:bodyPr xmlns:a="http://schemas.openxmlformats.org/drawingml/2006/main" wrap="none">
+            <a:spAutoFit/>
+          </a:bodyPr>
+          <a:lstStyle xmlns:a="http://schemas.openxmlformats.org/drawingml/2006/main"/>
+          <a:p xmlns:a="http://schemas.openxmlformats.org/drawingml/2006/main">
+            <a:r>
+              <a:t>9</a:t>
             </a:r>
           </a:p>
         </p:txBody>

--- a/evaluation/dashboard/public/decks/uxl-skills-maintainer-overview.pptx
+++ b/evaluation/dashboard/public/decks/uxl-skills-maintainer-overview.pptx
@@ -2,26 +2,26 @@
 <file path=ppt/presentation.xml><?xml version="1.0" encoding="utf-8"?>
 <p:presentation xmlns:p="http://schemas.openxmlformats.org/presentationml/2006/main">
   <p:sldMasterIdLst>
-    <p:sldMasterId xmlns:r="http://schemas.openxmlformats.org/officeDocument/2006/relationships" id="2147483648" r:id="Rb7987ec1b83443e2"/>
-    <p:sldMasterId xmlns:r="http://schemas.openxmlformats.org/officeDocument/2006/relationships" id="2147483665" r:id="R3f71cc09775c4d41"/>
+    <p:sldMasterId xmlns:r="http://schemas.openxmlformats.org/officeDocument/2006/relationships" id="2147483648" r:id="R26631a5110604ac2"/>
+    <p:sldMasterId xmlns:r="http://schemas.openxmlformats.org/officeDocument/2006/relationships" id="2147483665" r:id="R5e987403b540451b"/>
   </p:sldMasterIdLst>
   <p:notesMasterIdLst>
-    <p:notesMasterId xmlns:r="http://schemas.openxmlformats.org/officeDocument/2006/relationships" r:id="R006e1c0d7bfc41d0"/>
+    <p:notesMasterId xmlns:r="http://schemas.openxmlformats.org/officeDocument/2006/relationships" r:id="R01ef55f37da54d8b"/>
   </p:notesMasterIdLst>
   <p:sldIdLst>
-    <p:sldId xmlns:r="http://schemas.openxmlformats.org/officeDocument/2006/relationships" id="256" r:id="Rd68fa7d113a44cb7"/>
-    <p:sldId xmlns:r="http://schemas.openxmlformats.org/officeDocument/2006/relationships" id="257" r:id="Rdf728d02f3b34286"/>
-    <p:sldId xmlns:r="http://schemas.openxmlformats.org/officeDocument/2006/relationships" id="258" r:id="R363bc56305524a17"/>
-    <p:sldId xmlns:r="http://schemas.openxmlformats.org/officeDocument/2006/relationships" id="259" r:id="R9e4eaeb703cd489b"/>
-    <p:sldId xmlns:r="http://schemas.openxmlformats.org/officeDocument/2006/relationships" id="260" r:id="R57934278e2154449"/>
-    <p:sldId xmlns:r="http://schemas.openxmlformats.org/officeDocument/2006/relationships" id="261" r:id="R0ae8eede21e3454a"/>
-    <p:sldId xmlns:r="http://schemas.openxmlformats.org/officeDocument/2006/relationships" id="262" r:id="R74045f904dbe4b5a"/>
-    <p:sldId xmlns:r="http://schemas.openxmlformats.org/officeDocument/2006/relationships" id="263" r:id="R713fef35e0af47e9"/>
-    <p:sldId xmlns:r="http://schemas.openxmlformats.org/officeDocument/2006/relationships" id="264" r:id="R318cc05d65ef47f9"/>
-    <p:sldId xmlns:r="http://schemas.openxmlformats.org/officeDocument/2006/relationships" id="265" r:id="R9d786669acaf49f3"/>
-    <p:sldId xmlns:r="http://schemas.openxmlformats.org/officeDocument/2006/relationships" id="266" r:id="Rb6ab8f3aab034b5b"/>
-    <p:sldId xmlns:r="http://schemas.openxmlformats.org/officeDocument/2006/relationships" id="267" r:id="R0838bc8c3d5b40d4"/>
-    <p:sldId xmlns:r="http://schemas.openxmlformats.org/officeDocument/2006/relationships" id="268" r:id="R67704bed905345a0"/>
+    <p:sldId xmlns:r="http://schemas.openxmlformats.org/officeDocument/2006/relationships" id="256" r:id="Re68d2686a3b14e06"/>
+    <p:sldId xmlns:r="http://schemas.openxmlformats.org/officeDocument/2006/relationships" id="257" r:id="R410af4e38a3f4272"/>
+    <p:sldId xmlns:r="http://schemas.openxmlformats.org/officeDocument/2006/relationships" id="258" r:id="R8b7bb7f2f1b24987"/>
+    <p:sldId xmlns:r="http://schemas.openxmlformats.org/officeDocument/2006/relationships" id="259" r:id="Rf617096851fa419c"/>
+    <p:sldId xmlns:r="http://schemas.openxmlformats.org/officeDocument/2006/relationships" id="260" r:id="R2a2acc54536e415b"/>
+    <p:sldId xmlns:r="http://schemas.openxmlformats.org/officeDocument/2006/relationships" id="261" r:id="R471069a24fa041b9"/>
+    <p:sldId xmlns:r="http://schemas.openxmlformats.org/officeDocument/2006/relationships" id="262" r:id="R475edb857d194b17"/>
+    <p:sldId xmlns:r="http://schemas.openxmlformats.org/officeDocument/2006/relationships" id="263" r:id="R1100e0964bfd498e"/>
+    <p:sldId xmlns:r="http://schemas.openxmlformats.org/officeDocument/2006/relationships" id="264" r:id="R2f4aee29d0f940be"/>
+    <p:sldId xmlns:r="http://schemas.openxmlformats.org/officeDocument/2006/relationships" id="265" r:id="Rd7398d8333ef4485"/>
+    <p:sldId xmlns:r="http://schemas.openxmlformats.org/officeDocument/2006/relationships" id="266" r:id="R898897460ee54f2a"/>
+    <p:sldId xmlns:r="http://schemas.openxmlformats.org/officeDocument/2006/relationships" id="267" r:id="R4e3ceb699e5b4d8c"/>
+    <p:sldId xmlns:r="http://schemas.openxmlformats.org/officeDocument/2006/relationships" id="268" r:id="Re13f81e7dfc54f7a"/>
   </p:sldIdLst>
   <p:sldSz cx="12192000" cy="6858000"/>
   <p:notesSz cx="6858000" cy="9144000"/>
@@ -490,12 +490,17 @@
           </a:p>
           <a:p xmlns:a="http://schemas.openxmlformats.org/drawingml/2006/main">
             <a:r>
+              <a:t>- https://github.com/uxlfoundation/skills</a:t>
+            </a:r>
+          </a:p>
+          <a:p xmlns:a="http://schemas.openxmlformats.org/drawingml/2006/main">
+            <a:r>
+              <a:t>- https://uxlfoundation.github.io/skills/</a:t>
+            </a:r>
+          </a:p>
+          <a:p xmlns:a="http://schemas.openxmlformats.org/drawingml/2006/main">
+            <a:r>
               <a:t>- https://github.com/uxlfoundation/skills/blob/main/skills.yaml</a:t>
-            </a:r>
-          </a:p>
-          <a:p xmlns:a="http://schemas.openxmlformats.org/drawingml/2006/main">
-            <a:r>
-              <a:t>- https://github.com/uxlfoundation/skills/blob/main/evaluation/harbor/suites.json</a:t>
             </a:r>
           </a:p>
           <a:p xmlns:a="http://schemas.openxmlformats.org/drawingml/2006/main">
@@ -505,26 +510,6 @@
           </a:p>
           <a:p xmlns:a="http://schemas.openxmlformats.org/drawingml/2006/main">
             <a:r>
-              <a:t>- https://uxlfoundation.github.io/skills/</a:t>
-            </a:r>
-          </a:p>
-          <a:p xmlns:a="http://schemas.openxmlformats.org/drawingml/2006/main">
-            <a:r>
-              <a:t>- https://github.com/uxlfoundation/skills/blob/main/docs/evaluator-operator-guide.md</a:t>
-            </a:r>
-          </a:p>
-          <a:p xmlns:a="http://schemas.openxmlformats.org/drawingml/2006/main">
-            <a:r>
-              <a:t>- https://github.com/uxlfoundation/skills/blob/main/docs/forward-testing.md</a:t>
-            </a:r>
-          </a:p>
-          <a:p xmlns:a="http://schemas.openxmlformats.org/drawingml/2006/main">
-            <a:r>
-              <a:t>- https://github.com/uxlfoundation/skills/blob/main/docs/release-and-promotion-policy.md</a:t>
-            </a:r>
-          </a:p>
-          <a:p xmlns:a="http://schemas.openxmlformats.org/drawingml/2006/main">
-            <a:r>
               <a:t>[/Sources]</a:t>
             </a:r>
           </a:p>
@@ -535,7 +520,22 @@
           </a:p>
           <a:p xmlns:a="http://schemas.openxmlformats.org/drawingml/2006/main">
             <a:r>
-              <a:t>Speaker cue: UXL Skills Evaluator</a:t>
+              <a:t>Presenter guidance</a:t>
+            </a:r>
+          </a:p>
+          <a:p xmlns:a="http://schemas.openxmlformats.org/drawingml/2006/main">
+            <a:r>
+              <a:t>Purpose: Frame the UXL Skills Evaluator for project maintainers and working-group leads.</a:t>
+            </a:r>
+          </a:p>
+          <a:p xmlns:a="http://schemas.openxmlformats.org/drawingml/2006/main">
+            <a:r>
+              <a:t>Explain: It is an incubating, open project that pairs maintainable agent guidance with reproducible evaluations and a public health dashboard.</a:t>
+            </a:r>
+          </a:p>
+          <a:p xmlns:a="http://schemas.openxmlformats.org/drawingml/2006/main">
+            <a:r>
+              <a:t>Emphasize: The deck explains what exists now and how maintainers can shape it; it is not a claim that the current drafts are project-approved.</a:t>
             </a:r>
           </a:p>
         </p:txBody>
@@ -610,12 +610,17 @@
           </a:p>
           <a:p xmlns:a="http://schemas.openxmlformats.org/drawingml/2006/main">
             <a:r>
+              <a:t>- https://github.com/uxlfoundation/skills</a:t>
+            </a:r>
+          </a:p>
+          <a:p xmlns:a="http://schemas.openxmlformats.org/drawingml/2006/main">
+            <a:r>
+              <a:t>- https://uxlfoundation.github.io/skills/</a:t>
+            </a:r>
+          </a:p>
+          <a:p xmlns:a="http://schemas.openxmlformats.org/drawingml/2006/main">
+            <a:r>
               <a:t>- https://github.com/uxlfoundation/skills/blob/main/skills.yaml</a:t>
-            </a:r>
-          </a:p>
-          <a:p xmlns:a="http://schemas.openxmlformats.org/drawingml/2006/main">
-            <a:r>
-              <a:t>- https://github.com/uxlfoundation/skills/blob/main/evaluation/harbor/suites.json</a:t>
             </a:r>
           </a:p>
           <a:p xmlns:a="http://schemas.openxmlformats.org/drawingml/2006/main">
@@ -625,26 +630,6 @@
           </a:p>
           <a:p xmlns:a="http://schemas.openxmlformats.org/drawingml/2006/main">
             <a:r>
-              <a:t>- https://uxlfoundation.github.io/skills/</a:t>
-            </a:r>
-          </a:p>
-          <a:p xmlns:a="http://schemas.openxmlformats.org/drawingml/2006/main">
-            <a:r>
-              <a:t>- https://github.com/uxlfoundation/skills/blob/main/docs/evaluator-operator-guide.md</a:t>
-            </a:r>
-          </a:p>
-          <a:p xmlns:a="http://schemas.openxmlformats.org/drawingml/2006/main">
-            <a:r>
-              <a:t>- https://github.com/uxlfoundation/skills/blob/main/docs/forward-testing.md</a:t>
-            </a:r>
-          </a:p>
-          <a:p xmlns:a="http://schemas.openxmlformats.org/drawingml/2006/main">
-            <a:r>
-              <a:t>- https://github.com/uxlfoundation/skills/blob/main/docs/release-and-promotion-policy.md</a:t>
-            </a:r>
-          </a:p>
-          <a:p xmlns:a="http://schemas.openxmlformats.org/drawingml/2006/main">
-            <a:r>
               <a:t>[/Sources]</a:t>
             </a:r>
           </a:p>
@@ -655,7 +640,22 @@
           </a:p>
           <a:p xmlns:a="http://schemas.openxmlformats.org/drawingml/2006/main">
             <a:r>
-              <a:t>Speaker cue: Hardware is a pluggable evidence lane — never the product</a:t>
+              <a:t>Presenter guidance</a:t>
+            </a:r>
+          </a:p>
+          <a:p xmlns:a="http://schemas.openxmlformats.org/drawingml/2006/main">
+            <a:r>
+              <a:t>Purpose: Describe the hardware-neutral execution model.</a:t>
+            </a:r>
+          </a:p>
+          <a:p xmlns:a="http://schemas.openxmlformats.org/drawingml/2006/main">
+            <a:r>
+              <a:t>Explain: GitHub-hosted runners handle portable work; qualified machines add GPUs, multi-node systems, or other specialized targets through the same task and artifact contract.</a:t>
+            </a:r>
+          </a:p>
+          <a:p xmlns:a="http://schemas.openxmlformats.org/drawingml/2006/main">
+            <a:r>
+              <a:t>Emphasize: No hardware vendor receives priority from the dashboard, and qualification is separate from matched skill evaluation.</a:t>
             </a:r>
           </a:p>
         </p:txBody>
@@ -730,12 +730,17 @@
           </a:p>
           <a:p xmlns:a="http://schemas.openxmlformats.org/drawingml/2006/main">
             <a:r>
+              <a:t>- https://github.com/uxlfoundation/skills</a:t>
+            </a:r>
+          </a:p>
+          <a:p xmlns:a="http://schemas.openxmlformats.org/drawingml/2006/main">
+            <a:r>
+              <a:t>- https://uxlfoundation.github.io/skills/</a:t>
+            </a:r>
+          </a:p>
+          <a:p xmlns:a="http://schemas.openxmlformats.org/drawingml/2006/main">
+            <a:r>
               <a:t>- https://github.com/uxlfoundation/skills/blob/main/skills.yaml</a:t>
-            </a:r>
-          </a:p>
-          <a:p xmlns:a="http://schemas.openxmlformats.org/drawingml/2006/main">
-            <a:r>
-              <a:t>- https://github.com/uxlfoundation/skills/blob/main/evaluation/harbor/suites.json</a:t>
             </a:r>
           </a:p>
           <a:p xmlns:a="http://schemas.openxmlformats.org/drawingml/2006/main">
@@ -745,26 +750,6 @@
           </a:p>
           <a:p xmlns:a="http://schemas.openxmlformats.org/drawingml/2006/main">
             <a:r>
-              <a:t>- https://uxlfoundation.github.io/skills/</a:t>
-            </a:r>
-          </a:p>
-          <a:p xmlns:a="http://schemas.openxmlformats.org/drawingml/2006/main">
-            <a:r>
-              <a:t>- https://github.com/uxlfoundation/skills/blob/main/docs/evaluator-operator-guide.md</a:t>
-            </a:r>
-          </a:p>
-          <a:p xmlns:a="http://schemas.openxmlformats.org/drawingml/2006/main">
-            <a:r>
-              <a:t>- https://github.com/uxlfoundation/skills/blob/main/docs/forward-testing.md</a:t>
-            </a:r>
-          </a:p>
-          <a:p xmlns:a="http://schemas.openxmlformats.org/drawingml/2006/main">
-            <a:r>
-              <a:t>- https://github.com/uxlfoundation/skills/blob/main/docs/release-and-promotion-policy.md</a:t>
-            </a:r>
-          </a:p>
-          <a:p xmlns:a="http://schemas.openxmlformats.org/drawingml/2006/main">
-            <a:r>
               <a:t>[/Sources]</a:t>
             </a:r>
           </a:p>
@@ -775,7 +760,22 @@
           </a:p>
           <a:p xmlns:a="http://schemas.openxmlformats.org/drawingml/2006/main">
             <a:r>
-              <a:t>Speaker cue: The ongoing maintainer workflow fits normal GitHub practice</a:t>
+              <a:t>Presenter guidance</a:t>
+            </a:r>
+          </a:p>
+          <a:p xmlns:a="http://schemas.openxmlformats.org/drawingml/2006/main">
+            <a:r>
+              <a:t>Purpose: Make the ongoing maintainer workflow concrete.</a:t>
+            </a:r>
+          </a:p>
+          <a:p xmlns:a="http://schemas.openxmlformats.org/drawingml/2006/main">
+            <a:r>
+              <a:t>Explain: A typical change updates guidance or sources, adds or revises a task, runs validation, reviews evidence, and lands through a normal pull request.</a:t>
+            </a:r>
+          </a:p>
+          <a:p xmlns:a="http://schemas.openxmlformats.org/drawingml/2006/main">
+            <a:r>
+              <a:t>Emphasize: The intended maintenance burden is small and periodic, with automation handling catalog checks and dashboard publication.</a:t>
             </a:r>
           </a:p>
         </p:txBody>
@@ -850,12 +850,17 @@
           </a:p>
           <a:p xmlns:a="http://schemas.openxmlformats.org/drawingml/2006/main">
             <a:r>
+              <a:t>- https://github.com/uxlfoundation/skills</a:t>
+            </a:r>
+          </a:p>
+          <a:p xmlns:a="http://schemas.openxmlformats.org/drawingml/2006/main">
+            <a:r>
+              <a:t>- https://uxlfoundation.github.io/skills/</a:t>
+            </a:r>
+          </a:p>
+          <a:p xmlns:a="http://schemas.openxmlformats.org/drawingml/2006/main">
+            <a:r>
               <a:t>- https://github.com/uxlfoundation/skills/blob/main/skills.yaml</a:t>
-            </a:r>
-          </a:p>
-          <a:p xmlns:a="http://schemas.openxmlformats.org/drawingml/2006/main">
-            <a:r>
-              <a:t>- https://github.com/uxlfoundation/skills/blob/main/evaluation/harbor/suites.json</a:t>
             </a:r>
           </a:p>
           <a:p xmlns:a="http://schemas.openxmlformats.org/drawingml/2006/main">
@@ -865,26 +870,6 @@
           </a:p>
           <a:p xmlns:a="http://schemas.openxmlformats.org/drawingml/2006/main">
             <a:r>
-              <a:t>- https://uxlfoundation.github.io/skills/</a:t>
-            </a:r>
-          </a:p>
-          <a:p xmlns:a="http://schemas.openxmlformats.org/drawingml/2006/main">
-            <a:r>
-              <a:t>- https://github.com/uxlfoundation/skills/blob/main/docs/evaluator-operator-guide.md</a:t>
-            </a:r>
-          </a:p>
-          <a:p xmlns:a="http://schemas.openxmlformats.org/drawingml/2006/main">
-            <a:r>
-              <a:t>- https://github.com/uxlfoundation/skills/blob/main/docs/forward-testing.md</a:t>
-            </a:r>
-          </a:p>
-          <a:p xmlns:a="http://schemas.openxmlformats.org/drawingml/2006/main">
-            <a:r>
-              <a:t>- https://github.com/uxlfoundation/skills/blob/main/docs/release-and-promotion-policy.md</a:t>
-            </a:r>
-          </a:p>
-          <a:p xmlns:a="http://schemas.openxmlformats.org/drawingml/2006/main">
-            <a:r>
               <a:t>[/Sources]</a:t>
             </a:r>
           </a:p>
@@ -895,7 +880,22 @@
           </a:p>
           <a:p xmlns:a="http://schemas.openxmlformats.org/drawingml/2006/main">
             <a:r>
-              <a:t>Speaker cue: Ownership is intentionally split</a:t>
+              <a:t>Presenter guidance</a:t>
+            </a:r>
+          </a:p>
+          <a:p xmlns:a="http://schemas.openxmlformats.org/drawingml/2006/main">
+            <a:r>
+              <a:t>Purpose: Clarify which responsibilities stay with projects and which stay with UXL infrastructure.</a:t>
+            </a:r>
+          </a:p>
+          <a:p xmlns:a="http://schemas.openxmlformats.org/drawingml/2006/main">
+            <a:r>
+              <a:t>Explain: Project maintainers own technical truth, triggers, limitations, and authentic cases; UXL owns schemas, validators, Harbor integration, comparison discipline, and presentation of evidence.</a:t>
+            </a:r>
+          </a:p>
+          <a:p xmlns:a="http://schemas.openxmlformats.org/drawingml/2006/main">
+            <a:r>
+              <a:t>Emphasize: Named project ownership is required before an incubating skill can be treated as maintained guidance.</a:t>
             </a:r>
           </a:p>
         </p:txBody>
@@ -970,12 +970,17 @@
           </a:p>
           <a:p xmlns:a="http://schemas.openxmlformats.org/drawingml/2006/main">
             <a:r>
+              <a:t>- https://github.com/uxlfoundation/skills</a:t>
+            </a:r>
+          </a:p>
+          <a:p xmlns:a="http://schemas.openxmlformats.org/drawingml/2006/main">
+            <a:r>
+              <a:t>- https://uxlfoundation.github.io/skills/</a:t>
+            </a:r>
+          </a:p>
+          <a:p xmlns:a="http://schemas.openxmlformats.org/drawingml/2006/main">
+            <a:r>
               <a:t>- https://github.com/uxlfoundation/skills/blob/main/skills.yaml</a:t>
-            </a:r>
-          </a:p>
-          <a:p xmlns:a="http://schemas.openxmlformats.org/drawingml/2006/main">
-            <a:r>
-              <a:t>- https://github.com/uxlfoundation/skills/blob/main/evaluation/harbor/suites.json</a:t>
             </a:r>
           </a:p>
           <a:p xmlns:a="http://schemas.openxmlformats.org/drawingml/2006/main">
@@ -985,26 +990,6 @@
           </a:p>
           <a:p xmlns:a="http://schemas.openxmlformats.org/drawingml/2006/main">
             <a:r>
-              <a:t>- https://uxlfoundation.github.io/skills/</a:t>
-            </a:r>
-          </a:p>
-          <a:p xmlns:a="http://schemas.openxmlformats.org/drawingml/2006/main">
-            <a:r>
-              <a:t>- https://github.com/uxlfoundation/skills/blob/main/docs/evaluator-operator-guide.md</a:t>
-            </a:r>
-          </a:p>
-          <a:p xmlns:a="http://schemas.openxmlformats.org/drawingml/2006/main">
-            <a:r>
-              <a:t>- https://github.com/uxlfoundation/skills/blob/main/docs/forward-testing.md</a:t>
-            </a:r>
-          </a:p>
-          <a:p xmlns:a="http://schemas.openxmlformats.org/drawingml/2006/main">
-            <a:r>
-              <a:t>- https://github.com/uxlfoundation/skills/blob/main/docs/release-and-promotion-policy.md</a:t>
-            </a:r>
-          </a:p>
-          <a:p xmlns:a="http://schemas.openxmlformats.org/drawingml/2006/main">
-            <a:r>
               <a:t>[/Sources]</a:t>
             </a:r>
           </a:p>
@@ -1015,7 +1000,22 @@
           </a:p>
           <a:p xmlns:a="http://schemas.openxmlformats.org/drawingml/2006/main">
             <a:r>
-              <a:t>Speaker cue: The decision we need from each project</a:t>
+              <a:t>Presenter guidance</a:t>
+            </a:r>
+          </a:p>
+          <a:p xmlns:a="http://schemas.openxmlformats.org/drawingml/2006/main">
+            <a:r>
+              <a:t>Purpose: Close with the smallest useful maintainer commitment.</a:t>
+            </a:r>
+          </a:p>
+          <a:p xmlns:a="http://schemas.openxmlformats.org/drawingml/2006/main">
+            <a:r>
+              <a:t>Explain: Ask each project to correct its draft skill, validate or replace its task inventory, and identify a reviewer or owner for future changes.</a:t>
+            </a:r>
+          </a:p>
+          <a:p xmlns:a="http://schemas.openxmlformats.org/drawingml/2006/main">
+            <a:r>
+              <a:t>Emphasize: A concrete correction or realistic issue is more valuable at this stage than broad approval of the whole system.</a:t>
             </a:r>
           </a:p>
         </p:txBody>
@@ -1090,12 +1090,17 @@
           </a:p>
           <a:p xmlns:a="http://schemas.openxmlformats.org/drawingml/2006/main">
             <a:r>
+              <a:t>- https://github.com/uxlfoundation/skills</a:t>
+            </a:r>
+          </a:p>
+          <a:p xmlns:a="http://schemas.openxmlformats.org/drawingml/2006/main">
+            <a:r>
+              <a:t>- https://uxlfoundation.github.io/skills/</a:t>
+            </a:r>
+          </a:p>
+          <a:p xmlns:a="http://schemas.openxmlformats.org/drawingml/2006/main">
+            <a:r>
               <a:t>- https://github.com/uxlfoundation/skills/blob/main/skills.yaml</a:t>
-            </a:r>
-          </a:p>
-          <a:p xmlns:a="http://schemas.openxmlformats.org/drawingml/2006/main">
-            <a:r>
-              <a:t>- https://github.com/uxlfoundation/skills/blob/main/evaluation/harbor/suites.json</a:t>
             </a:r>
           </a:p>
           <a:p xmlns:a="http://schemas.openxmlformats.org/drawingml/2006/main">
@@ -1105,26 +1110,6 @@
           </a:p>
           <a:p xmlns:a="http://schemas.openxmlformats.org/drawingml/2006/main">
             <a:r>
-              <a:t>- https://uxlfoundation.github.io/skills/</a:t>
-            </a:r>
-          </a:p>
-          <a:p xmlns:a="http://schemas.openxmlformats.org/drawingml/2006/main">
-            <a:r>
-              <a:t>- https://github.com/uxlfoundation/skills/blob/main/docs/evaluator-operator-guide.md</a:t>
-            </a:r>
-          </a:p>
-          <a:p xmlns:a="http://schemas.openxmlformats.org/drawingml/2006/main">
-            <a:r>
-              <a:t>- https://github.com/uxlfoundation/skills/blob/main/docs/forward-testing.md</a:t>
-            </a:r>
-          </a:p>
-          <a:p xmlns:a="http://schemas.openxmlformats.org/drawingml/2006/main">
-            <a:r>
-              <a:t>- https://github.com/uxlfoundation/skills/blob/main/docs/release-and-promotion-policy.md</a:t>
-            </a:r>
-          </a:p>
-          <a:p xmlns:a="http://schemas.openxmlformats.org/drawingml/2006/main">
-            <a:r>
               <a:t>[/Sources]</a:t>
             </a:r>
           </a:p>
@@ -1135,7 +1120,22 @@
           </a:p>
           <a:p xmlns:a="http://schemas.openxmlformats.org/drawingml/2006/main">
             <a:r>
-              <a:t>Speaker cue: What exists today</a:t>
+              <a:t>Presenter guidance</a:t>
+            </a:r>
+          </a:p>
+          <a:p xmlns:a="http://schemas.openxmlformats.org/drawingml/2006/main">
+            <a:r>
+              <a:t>Purpose: Give a factual snapshot of the current catalog and evaluation inventory.</a:t>
+            </a:r>
+          </a:p>
+          <a:p xmlns:a="http://schemas.openxmlformats.org/drawingml/2006/main">
+            <a:r>
+              <a:t>Explain: There are eight skills, 52 defined tasks, 41 implemented tasks, a public dashboard, Harbor-based execution, and a portable target-lane contract.</a:t>
+            </a:r>
+          </a:p>
+          <a:p xmlns:a="http://schemas.openxmlformats.org/drawingml/2006/main">
+            <a:r>
+              <a:t>Emphasize: These numbers describe inventory and maturity, not an aggregate pass rate or quality score.</a:t>
             </a:r>
           </a:p>
         </p:txBody>
@@ -1210,12 +1210,17 @@
           </a:p>
           <a:p xmlns:a="http://schemas.openxmlformats.org/drawingml/2006/main">
             <a:r>
+              <a:t>- https://github.com/uxlfoundation/skills</a:t>
+            </a:r>
+          </a:p>
+          <a:p xmlns:a="http://schemas.openxmlformats.org/drawingml/2006/main">
+            <a:r>
+              <a:t>- https://uxlfoundation.github.io/skills/</a:t>
+            </a:r>
+          </a:p>
+          <a:p xmlns:a="http://schemas.openxmlformats.org/drawingml/2006/main">
+            <a:r>
               <a:t>- https://github.com/uxlfoundation/skills/blob/main/skills.yaml</a:t>
-            </a:r>
-          </a:p>
-          <a:p xmlns:a="http://schemas.openxmlformats.org/drawingml/2006/main">
-            <a:r>
-              <a:t>- https://github.com/uxlfoundation/skills/blob/main/evaluation/harbor/suites.json</a:t>
             </a:r>
           </a:p>
           <a:p xmlns:a="http://schemas.openxmlformats.org/drawingml/2006/main">
@@ -1225,26 +1230,6 @@
           </a:p>
           <a:p xmlns:a="http://schemas.openxmlformats.org/drawingml/2006/main">
             <a:r>
-              <a:t>- https://uxlfoundation.github.io/skills/</a:t>
-            </a:r>
-          </a:p>
-          <a:p xmlns:a="http://schemas.openxmlformats.org/drawingml/2006/main">
-            <a:r>
-              <a:t>- https://github.com/uxlfoundation/skills/blob/main/docs/evaluator-operator-guide.md</a:t>
-            </a:r>
-          </a:p>
-          <a:p xmlns:a="http://schemas.openxmlformats.org/drawingml/2006/main">
-            <a:r>
-              <a:t>- https://github.com/uxlfoundation/skills/blob/main/docs/forward-testing.md</a:t>
-            </a:r>
-          </a:p>
-          <a:p xmlns:a="http://schemas.openxmlformats.org/drawingml/2006/main">
-            <a:r>
-              <a:t>- https://github.com/uxlfoundation/skills/blob/main/docs/release-and-promotion-policy.md</a:t>
-            </a:r>
-          </a:p>
-          <a:p xmlns:a="http://schemas.openxmlformats.org/drawingml/2006/main">
-            <a:r>
               <a:t>[/Sources]</a:t>
             </a:r>
           </a:p>
@@ -1255,7 +1240,22 @@
           </a:p>
           <a:p xmlns:a="http://schemas.openxmlformats.org/drawingml/2006/main">
             <a:r>
-              <a:t>Speaker cue: The current skill catalog — at a glance</a:t>
+              <a:t>Presenter guidance</a:t>
+            </a:r>
+          </a:p>
+          <a:p xmlns:a="http://schemas.openxmlformats.org/drawingml/2006/main">
+            <a:r>
+              <a:t>Purpose: Orient the audience to the catalog structure.</a:t>
+            </a:r>
+          </a:p>
+          <a:p xmlns:a="http://schemas.openxmlformats.org/drawingml/2006/main">
+            <a:r>
+              <a:t>Explain: Six skills are specific to oneAPI library projects and two cover shared SYCL troubleshooting and performance-validation practices.</a:t>
+            </a:r>
+          </a:p>
+          <a:p xmlns:a="http://schemas.openxmlformats.org/drawingml/2006/main">
+            <a:r>
+              <a:t>Emphasize: Each catalog card links to the skill, its sources, its task inventory, current evidence, and a maintainer briefing.</a:t>
             </a:r>
           </a:p>
         </p:txBody>
@@ -1330,12 +1330,17 @@
           </a:p>
           <a:p xmlns:a="http://schemas.openxmlformats.org/drawingml/2006/main">
             <a:r>
+              <a:t>- https://github.com/uxlfoundation/skills</a:t>
+            </a:r>
+          </a:p>
+          <a:p xmlns:a="http://schemas.openxmlformats.org/drawingml/2006/main">
+            <a:r>
+              <a:t>- https://uxlfoundation.github.io/skills/</a:t>
+            </a:r>
+          </a:p>
+          <a:p xmlns:a="http://schemas.openxmlformats.org/drawingml/2006/main">
+            <a:r>
               <a:t>- https://github.com/uxlfoundation/skills/blob/main/skills.yaml</a:t>
-            </a:r>
-          </a:p>
-          <a:p xmlns:a="http://schemas.openxmlformats.org/drawingml/2006/main">
-            <a:r>
-              <a:t>- https://github.com/uxlfoundation/skills/blob/main/evaluation/harbor/suites.json</a:t>
             </a:r>
           </a:p>
           <a:p xmlns:a="http://schemas.openxmlformats.org/drawingml/2006/main">
@@ -1345,26 +1350,6 @@
           </a:p>
           <a:p xmlns:a="http://schemas.openxmlformats.org/drawingml/2006/main">
             <a:r>
-              <a:t>- https://uxlfoundation.github.io/skills/</a:t>
-            </a:r>
-          </a:p>
-          <a:p xmlns:a="http://schemas.openxmlformats.org/drawingml/2006/main">
-            <a:r>
-              <a:t>- https://github.com/uxlfoundation/skills/blob/main/docs/evaluator-operator-guide.md</a:t>
-            </a:r>
-          </a:p>
-          <a:p xmlns:a="http://schemas.openxmlformats.org/drawingml/2006/main">
-            <a:r>
-              <a:t>- https://github.com/uxlfoundation/skills/blob/main/docs/forward-testing.md</a:t>
-            </a:r>
-          </a:p>
-          <a:p xmlns:a="http://schemas.openxmlformats.org/drawingml/2006/main">
-            <a:r>
-              <a:t>- https://github.com/uxlfoundation/skills/blob/main/docs/release-and-promotion-policy.md</a:t>
-            </a:r>
-          </a:p>
-          <a:p xmlns:a="http://schemas.openxmlformats.org/drawingml/2006/main">
-            <a:r>
               <a:t>[/Sources]</a:t>
             </a:r>
           </a:p>
@@ -1375,7 +1360,22 @@
           </a:p>
           <a:p xmlns:a="http://schemas.openxmlformats.org/drawingml/2006/main">
             <a:r>
-              <a:t>Speaker cue: Architecture: project knowledge becomes measured evidence</a:t>
+              <a:t>Presenter guidance</a:t>
+            </a:r>
+          </a:p>
+          <a:p xmlns:a="http://schemas.openxmlformats.org/drawingml/2006/main">
+            <a:r>
+              <a:t>Purpose: Explain the software architecture from source material to public evidence.</a:t>
+            </a:r>
+          </a:p>
+          <a:p xmlns:a="http://schemas.openxmlformats.org/drawingml/2006/main">
+            <a:r>
+              <a:t>Explain: Maintainer-owned docs inform a versioned skill; Harbor runs task cells through hosted or qualified target lanes; artifacts feed the static dashboard.</a:t>
+            </a:r>
+          </a:p>
+          <a:p xmlns:a="http://schemas.openxmlformats.org/drawingml/2006/main">
+            <a:r>
+              <a:t>Emphasize: A specialized machine changes the execution adapter and environment evidence, not the task or verification contract.</a:t>
             </a:r>
           </a:p>
         </p:txBody>
@@ -1450,12 +1450,17 @@
           </a:p>
           <a:p xmlns:a="http://schemas.openxmlformats.org/drawingml/2006/main">
             <a:r>
+              <a:t>- https://github.com/uxlfoundation/skills</a:t>
+            </a:r>
+          </a:p>
+          <a:p xmlns:a="http://schemas.openxmlformats.org/drawingml/2006/main">
+            <a:r>
+              <a:t>- https://uxlfoundation.github.io/skills/</a:t>
+            </a:r>
+          </a:p>
+          <a:p xmlns:a="http://schemas.openxmlformats.org/drawingml/2006/main">
+            <a:r>
               <a:t>- https://github.com/uxlfoundation/skills/blob/main/skills.yaml</a:t>
-            </a:r>
-          </a:p>
-          <a:p xmlns:a="http://schemas.openxmlformats.org/drawingml/2006/main">
-            <a:r>
-              <a:t>- https://github.com/uxlfoundation/skills/blob/main/evaluation/harbor/suites.json</a:t>
             </a:r>
           </a:p>
           <a:p xmlns:a="http://schemas.openxmlformats.org/drawingml/2006/main">
@@ -1465,26 +1470,6 @@
           </a:p>
           <a:p xmlns:a="http://schemas.openxmlformats.org/drawingml/2006/main">
             <a:r>
-              <a:t>- https://uxlfoundation.github.io/skills/</a:t>
-            </a:r>
-          </a:p>
-          <a:p xmlns:a="http://schemas.openxmlformats.org/drawingml/2006/main">
-            <a:r>
-              <a:t>- https://github.com/uxlfoundation/skills/blob/main/docs/evaluator-operator-guide.md</a:t>
-            </a:r>
-          </a:p>
-          <a:p xmlns:a="http://schemas.openxmlformats.org/drawingml/2006/main">
-            <a:r>
-              <a:t>- https://github.com/uxlfoundation/skills/blob/main/docs/forward-testing.md</a:t>
-            </a:r>
-          </a:p>
-          <a:p xmlns:a="http://schemas.openxmlformats.org/drawingml/2006/main">
-            <a:r>
-              <a:t>- https://github.com/uxlfoundation/skills/blob/main/docs/release-and-promotion-policy.md</a:t>
-            </a:r>
-          </a:p>
-          <a:p xmlns:a="http://schemas.openxmlformats.org/drawingml/2006/main">
-            <a:r>
               <a:t>[/Sources]</a:t>
             </a:r>
           </a:p>
@@ -1495,7 +1480,22 @@
           </a:p>
           <a:p xmlns:a="http://schemas.openxmlformats.org/drawingml/2006/main">
             <a:r>
-              <a:t>Speaker cue: The public control room answers: are the skills healthy?</a:t>
+              <a:t>Presenter guidance</a:t>
+            </a:r>
+          </a:p>
+          <a:p xmlns:a="http://schemas.openxmlformats.org/drawingml/2006/main">
+            <a:r>
+              <a:t>Purpose: Show what a manager can learn from the dashboard's top-level view.</a:t>
+            </a:r>
+          </a:p>
+          <a:p xmlns:a="http://schemas.openxmlformats.org/drawingml/2006/main">
+            <a:r>
+              <a:t>Explain: The overview highlights maturity, coverage, freshness, ownership, platform evidence, and visible gaps across the catalog.</a:t>
+            </a:r>
+          </a:p>
+          <a:p xmlns:a="http://schemas.openxmlformats.org/drawingml/2006/main">
+            <a:r>
+              <a:t>Emphasize: Health is intentionally multidimensional; the dashboard avoids compressing unlike environments into one universal score.</a:t>
             </a:r>
           </a:p>
         </p:txBody>
@@ -1570,12 +1570,17 @@
           </a:p>
           <a:p xmlns:a="http://schemas.openxmlformats.org/drawingml/2006/main">
             <a:r>
+              <a:t>- https://github.com/uxlfoundation/skills</a:t>
+            </a:r>
+          </a:p>
+          <a:p xmlns:a="http://schemas.openxmlformats.org/drawingml/2006/main">
+            <a:r>
+              <a:t>- https://uxlfoundation.github.io/skills/</a:t>
+            </a:r>
+          </a:p>
+          <a:p xmlns:a="http://schemas.openxmlformats.org/drawingml/2006/main">
+            <a:r>
               <a:t>- https://github.com/uxlfoundation/skills/blob/main/skills.yaml</a:t>
-            </a:r>
-          </a:p>
-          <a:p xmlns:a="http://schemas.openxmlformats.org/drawingml/2006/main">
-            <a:r>
-              <a:t>- https://github.com/uxlfoundation/skills/blob/main/evaluation/harbor/suites.json</a:t>
             </a:r>
           </a:p>
           <a:p xmlns:a="http://schemas.openxmlformats.org/drawingml/2006/main">
@@ -1585,26 +1590,6 @@
           </a:p>
           <a:p xmlns:a="http://schemas.openxmlformats.org/drawingml/2006/main">
             <a:r>
-              <a:t>- https://uxlfoundation.github.io/skills/</a:t>
-            </a:r>
-          </a:p>
-          <a:p xmlns:a="http://schemas.openxmlformats.org/drawingml/2006/main">
-            <a:r>
-              <a:t>- https://github.com/uxlfoundation/skills/blob/main/docs/evaluator-operator-guide.md</a:t>
-            </a:r>
-          </a:p>
-          <a:p xmlns:a="http://schemas.openxmlformats.org/drawingml/2006/main">
-            <a:r>
-              <a:t>- https://github.com/uxlfoundation/skills/blob/main/docs/forward-testing.md</a:t>
-            </a:r>
-          </a:p>
-          <a:p xmlns:a="http://schemas.openxmlformats.org/drawingml/2006/main">
-            <a:r>
-              <a:t>- https://github.com/uxlfoundation/skills/blob/main/docs/release-and-promotion-policy.md</a:t>
-            </a:r>
-          </a:p>
-          <a:p xmlns:a="http://schemas.openxmlformats.org/drawingml/2006/main">
-            <a:r>
               <a:t>[/Sources]</a:t>
             </a:r>
           </a:p>
@@ -1615,7 +1600,22 @@
           </a:p>
           <a:p xmlns:a="http://schemas.openxmlformats.org/drawingml/2006/main">
             <a:r>
-              <a:t>Speaker cue: Maintainers can drill from portfolio to exact task contracts</a:t>
+              <a:t>Presenter guidance</a:t>
+            </a:r>
+          </a:p>
+          <a:p xmlns:a="http://schemas.openxmlformats.org/drawingml/2006/main">
+            <a:r>
+              <a:t>Purpose: Demonstrate how maintainers drill from a skill card into evaluation details.</a:t>
+            </a:r>
+          </a:p>
+          <a:p xmlns:a="http://schemas.openxmlformats.org/drawingml/2006/main">
+            <a:r>
+              <a:t>Explain: The skill and evaluation views expose triggers, guidance, tasks, verifiers, treatments, results, artifacts, and known limitations.</a:t>
+            </a:r>
+          </a:p>
+          <a:p xmlns:a="http://schemas.openxmlformats.org/drawingml/2006/main">
+            <a:r>
+              <a:t>Emphasize: The dashboard is a navigation and evidence layer over repository data, so every claim remains reviewable in GitHub.</a:t>
             </a:r>
           </a:p>
         </p:txBody>
@@ -1690,12 +1690,17 @@
           </a:p>
           <a:p xmlns:a="http://schemas.openxmlformats.org/drawingml/2006/main">
             <a:r>
+              <a:t>- https://github.com/uxlfoundation/skills</a:t>
+            </a:r>
+          </a:p>
+          <a:p xmlns:a="http://schemas.openxmlformats.org/drawingml/2006/main">
+            <a:r>
+              <a:t>- https://uxlfoundation.github.io/skills/</a:t>
+            </a:r>
+          </a:p>
+          <a:p xmlns:a="http://schemas.openxmlformats.org/drawingml/2006/main">
+            <a:r>
               <a:t>- https://github.com/uxlfoundation/skills/blob/main/skills.yaml</a:t>
-            </a:r>
-          </a:p>
-          <a:p xmlns:a="http://schemas.openxmlformats.org/drawingml/2006/main">
-            <a:r>
-              <a:t>- https://github.com/uxlfoundation/skills/blob/main/evaluation/harbor/suites.json</a:t>
             </a:r>
           </a:p>
           <a:p xmlns:a="http://schemas.openxmlformats.org/drawingml/2006/main">
@@ -1705,26 +1710,6 @@
           </a:p>
           <a:p xmlns:a="http://schemas.openxmlformats.org/drawingml/2006/main">
             <a:r>
-              <a:t>- https://uxlfoundation.github.io/skills/</a:t>
-            </a:r>
-          </a:p>
-          <a:p xmlns:a="http://schemas.openxmlformats.org/drawingml/2006/main">
-            <a:r>
-              <a:t>- https://github.com/uxlfoundation/skills/blob/main/docs/evaluator-operator-guide.md</a:t>
-            </a:r>
-          </a:p>
-          <a:p xmlns:a="http://schemas.openxmlformats.org/drawingml/2006/main">
-            <a:r>
-              <a:t>- https://github.com/uxlfoundation/skills/blob/main/docs/forward-testing.md</a:t>
-            </a:r>
-          </a:p>
-          <a:p xmlns:a="http://schemas.openxmlformats.org/drawingml/2006/main">
-            <a:r>
-              <a:t>- https://github.com/uxlfoundation/skills/blob/main/docs/release-and-promotion-policy.md</a:t>
-            </a:r>
-          </a:p>
-          <a:p xmlns:a="http://schemas.openxmlformats.org/drawingml/2006/main">
-            <a:r>
               <a:t>[/Sources]</a:t>
             </a:r>
           </a:p>
@@ -1735,7 +1720,22 @@
           </a:p>
           <a:p xmlns:a="http://schemas.openxmlformats.org/drawingml/2006/main">
             <a:r>
-              <a:t>Speaker cue: The methodology is deliberately claim-resistant</a:t>
+              <a:t>Presenter guidance</a:t>
+            </a:r>
+          </a:p>
+          <a:p xmlns:a="http://schemas.openxmlformats.org/drawingml/2006/main">
+            <a:r>
+              <a:t>Purpose: State the guiding evaluation philosophy.</a:t>
+            </a:r>
+          </a:p>
+          <a:p xmlns:a="http://schemas.openxmlformats.org/drawingml/2006/main">
+            <a:r>
+              <a:t>Explain: Verify correctness and task completion first, test claims separately, preserve provenance, and keep smoke coverage distinct from discriminating evidence.</a:t>
+            </a:r>
+          </a:p>
+          <a:p xmlns:a="http://schemas.openxmlformats.org/drawingml/2006/main">
+            <a:r>
+              <a:t>Emphasize: Passing an environment qualification or a task does not by itself prove that a skill improved an agent's behavior.</a:t>
             </a:r>
           </a:p>
         </p:txBody>
@@ -1810,12 +1810,17 @@
           </a:p>
           <a:p xmlns:a="http://schemas.openxmlformats.org/drawingml/2006/main">
             <a:r>
+              <a:t>- https://github.com/uxlfoundation/skills</a:t>
+            </a:r>
+          </a:p>
+          <a:p xmlns:a="http://schemas.openxmlformats.org/drawingml/2006/main">
+            <a:r>
+              <a:t>- https://uxlfoundation.github.io/skills/</a:t>
+            </a:r>
+          </a:p>
+          <a:p xmlns:a="http://schemas.openxmlformats.org/drawingml/2006/main">
+            <a:r>
               <a:t>- https://github.com/uxlfoundation/skills/blob/main/skills.yaml</a:t>
-            </a:r>
-          </a:p>
-          <a:p xmlns:a="http://schemas.openxmlformats.org/drawingml/2006/main">
-            <a:r>
-              <a:t>- https://github.com/uxlfoundation/skills/blob/main/evaluation/harbor/suites.json</a:t>
             </a:r>
           </a:p>
           <a:p xmlns:a="http://schemas.openxmlformats.org/drawingml/2006/main">
@@ -1825,26 +1830,6 @@
           </a:p>
           <a:p xmlns:a="http://schemas.openxmlformats.org/drawingml/2006/main">
             <a:r>
-              <a:t>- https://uxlfoundation.github.io/skills/</a:t>
-            </a:r>
-          </a:p>
-          <a:p xmlns:a="http://schemas.openxmlformats.org/drawingml/2006/main">
-            <a:r>
-              <a:t>- https://github.com/uxlfoundation/skills/blob/main/docs/evaluator-operator-guide.md</a:t>
-            </a:r>
-          </a:p>
-          <a:p xmlns:a="http://schemas.openxmlformats.org/drawingml/2006/main">
-            <a:r>
-              <a:t>- https://github.com/uxlfoundation/skills/blob/main/docs/forward-testing.md</a:t>
-            </a:r>
-          </a:p>
-          <a:p xmlns:a="http://schemas.openxmlformats.org/drawingml/2006/main">
-            <a:r>
-              <a:t>- https://github.com/uxlfoundation/skills/blob/main/docs/release-and-promotion-policy.md</a:t>
-            </a:r>
-          </a:p>
-          <a:p xmlns:a="http://schemas.openxmlformats.org/drawingml/2006/main">
-            <a:r>
               <a:t>[/Sources]</a:t>
             </a:r>
           </a:p>
@@ -1855,7 +1840,22 @@
           </a:p>
           <a:p xmlns:a="http://schemas.openxmlformats.org/drawingml/2006/main">
             <a:r>
-              <a:t>Speaker cue: Every claim lives inside a matched evaluation cell</a:t>
+              <a:t>Presenter guidance</a:t>
+            </a:r>
+          </a:p>
+          <a:p xmlns:a="http://schemas.openxmlformats.org/drawingml/2006/main">
+            <a:r>
+              <a:t>Purpose: Explain how comparisons remain meaningful across changing models and tools.</a:t>
+            </a:r>
+          </a:p>
+          <a:p xmlns:a="http://schemas.openxmlformats.org/drawingml/2006/main">
+            <a:r>
+              <a:t>Explain: A matched evaluation cell fixes the task, model, harness, toolchain, software, environment, and verifier; only the skill treatment changes.</a:t>
+            </a:r>
+          </a:p>
+          <a:p xmlns:a="http://schemas.openxmlformats.org/drawingml/2006/main">
+            <a:r>
+              <a:t>Emphasize: Results from incompatible cells are reported side by side rather than pooled into a universal benchmark number.</a:t>
             </a:r>
           </a:p>
         </p:txBody>
@@ -1930,12 +1930,17 @@
           </a:p>
           <a:p xmlns:a="http://schemas.openxmlformats.org/drawingml/2006/main">
             <a:r>
+              <a:t>- https://github.com/uxlfoundation/skills</a:t>
+            </a:r>
+          </a:p>
+          <a:p xmlns:a="http://schemas.openxmlformats.org/drawingml/2006/main">
+            <a:r>
+              <a:t>- https://uxlfoundation.github.io/skills/</a:t>
+            </a:r>
+          </a:p>
+          <a:p xmlns:a="http://schemas.openxmlformats.org/drawingml/2006/main">
+            <a:r>
               <a:t>- https://github.com/uxlfoundation/skills/blob/main/skills.yaml</a:t>
-            </a:r>
-          </a:p>
-          <a:p xmlns:a="http://schemas.openxmlformats.org/drawingml/2006/main">
-            <a:r>
-              <a:t>- https://github.com/uxlfoundation/skills/blob/main/evaluation/harbor/suites.json</a:t>
             </a:r>
           </a:p>
           <a:p xmlns:a="http://schemas.openxmlformats.org/drawingml/2006/main">
@@ -1945,26 +1950,6 @@
           </a:p>
           <a:p xmlns:a="http://schemas.openxmlformats.org/drawingml/2006/main">
             <a:r>
-              <a:t>- https://uxlfoundation.github.io/skills/</a:t>
-            </a:r>
-          </a:p>
-          <a:p xmlns:a="http://schemas.openxmlformats.org/drawingml/2006/main">
-            <a:r>
-              <a:t>- https://github.com/uxlfoundation/skills/blob/main/docs/evaluator-operator-guide.md</a:t>
-            </a:r>
-          </a:p>
-          <a:p xmlns:a="http://schemas.openxmlformats.org/drawingml/2006/main">
-            <a:r>
-              <a:t>- https://github.com/uxlfoundation/skills/blob/main/docs/forward-testing.md</a:t>
-            </a:r>
-          </a:p>
-          <a:p xmlns:a="http://schemas.openxmlformats.org/drawingml/2006/main">
-            <a:r>
-              <a:t>- https://github.com/uxlfoundation/skills/blob/main/docs/release-and-promotion-policy.md</a:t>
-            </a:r>
-          </a:p>
-          <a:p xmlns:a="http://schemas.openxmlformats.org/drawingml/2006/main">
-            <a:r>
               <a:t>[/Sources]</a:t>
             </a:r>
           </a:p>
@@ -1975,7 +1960,22 @@
           </a:p>
           <a:p xmlns:a="http://schemas.openxmlformats.org/drawingml/2006/main">
             <a:r>
-              <a:t>Speaker cue: Maintainer pushback is expected — and the answer is scoped evidence</a:t>
+              <a:t>Presenter guidance</a:t>
+            </a:r>
+          </a:p>
+          <a:p xmlns:a="http://schemas.openxmlformats.org/drawingml/2006/main">
+            <a:r>
+              <a:t>Purpose: Address expected questions about model, harness, and version coverage.</a:t>
+            </a:r>
+          </a:p>
+          <a:p xmlns:a="http://schemas.openxmlformats.org/drawingml/2006/main">
+            <a:r>
+              <a:t>Explain: The project uses representative risk-based cells, publishes untested gaps, re-runs affected cells after material changes, and uses hidden checks and negative controls to limit overfitting.</a:t>
+            </a:r>
+          </a:p>
+          <a:p xmlns:a="http://schemas.openxmlformats.org/drawingml/2006/main">
+            <a:r>
+              <a:t>Emphasize: When every treatment passes, the task remains smoke coverage and supports no claim of skill lift.</a:t>
             </a:r>
           </a:p>
         </p:txBody>
@@ -2011,7 +2011,7 @@
     <p:bg>
       <p:bgPr>
         <a:blipFill xmlns:a="http://schemas.openxmlformats.org/drawingml/2006/main">
-          <a:blip xmlns:r="http://schemas.openxmlformats.org/officeDocument/2006/relationships" r:embed="R8bef3cc9f43d4e4a">
+          <a:blip xmlns:r="http://schemas.openxmlformats.org/officeDocument/2006/relationships" r:embed="Rbc4335f8ba014eff">
             <a:alphaModFix/>
           </a:blip>
           <a:stretch>
@@ -2446,7 +2446,7 @@
           <p:nvPr/>
         </p:nvPicPr>
         <p:blipFill rotWithShape="1">
-          <a:blip xmlns:r="http://schemas.openxmlformats.org/officeDocument/2006/relationships" xmlns:a="http://schemas.openxmlformats.org/drawingml/2006/main" r:embed="Rd30caa5cbe1f41de">
+          <a:blip xmlns:r="http://schemas.openxmlformats.org/officeDocument/2006/relationships" xmlns:a="http://schemas.openxmlformats.org/drawingml/2006/main" r:embed="R8fd3c13efd7e4b28">
             <a:alphaModFix/>
           </a:blip>
           <a:srcRect xmlns:a="http://schemas.openxmlformats.org/drawingml/2006/main" l="0" t="0" r="0" b="0"/>
@@ -2476,7 +2476,7 @@
     <p:bg>
       <p:bgPr>
         <a:blipFill xmlns:a="http://schemas.openxmlformats.org/drawingml/2006/main">
-          <a:blip xmlns:r="http://schemas.openxmlformats.org/officeDocument/2006/relationships" r:embed="Rf4d09a2fc6594a24">
+          <a:blip xmlns:r="http://schemas.openxmlformats.org/officeDocument/2006/relationships" r:embed="R71ffa13f9b7342f2">
             <a:alphaModFix/>
           </a:blip>
           <a:stretch>
@@ -3510,7 +3510,7 @@
           <p:nvPr/>
         </p:nvPicPr>
         <p:blipFill rotWithShape="1">
-          <a:blip xmlns:r="http://schemas.openxmlformats.org/officeDocument/2006/relationships" xmlns:a="http://schemas.openxmlformats.org/drawingml/2006/main" r:embed="R6ecd06b6a01b4aab">
+          <a:blip xmlns:r="http://schemas.openxmlformats.org/officeDocument/2006/relationships" xmlns:a="http://schemas.openxmlformats.org/drawingml/2006/main" r:embed="R7d2c1878496e4783">
             <a:alphaModFix/>
           </a:blip>
           <a:srcRect xmlns:a="http://schemas.openxmlformats.org/drawingml/2006/main" l="0" t="0" r="0" b="0"/>
@@ -4534,7 +4534,7 @@
           <p:nvPr/>
         </p:nvPicPr>
         <p:blipFill rotWithShape="1">
-          <a:blip xmlns:r="http://schemas.openxmlformats.org/officeDocument/2006/relationships" xmlns:a="http://schemas.openxmlformats.org/drawingml/2006/main" r:embed="R74739ae64f814862">
+          <a:blip xmlns:r="http://schemas.openxmlformats.org/officeDocument/2006/relationships" xmlns:a="http://schemas.openxmlformats.org/drawingml/2006/main" r:embed="R705afc00db28405a">
             <a:alphaModFix/>
           </a:blip>
           <a:srcRect xmlns:a="http://schemas.openxmlformats.org/drawingml/2006/main" l="0" t="0" r="0" b="0"/>
@@ -4564,7 +4564,7 @@
     <p:bg>
       <p:bgPr>
         <a:blipFill xmlns:a="http://schemas.openxmlformats.org/drawingml/2006/main">
-          <a:blip xmlns:r="http://schemas.openxmlformats.org/officeDocument/2006/relationships" r:embed="Rcb5d5643b1814a6b">
+          <a:blip xmlns:r="http://schemas.openxmlformats.org/officeDocument/2006/relationships" r:embed="Rdbc63df2f4ae4f13">
             <a:alphaModFix/>
           </a:blip>
           <a:stretch>
@@ -5838,7 +5838,7 @@
           <p:nvPr/>
         </p:nvPicPr>
         <p:blipFill rotWithShape="1">
-          <a:blip xmlns:r="http://schemas.openxmlformats.org/officeDocument/2006/relationships" xmlns:a="http://schemas.openxmlformats.org/drawingml/2006/main" r:embed="R52b558c63907415a">
+          <a:blip xmlns:r="http://schemas.openxmlformats.org/officeDocument/2006/relationships" xmlns:a="http://schemas.openxmlformats.org/drawingml/2006/main" r:embed="R40f8b8df7ad54643">
             <a:alphaModFix/>
           </a:blip>
           <a:srcRect xmlns:a="http://schemas.openxmlformats.org/drawingml/2006/main" l="0" t="0" r="0" b="0"/>
@@ -9082,7 +9082,7 @@
           <p:nvPr/>
         </p:nvPicPr>
         <p:blipFill rotWithShape="1">
-          <a:blip xmlns:r="http://schemas.openxmlformats.org/officeDocument/2006/relationships" xmlns:a="http://schemas.openxmlformats.org/drawingml/2006/main" r:embed="R04de7e73c9fc4767">
+          <a:blip xmlns:r="http://schemas.openxmlformats.org/officeDocument/2006/relationships" xmlns:a="http://schemas.openxmlformats.org/drawingml/2006/main" r:embed="R84fe461d062147c4">
             <a:alphaModFix/>
           </a:blip>
           <a:srcRect xmlns:a="http://schemas.openxmlformats.org/drawingml/2006/main" l="0" t="0" r="0" b="0"/>
@@ -10820,7 +10820,7 @@
           <p:nvPr/>
         </p:nvPicPr>
         <p:blipFill rotWithShape="1">
-          <a:blip xmlns:r="http://schemas.openxmlformats.org/officeDocument/2006/relationships" xmlns:a="http://schemas.openxmlformats.org/drawingml/2006/main" r:embed="Rf9640843d37a4ad4">
+          <a:blip xmlns:r="http://schemas.openxmlformats.org/officeDocument/2006/relationships" xmlns:a="http://schemas.openxmlformats.org/drawingml/2006/main" r:embed="R1acd2b8df81a4f02">
             <a:alphaModFix/>
           </a:blip>
           <a:srcRect xmlns:a="http://schemas.openxmlformats.org/drawingml/2006/main" l="0" t="0" r="0" b="0"/>
@@ -17649,7 +17649,7 @@
     <p:bg>
       <p:bgPr>
         <a:blipFill xmlns:a="http://schemas.openxmlformats.org/drawingml/2006/main">
-          <a:blip xmlns:r="http://schemas.openxmlformats.org/officeDocument/2006/relationships" r:embed="R60a11436b932488b">
+          <a:blip xmlns:r="http://schemas.openxmlformats.org/officeDocument/2006/relationships" r:embed="Rd16b33908d9c4ddf">
             <a:alphaModFix/>
           </a:blip>
           <a:stretch>
@@ -18084,7 +18084,7 @@
           <p:nvPr/>
         </p:nvPicPr>
         <p:blipFill rotWithShape="1">
-          <a:blip xmlns:r="http://schemas.openxmlformats.org/officeDocument/2006/relationships" xmlns:a="http://schemas.openxmlformats.org/drawingml/2006/main" r:embed="R9ac842dc5c25409e">
+          <a:blip xmlns:r="http://schemas.openxmlformats.org/officeDocument/2006/relationships" xmlns:a="http://schemas.openxmlformats.org/drawingml/2006/main" r:embed="R9ed5f2104a414639">
             <a:alphaModFix/>
           </a:blip>
           <a:srcRect xmlns:a="http://schemas.openxmlformats.org/drawingml/2006/main" l="0" t="0" r="0" b="0"/>
@@ -18114,7 +18114,7 @@
     <p:bg>
       <p:bgPr>
         <a:blipFill xmlns:a="http://schemas.openxmlformats.org/drawingml/2006/main">
-          <a:blip xmlns:r="http://schemas.openxmlformats.org/officeDocument/2006/relationships" r:embed="R6a9952010a4d41c9">
+          <a:blip xmlns:r="http://schemas.openxmlformats.org/officeDocument/2006/relationships" r:embed="R439042e51ebd4600">
             <a:alphaModFix/>
           </a:blip>
           <a:stretch>
@@ -18747,7 +18747,7 @@
           <p:nvPr/>
         </p:nvPicPr>
         <p:blipFill rotWithShape="1">
-          <a:blip xmlns:r="http://schemas.openxmlformats.org/officeDocument/2006/relationships" xmlns:a="http://schemas.openxmlformats.org/drawingml/2006/main" r:embed="Rf9e87fbfa6b44e0d">
+          <a:blip xmlns:r="http://schemas.openxmlformats.org/officeDocument/2006/relationships" xmlns:a="http://schemas.openxmlformats.org/drawingml/2006/main" r:embed="R8068d701800c4542">
             <a:alphaModFix/>
           </a:blip>
           <a:srcRect xmlns:a="http://schemas.openxmlformats.org/drawingml/2006/main" l="0" t="0" r="0" b="0"/>
@@ -19207,7 +19207,7 @@
     <p:bg>
       <p:bgPr>
         <a:blipFill xmlns:a="http://schemas.openxmlformats.org/drawingml/2006/main">
-          <a:blip xmlns:r="http://schemas.openxmlformats.org/officeDocument/2006/relationships" r:embed="Rdbeffd5e5bb3403d">
+          <a:blip xmlns:r="http://schemas.openxmlformats.org/officeDocument/2006/relationships" r:embed="Ra5d2f23cd4064266">
             <a:alphaModFix/>
           </a:blip>
           <a:stretch>
@@ -19840,7 +19840,7 @@
           <p:nvPr/>
         </p:nvPicPr>
         <p:blipFill rotWithShape="1">
-          <a:blip xmlns:r="http://schemas.openxmlformats.org/officeDocument/2006/relationships" xmlns:a="http://schemas.openxmlformats.org/drawingml/2006/main" r:embed="Re370fd911c514430">
+          <a:blip xmlns:r="http://schemas.openxmlformats.org/officeDocument/2006/relationships" xmlns:a="http://schemas.openxmlformats.org/drawingml/2006/main" r:embed="Rcc4caee35fa14e8f">
             <a:alphaModFix/>
           </a:blip>
           <a:srcRect xmlns:a="http://schemas.openxmlformats.org/drawingml/2006/main" l="0" t="0" r="0" b="0"/>
@@ -22496,7 +22496,7 @@
           <p:nvPr/>
         </p:nvPicPr>
         <p:blipFill rotWithShape="1">
-          <a:blip xmlns:r="http://schemas.openxmlformats.org/officeDocument/2006/relationships" xmlns:a="http://schemas.openxmlformats.org/drawingml/2006/main" r:embed="R6509b6dc05384064">
+          <a:blip xmlns:r="http://schemas.openxmlformats.org/officeDocument/2006/relationships" xmlns:a="http://schemas.openxmlformats.org/drawingml/2006/main" r:embed="R7839a01b43b64def">
             <a:alphaModFix/>
           </a:blip>
           <a:srcRect xmlns:a="http://schemas.openxmlformats.org/drawingml/2006/main" l="0" t="0" r="0" b="0"/>
@@ -22526,7 +22526,7 @@
     <p:bg>
       <p:bgPr>
         <a:blipFill xmlns:a="http://schemas.openxmlformats.org/drawingml/2006/main">
-          <a:blip xmlns:r="http://schemas.openxmlformats.org/officeDocument/2006/relationships" r:embed="R4d844c342640436e">
+          <a:blip xmlns:r="http://schemas.openxmlformats.org/officeDocument/2006/relationships" r:embed="Rc1c26d0315e14eab">
             <a:alphaModFix/>
           </a:blip>
           <a:stretch>
@@ -23370,7 +23370,7 @@
           <p:nvPr/>
         </p:nvPicPr>
         <p:blipFill rotWithShape="1">
-          <a:blip xmlns:r="http://schemas.openxmlformats.org/officeDocument/2006/relationships" xmlns:a="http://schemas.openxmlformats.org/drawingml/2006/main" r:embed="Raf0d449b0506427b">
+          <a:blip xmlns:r="http://schemas.openxmlformats.org/officeDocument/2006/relationships" xmlns:a="http://schemas.openxmlformats.org/drawingml/2006/main" r:embed="R48a2c859cad44554">
             <a:alphaModFix/>
           </a:blip>
           <a:srcRect xmlns:a="http://schemas.openxmlformats.org/drawingml/2006/main" l="0" t="0" r="0" b="0"/>
@@ -23400,7 +23400,7 @@
     <p:bg>
       <p:bgPr>
         <a:blipFill xmlns:a="http://schemas.openxmlformats.org/drawingml/2006/main">
-          <a:blip xmlns:r="http://schemas.openxmlformats.org/officeDocument/2006/relationships" r:embed="Ref1159f7ed594710">
+          <a:blip xmlns:r="http://schemas.openxmlformats.org/officeDocument/2006/relationships" r:embed="R73b8fa78c8a9429f">
             <a:alphaModFix/>
           </a:blip>
           <a:stretch>
@@ -24348,7 +24348,7 @@
           <p:nvPr/>
         </p:nvPicPr>
         <p:blipFill rotWithShape="1">
-          <a:blip xmlns:r="http://schemas.openxmlformats.org/officeDocument/2006/relationships" xmlns:a="http://schemas.openxmlformats.org/drawingml/2006/main" r:embed="R09dda9d4d282470e">
+          <a:blip xmlns:r="http://schemas.openxmlformats.org/officeDocument/2006/relationships" xmlns:a="http://schemas.openxmlformats.org/drawingml/2006/main" r:embed="R2dfa46cff5d94014">
             <a:alphaModFix/>
           </a:blip>
           <a:srcRect xmlns:a="http://schemas.openxmlformats.org/drawingml/2006/main" l="0" t="0" r="0" b="0"/>
@@ -24378,7 +24378,7 @@
     <p:bg>
       <p:bgPr>
         <a:blipFill xmlns:a="http://schemas.openxmlformats.org/drawingml/2006/main">
-          <a:blip xmlns:r="http://schemas.openxmlformats.org/officeDocument/2006/relationships" r:embed="R646c25ca04454f95">
+          <a:blip xmlns:r="http://schemas.openxmlformats.org/officeDocument/2006/relationships" r:embed="R9ca7cca064d545cb">
             <a:alphaModFix/>
           </a:blip>
           <a:stretch>
@@ -24839,7 +24839,7 @@
           <p:nvPr/>
         </p:nvPicPr>
         <p:blipFill rotWithShape="1">
-          <a:blip xmlns:r="http://schemas.openxmlformats.org/officeDocument/2006/relationships" xmlns:a="http://schemas.openxmlformats.org/drawingml/2006/main" r:embed="Rc4b4c52372eb4949">
+          <a:blip xmlns:r="http://schemas.openxmlformats.org/officeDocument/2006/relationships" xmlns:a="http://schemas.openxmlformats.org/drawingml/2006/main" r:embed="Raf2f60684a464903">
             <a:alphaModFix/>
           </a:blip>
           <a:srcRect xmlns:a="http://schemas.openxmlformats.org/drawingml/2006/main" l="0" t="0" r="0" b="0"/>
@@ -26551,22 +26551,22 @@
   </p:cSld>
   <p:clrMap bg1="lt1" tx1="dk1" bg2="dk2" tx2="lt2" accent1="accent1" accent2="accent2" accent3="accent3" accent4="accent4" accent5="accent5" accent6="accent6" hlink="hlink" folHlink="folHlink"/>
   <p:sldLayoutIdLst>
-    <p:sldLayoutId xmlns:r="http://schemas.openxmlformats.org/officeDocument/2006/relationships" id="2147483649" r:id="Rd10ee9849fc4479e"/>
-    <p:sldLayoutId xmlns:r="http://schemas.openxmlformats.org/officeDocument/2006/relationships" id="2147483650" r:id="R77a6cf2775034798"/>
-    <p:sldLayoutId xmlns:r="http://schemas.openxmlformats.org/officeDocument/2006/relationships" id="2147483651" r:id="R096a7d67ee5c498b"/>
-    <p:sldLayoutId xmlns:r="http://schemas.openxmlformats.org/officeDocument/2006/relationships" id="2147483652" r:id="R98fda9fa94314b8a"/>
-    <p:sldLayoutId xmlns:r="http://schemas.openxmlformats.org/officeDocument/2006/relationships" id="2147483653" r:id="R688580b968774fe2"/>
-    <p:sldLayoutId xmlns:r="http://schemas.openxmlformats.org/officeDocument/2006/relationships" id="2147483654" r:id="R01cf9527fe8942af"/>
-    <p:sldLayoutId xmlns:r="http://schemas.openxmlformats.org/officeDocument/2006/relationships" id="2147483655" r:id="R988ce7b473714c83"/>
-    <p:sldLayoutId xmlns:r="http://schemas.openxmlformats.org/officeDocument/2006/relationships" id="2147483656" r:id="R7cac4b40260048c5"/>
-    <p:sldLayoutId xmlns:r="http://schemas.openxmlformats.org/officeDocument/2006/relationships" id="2147483657" r:id="Rf7828bdeb95f4df2"/>
-    <p:sldLayoutId xmlns:r="http://schemas.openxmlformats.org/officeDocument/2006/relationships" id="2147483658" r:id="R62ea9e08b5c945d2"/>
-    <p:sldLayoutId xmlns:r="http://schemas.openxmlformats.org/officeDocument/2006/relationships" id="2147483659" r:id="R144ca351b1c44527"/>
-    <p:sldLayoutId xmlns:r="http://schemas.openxmlformats.org/officeDocument/2006/relationships" id="2147483660" r:id="R0bc091b5287b4d88"/>
-    <p:sldLayoutId xmlns:r="http://schemas.openxmlformats.org/officeDocument/2006/relationships" id="2147483661" r:id="Rbc85b45604c74c6f"/>
-    <p:sldLayoutId xmlns:r="http://schemas.openxmlformats.org/officeDocument/2006/relationships" id="2147483662" r:id="R3ec658b12db44af9"/>
-    <p:sldLayoutId xmlns:r="http://schemas.openxmlformats.org/officeDocument/2006/relationships" id="2147483663" r:id="R335978e3ebda45dc"/>
-    <p:sldLayoutId xmlns:r="http://schemas.openxmlformats.org/officeDocument/2006/relationships" id="2147483664" r:id="Rfb2fb120c99a407b"/>
+    <p:sldLayoutId xmlns:r="http://schemas.openxmlformats.org/officeDocument/2006/relationships" id="2147483649" r:id="R17abb8ea66794544"/>
+    <p:sldLayoutId xmlns:r="http://schemas.openxmlformats.org/officeDocument/2006/relationships" id="2147483650" r:id="R20356903fb7e4b24"/>
+    <p:sldLayoutId xmlns:r="http://schemas.openxmlformats.org/officeDocument/2006/relationships" id="2147483651" r:id="R5ddb224287734f0e"/>
+    <p:sldLayoutId xmlns:r="http://schemas.openxmlformats.org/officeDocument/2006/relationships" id="2147483652" r:id="R2bf7b0ea0ad84c04"/>
+    <p:sldLayoutId xmlns:r="http://schemas.openxmlformats.org/officeDocument/2006/relationships" id="2147483653" r:id="R402b2159696b4bbb"/>
+    <p:sldLayoutId xmlns:r="http://schemas.openxmlformats.org/officeDocument/2006/relationships" id="2147483654" r:id="R9f4423ea13f94bc7"/>
+    <p:sldLayoutId xmlns:r="http://schemas.openxmlformats.org/officeDocument/2006/relationships" id="2147483655" r:id="Rfa73453248b14e0b"/>
+    <p:sldLayoutId xmlns:r="http://schemas.openxmlformats.org/officeDocument/2006/relationships" id="2147483656" r:id="Rd7593a5e32fb4a30"/>
+    <p:sldLayoutId xmlns:r="http://schemas.openxmlformats.org/officeDocument/2006/relationships" id="2147483657" r:id="Ra37b5cc3885848d0"/>
+    <p:sldLayoutId xmlns:r="http://schemas.openxmlformats.org/officeDocument/2006/relationships" id="2147483658" r:id="R0b8a38dc6d2e4cca"/>
+    <p:sldLayoutId xmlns:r="http://schemas.openxmlformats.org/officeDocument/2006/relationships" id="2147483659" r:id="Rd91af94e57ff467f"/>
+    <p:sldLayoutId xmlns:r="http://schemas.openxmlformats.org/officeDocument/2006/relationships" id="2147483660" r:id="Ra3861d8fd867422a"/>
+    <p:sldLayoutId xmlns:r="http://schemas.openxmlformats.org/officeDocument/2006/relationships" id="2147483661" r:id="R6d0cce95073e47b6"/>
+    <p:sldLayoutId xmlns:r="http://schemas.openxmlformats.org/officeDocument/2006/relationships" id="2147483662" r:id="R63f36adc71f14636"/>
+    <p:sldLayoutId xmlns:r="http://schemas.openxmlformats.org/officeDocument/2006/relationships" id="2147483663" r:id="R774be49b7abf4733"/>
+    <p:sldLayoutId xmlns:r="http://schemas.openxmlformats.org/officeDocument/2006/relationships" id="2147483664" r:id="R9cf0b83439b6449d"/>
   </p:sldLayoutIdLst>
   <p:hf hdr="0" ftr="0" dt="0"/>
   <p:txStyles>
@@ -28759,7 +28759,7 @@
           <p:nvPr/>
         </p:nvPicPr>
         <p:blipFill rotWithShape="1">
-          <a:blip xmlns:r="http://schemas.openxmlformats.org/officeDocument/2006/relationships" xmlns:a="http://schemas.openxmlformats.org/drawingml/2006/main" r:embed="R4df3fe1a35414db2">
+          <a:blip xmlns:r="http://schemas.openxmlformats.org/officeDocument/2006/relationships" xmlns:a="http://schemas.openxmlformats.org/drawingml/2006/main" r:embed="R2bcb83a2e8214e4c">
             <a:alphaModFix/>
           </a:blip>
           <a:srcRect xmlns:a="http://schemas.openxmlformats.org/drawingml/2006/main" l="0" t="0" r="0" b="0"/>
@@ -28782,19 +28782,19 @@
   </p:cSld>
   <p:clrMap bg1="lt1" tx1="dk1" bg2="dk2" tx2="lt2" accent1="accent1" accent2="accent2" accent3="accent3" accent4="accent4" accent5="accent5" accent6="accent6" hlink="hlink" folHlink="folHlink"/>
   <p:sldLayoutIdLst>
-    <p:sldLayoutId xmlns:r="http://schemas.openxmlformats.org/officeDocument/2006/relationships" id="2147483666" r:id="R9b1eee25ff6d434a"/>
-    <p:sldLayoutId xmlns:r="http://schemas.openxmlformats.org/officeDocument/2006/relationships" id="2147483667" r:id="R46d9f1971a064380"/>
-    <p:sldLayoutId xmlns:r="http://schemas.openxmlformats.org/officeDocument/2006/relationships" id="2147483668" r:id="Re2992fc45e5344e2"/>
-    <p:sldLayoutId xmlns:r="http://schemas.openxmlformats.org/officeDocument/2006/relationships" id="2147483669" r:id="Rcf1b9ee0c9dc4478"/>
-    <p:sldLayoutId xmlns:r="http://schemas.openxmlformats.org/officeDocument/2006/relationships" id="2147483670" r:id="R93708b4e417b48fc"/>
-    <p:sldLayoutId xmlns:r="http://schemas.openxmlformats.org/officeDocument/2006/relationships" id="2147483671" r:id="Rc1e4906cc01549c5"/>
-    <p:sldLayoutId xmlns:r="http://schemas.openxmlformats.org/officeDocument/2006/relationships" id="2147483672" r:id="Rc541e9182b7c45d5"/>
-    <p:sldLayoutId xmlns:r="http://schemas.openxmlformats.org/officeDocument/2006/relationships" id="2147483673" r:id="R636e123a16a743a3"/>
-    <p:sldLayoutId xmlns:r="http://schemas.openxmlformats.org/officeDocument/2006/relationships" id="2147483674" r:id="R567002c9e0414aba"/>
-    <p:sldLayoutId xmlns:r="http://schemas.openxmlformats.org/officeDocument/2006/relationships" id="2147483675" r:id="R0f0e2c730a694fd9"/>
-    <p:sldLayoutId xmlns:r="http://schemas.openxmlformats.org/officeDocument/2006/relationships" id="2147483676" r:id="Ra130e52dc9c94b8a"/>
-    <p:sldLayoutId xmlns:r="http://schemas.openxmlformats.org/officeDocument/2006/relationships" id="2147483677" r:id="R540e9428dfd8491d"/>
-    <p:sldLayoutId xmlns:r="http://schemas.openxmlformats.org/officeDocument/2006/relationships" id="2147483678" r:id="Raec0c8e0a6d74ebc"/>
+    <p:sldLayoutId xmlns:r="http://schemas.openxmlformats.org/officeDocument/2006/relationships" id="2147483666" r:id="Rf24dbd4f5fd24783"/>
+    <p:sldLayoutId xmlns:r="http://schemas.openxmlformats.org/officeDocument/2006/relationships" id="2147483667" r:id="R861dc3cb110b48bf"/>
+    <p:sldLayoutId xmlns:r="http://schemas.openxmlformats.org/officeDocument/2006/relationships" id="2147483668" r:id="R9b59129bdade45f5"/>
+    <p:sldLayoutId xmlns:r="http://schemas.openxmlformats.org/officeDocument/2006/relationships" id="2147483669" r:id="R87c52f6fbeec46e3"/>
+    <p:sldLayoutId xmlns:r="http://schemas.openxmlformats.org/officeDocument/2006/relationships" id="2147483670" r:id="R5735fcac791f487a"/>
+    <p:sldLayoutId xmlns:r="http://schemas.openxmlformats.org/officeDocument/2006/relationships" id="2147483671" r:id="R41a5c45be7d84f91"/>
+    <p:sldLayoutId xmlns:r="http://schemas.openxmlformats.org/officeDocument/2006/relationships" id="2147483672" r:id="R82c9ec545124407e"/>
+    <p:sldLayoutId xmlns:r="http://schemas.openxmlformats.org/officeDocument/2006/relationships" id="2147483673" r:id="R540a4fc3bf1547e1"/>
+    <p:sldLayoutId xmlns:r="http://schemas.openxmlformats.org/officeDocument/2006/relationships" id="2147483674" r:id="Rf104f111a57a4e00"/>
+    <p:sldLayoutId xmlns:r="http://schemas.openxmlformats.org/officeDocument/2006/relationships" id="2147483675" r:id="R8de3c0e9faa44c6d"/>
+    <p:sldLayoutId xmlns:r="http://schemas.openxmlformats.org/officeDocument/2006/relationships" id="2147483676" r:id="Rcf39b738394a48d4"/>
+    <p:sldLayoutId xmlns:r="http://schemas.openxmlformats.org/officeDocument/2006/relationships" id="2147483677" r:id="R1f13aae9d46247e0"/>
+    <p:sldLayoutId xmlns:r="http://schemas.openxmlformats.org/officeDocument/2006/relationships" id="2147483678" r:id="R952cf4633b524905"/>
   </p:sldLayoutIdLst>
   <p:hf hdr="0" ftr="0" dt="0"/>
   <p:txStyles>
@@ -30241,7 +30241,7 @@
           <p:nvPr/>
         </p:nvPicPr>
         <p:blipFill>
-          <a:blip xmlns:r="http://schemas.openxmlformats.org/officeDocument/2006/relationships" xmlns:a="http://schemas.openxmlformats.org/drawingml/2006/main" r:embed="R72c8fc6b2bff4551"/>
+          <a:blip xmlns:r="http://schemas.openxmlformats.org/officeDocument/2006/relationships" xmlns:a="http://schemas.openxmlformats.org/drawingml/2006/main" r:embed="Rbd8e28afd13c4616"/>
           <a:stretch xmlns:a="http://schemas.openxmlformats.org/drawingml/2006/main"/>
         </p:blipFill>
         <p:spPr>
@@ -33061,7 +33061,7 @@
           <p:nvPr/>
         </p:nvPicPr>
         <p:blipFill>
-          <a:blip xmlns:r="http://schemas.openxmlformats.org/officeDocument/2006/relationships" xmlns:a="http://schemas.openxmlformats.org/drawingml/2006/main" r:embed="R568997c70bd74330"/>
+          <a:blip xmlns:r="http://schemas.openxmlformats.org/officeDocument/2006/relationships" xmlns:a="http://schemas.openxmlformats.org/drawingml/2006/main" r:embed="R19d557c00ca84418"/>
           <a:stretch xmlns:a="http://schemas.openxmlformats.org/drawingml/2006/main"/>
         </p:blipFill>
         <p:spPr>
@@ -33175,7 +33175,7 @@
           <p:nvPr/>
         </p:nvPicPr>
         <p:blipFill>
-          <a:blip xmlns:r="http://schemas.openxmlformats.org/officeDocument/2006/relationships" xmlns:a="http://schemas.openxmlformats.org/drawingml/2006/main" r:embed="Re9971616fcb647c2"/>
+          <a:blip xmlns:r="http://schemas.openxmlformats.org/officeDocument/2006/relationships" xmlns:a="http://schemas.openxmlformats.org/drawingml/2006/main" r:embed="R6e33b4d11974418f"/>
           <a:stretch xmlns:a="http://schemas.openxmlformats.org/drawingml/2006/main"/>
         </p:blipFill>
         <p:spPr>
@@ -33197,7 +33197,7 @@
           <p:nvPr/>
         </p:nvPicPr>
         <p:blipFill>
-          <a:blip xmlns:r="http://schemas.openxmlformats.org/officeDocument/2006/relationships" xmlns:a="http://schemas.openxmlformats.org/drawingml/2006/main" r:embed="R1ee3559e1c064f44"/>
+          <a:blip xmlns:r="http://schemas.openxmlformats.org/officeDocument/2006/relationships" xmlns:a="http://schemas.openxmlformats.org/drawingml/2006/main" r:embed="R6019d45178724871"/>
           <a:stretch xmlns:a="http://schemas.openxmlformats.org/drawingml/2006/main"/>
         </p:blipFill>
         <p:spPr>
@@ -33433,7 +33433,7 @@
           <p:nvPr/>
         </p:nvPicPr>
         <p:blipFill>
-          <a:blip xmlns:r="http://schemas.openxmlformats.org/officeDocument/2006/relationships" xmlns:a="http://schemas.openxmlformats.org/drawingml/2006/main" r:embed="R5281d3996e034655"/>
+          <a:blip xmlns:r="http://schemas.openxmlformats.org/officeDocument/2006/relationships" xmlns:a="http://schemas.openxmlformats.org/drawingml/2006/main" r:embed="Rf939da21bd2a4f73"/>
           <a:stretch xmlns:a="http://schemas.openxmlformats.org/drawingml/2006/main"/>
         </p:blipFill>
         <p:spPr>
